--- a/3.2 Hoofdstuk 2 - Marktvormen en hun marktevenwicht/3.2.5 Paragraaf 5 - Monopolistische concurrentie/2. Leren/3.2.5 Monopolistische concurrentie – presentatie.pptx
+++ b/3.2 Hoofdstuk 2 - Marktvormen en hun marktevenwicht/3.2.5 Paragraaf 5 - Monopolistische concurrentie/2. Leren/3.2.5 Monopolistische concurrentie – presentatie.pptx
@@ -2195,6 +2195,10 @@
             <a:prstDash val="solid"/>
           </a:ln>
         </p:spPr>
+        <p:txBody>
+          <a:bodyPr/>
+          <a:p/>
+        </p:txBody>
       </p:sp>
       <p:sp>
         <p:nvSpPr>
@@ -2215,6 +2219,10 @@
           </a:solidFill>
           <a:ln/>
         </p:spPr>
+        <p:txBody>
+          <a:bodyPr/>
+          <a:p/>
+        </p:txBody>
       </p:sp>
       <p:sp>
         <p:nvSpPr>
@@ -2283,6 +2291,10 @@
             </a:outerShdw>
           </a:effectLst>
         </p:spPr>
+        <p:txBody>
+          <a:bodyPr/>
+          <a:p/>
+        </p:txBody>
       </p:sp>
       <p:sp>
         <p:nvSpPr>
@@ -2303,6 +2315,10 @@
           </a:solidFill>
           <a:ln/>
         </p:spPr>
+        <p:txBody>
+          <a:bodyPr/>
+          <a:p/>
+        </p:txBody>
       </p:sp>
       <p:sp>
         <p:nvSpPr>
@@ -2531,6 +2547,10 @@
             </a:outerShdw>
           </a:effectLst>
         </p:spPr>
+        <p:txBody>
+          <a:bodyPr/>
+          <a:p/>
+        </p:txBody>
       </p:sp>
       <p:sp>
         <p:nvSpPr>
@@ -2551,6 +2571,10 @@
           </a:solidFill>
           <a:ln/>
         </p:spPr>
+        <p:txBody>
+          <a:bodyPr/>
+          <a:p/>
+        </p:txBody>
       </p:sp>
       <p:sp>
         <p:nvSpPr>
@@ -2658,6 +2682,10 @@
             </a:outerShdw>
           </a:effectLst>
         </p:spPr>
+        <p:txBody>
+          <a:bodyPr/>
+          <a:p/>
+        </p:txBody>
       </p:sp>
       <p:sp>
         <p:nvSpPr>
@@ -2678,6 +2706,10 @@
           </a:solidFill>
           <a:ln/>
         </p:spPr>
+        <p:txBody>
+          <a:bodyPr/>
+          <a:p/>
+        </p:txBody>
       </p:sp>
       <p:sp>
         <p:nvSpPr>
@@ -2785,6 +2817,10 @@
             </a:outerShdw>
           </a:effectLst>
         </p:spPr>
+        <p:txBody>
+          <a:bodyPr/>
+          <a:p/>
+        </p:txBody>
       </p:sp>
       <p:sp>
         <p:nvSpPr>
@@ -2805,6 +2841,10 @@
           </a:solidFill>
           <a:ln/>
         </p:spPr>
+        <p:txBody>
+          <a:bodyPr/>
+          <a:p/>
+        </p:txBody>
       </p:sp>
       <p:sp>
         <p:nvSpPr>
@@ -3029,6 +3069,8 @@
               </a:rPr>
               <a:t>Heterogeen product, veel aanbieders, lage drempels</a:t>
             </a:r>
+          </a:p>
+          <a:p>
             <a:pPr algn="l" marL="342900" indent="-342900">
               <a:lnSpc>
                 <a:spcPct val="160000"/>
@@ -3050,6 +3092,8 @@
               </a:rPr>
               <a:t>Elke aanbieder heeft een dalende vraaglijn</a:t>
             </a:r>
+          </a:p>
+          <a:p>
             <a:pPr algn="l" marL="342900" indent="-342900">
               <a:lnSpc>
                 <a:spcPct val="160000"/>
@@ -3071,6 +3115,8 @@
               </a:rPr>
               <a:t>Korte termijn: winst mogelijk (MO = MK, p &gt; GTK)</a:t>
             </a:r>
+          </a:p>
+          <a:p>
             <a:pPr algn="l" marL="342900" indent="-342900">
               <a:lnSpc>
                 <a:spcPct val="160000"/>
@@ -3092,6 +3138,8 @@
               </a:rPr>
               <a:t>Lange termijn: toetreding → winst verdwijnt (V raakt GTK)</a:t>
             </a:r>
+          </a:p>
+          <a:p>
             <a:pPr algn="l" marL="342900" indent="-342900">
               <a:lnSpc>
                 <a:spcPct val="160000"/>
@@ -3113,6 +3161,8 @@
               </a:rPr>
               <a:t>Productie links van GTK-minimum → overcapaciteit</a:t>
             </a:r>
+          </a:p>
+          <a:p>
             <a:pPr algn="l" marL="342900" indent="-342900">
               <a:lnSpc>
                 <a:spcPct val="160000"/>
@@ -3134,7 +3184,6 @@
               </a:rPr>
               <a:t>Marktaandeel = eigen afzet / totale afzet × 100%</a:t>
             </a:r>
-            <a:endParaRPr lang="en-US" sz="1500" dirty="0"/>
           </a:p>
         </p:txBody>
       </p:sp>
@@ -3436,6 +3485,10 @@
           </a:solidFill>
           <a:ln/>
         </p:spPr>
+        <p:txBody>
+          <a:bodyPr/>
+          <a:p/>
+        </p:txBody>
       </p:sp>
       <p:sp>
         <p:nvSpPr>
@@ -3504,6 +3557,10 @@
             </a:outerShdw>
           </a:effectLst>
         </p:spPr>
+        <p:txBody>
+          <a:bodyPr/>
+          <a:p/>
+        </p:txBody>
       </p:sp>
       <p:sp>
         <p:nvSpPr>
@@ -3524,6 +3581,10 @@
           </a:solidFill>
           <a:ln/>
         </p:spPr>
+        <p:txBody>
+          <a:bodyPr/>
+          <a:p/>
+        </p:txBody>
       </p:sp>
       <p:sp>
         <p:nvSpPr>
@@ -3622,6 +3683,10 @@
           </a:solidFill>
           <a:ln/>
         </p:spPr>
+        <p:txBody>
+          <a:bodyPr/>
+          <a:p/>
+        </p:txBody>
       </p:sp>
       <p:sp>
         <p:nvSpPr>
@@ -3690,6 +3755,10 @@
             </a:outerShdw>
           </a:effectLst>
         </p:spPr>
+        <p:txBody>
+          <a:bodyPr/>
+          <a:p/>
+        </p:txBody>
       </p:sp>
       <p:sp>
         <p:nvSpPr>
@@ -3710,6 +3779,10 @@
           </a:solidFill>
           <a:ln/>
         </p:spPr>
+        <p:txBody>
+          <a:bodyPr/>
+          <a:p/>
+        </p:txBody>
       </p:sp>
       <p:sp>
         <p:nvSpPr>
@@ -3808,6 +3881,10 @@
           </a:solidFill>
           <a:ln/>
         </p:spPr>
+        <p:txBody>
+          <a:bodyPr/>
+          <a:p/>
+        </p:txBody>
       </p:sp>
       <p:sp>
         <p:nvSpPr>
@@ -3876,6 +3953,10 @@
             </a:outerShdw>
           </a:effectLst>
         </p:spPr>
+        <p:txBody>
+          <a:bodyPr/>
+          <a:p/>
+        </p:txBody>
       </p:sp>
       <p:sp>
         <p:nvSpPr>
@@ -3896,6 +3977,10 @@
           </a:solidFill>
           <a:ln/>
         </p:spPr>
+        <p:txBody>
+          <a:bodyPr/>
+          <a:p/>
+        </p:txBody>
       </p:sp>
       <p:sp>
         <p:nvSpPr>
@@ -4067,6 +4152,10 @@
             </a:outerShdw>
           </a:effectLst>
         </p:spPr>
+        <p:txBody>
+          <a:bodyPr/>
+          <a:p/>
+        </p:txBody>
       </p:sp>
       <p:sp>
         <p:nvSpPr>
@@ -4087,6 +4176,10 @@
           </a:solidFill>
           <a:ln/>
         </p:spPr>
+        <p:txBody>
+          <a:bodyPr/>
+          <a:p/>
+        </p:txBody>
       </p:sp>
       <p:sp>
         <p:nvSpPr>
@@ -4250,6 +4343,10 @@
             </a:outerShdw>
           </a:effectLst>
         </p:spPr>
+        <p:txBody>
+          <a:bodyPr/>
+          <a:p/>
+        </p:txBody>
       </p:sp>
       <p:sp>
         <p:nvSpPr>
@@ -4270,6 +4367,10 @@
           </a:solidFill>
           <a:ln/>
         </p:spPr>
+        <p:txBody>
+          <a:bodyPr/>
+          <a:p/>
+        </p:txBody>
       </p:sp>
       <p:sp>
         <p:nvSpPr>
@@ -4496,6 +4597,10 @@
             <a:prstDash val="solid"/>
           </a:ln>
         </p:spPr>
+        <p:txBody>
+          <a:bodyPr/>
+          <a:p/>
+        </p:txBody>
       </p:sp>
       <p:sp>
         <p:nvSpPr>
@@ -4581,6 +4686,10 @@
             </a:outerShdw>
           </a:effectLst>
         </p:spPr>
+        <p:txBody>
+          <a:bodyPr/>
+          <a:p/>
+        </p:txBody>
       </p:sp>
       <p:sp>
         <p:nvSpPr>
@@ -4601,6 +4710,10 @@
           </a:solidFill>
           <a:ln/>
         </p:spPr>
+        <p:txBody>
+          <a:bodyPr/>
+          <a:p/>
+        </p:txBody>
       </p:sp>
       <p:sp>
         <p:nvSpPr>
@@ -4834,6 +4947,10 @@
             </a:outerShdw>
           </a:effectLst>
         </p:spPr>
+        <p:txBody>
+          <a:bodyPr/>
+          <a:p/>
+        </p:txBody>
       </p:sp>
       <p:sp>
         <p:nvSpPr>
@@ -4985,6 +5102,10 @@
             </a:outerShdw>
           </a:effectLst>
         </p:spPr>
+        <p:txBody>
+          <a:bodyPr/>
+          <a:p/>
+        </p:txBody>
       </p:sp>
       <p:sp>
         <p:nvSpPr>
@@ -5136,6 +5257,10 @@
             </a:outerShdw>
           </a:effectLst>
         </p:spPr>
+        <p:txBody>
+          <a:bodyPr/>
+          <a:p/>
+        </p:txBody>
       </p:sp>
       <p:sp>
         <p:nvSpPr>
@@ -5287,6 +5412,10 @@
             </a:outerShdw>
           </a:effectLst>
         </p:spPr>
+        <p:txBody>
+          <a:bodyPr/>
+          <a:p/>
+        </p:txBody>
       </p:sp>
       <p:sp>
         <p:nvSpPr>
@@ -5438,6 +5567,10 @@
             </a:outerShdw>
           </a:effectLst>
         </p:spPr>
+        <p:txBody>
+          <a:bodyPr/>
+          <a:p/>
+        </p:txBody>
       </p:sp>
       <p:sp>
         <p:nvSpPr>
@@ -5614,6 +5747,10 @@
             </a:outerShdw>
           </a:effectLst>
         </p:spPr>
+        <p:txBody>
+          <a:bodyPr/>
+          <a:p/>
+        </p:txBody>
       </p:sp>
       <p:sp>
         <p:nvSpPr>
@@ -5726,6 +5863,10 @@
             </a:outerShdw>
           </a:effectLst>
         </p:spPr>
+        <p:txBody>
+          <a:bodyPr/>
+          <a:p/>
+        </p:txBody>
       </p:sp>
       <p:sp>
         <p:nvSpPr>
@@ -5838,6 +5979,10 @@
             </a:outerShdw>
           </a:effectLst>
         </p:spPr>
+        <p:txBody>
+          <a:bodyPr/>
+          <a:p/>
+        </p:txBody>
       </p:sp>
       <p:sp>
         <p:nvSpPr>
@@ -5950,6 +6095,10 @@
             </a:outerShdw>
           </a:effectLst>
         </p:spPr>
+        <p:txBody>
+          <a:bodyPr/>
+          <a:p/>
+        </p:txBody>
       </p:sp>
       <p:sp>
         <p:nvSpPr>
@@ -6119,6 +6268,10 @@
             <a:prstDash val="solid"/>
           </a:ln>
         </p:spPr>
+        <p:txBody>
+          <a:bodyPr/>
+          <a:p/>
+        </p:txBody>
       </p:sp>
       <p:sp>
         <p:nvSpPr>
@@ -6204,6 +6357,10 @@
             </a:outerShdw>
           </a:effectLst>
         </p:spPr>
+        <p:txBody>
+          <a:bodyPr/>
+          <a:p/>
+        </p:txBody>
       </p:sp>
       <p:sp>
         <p:nvSpPr>
@@ -6224,6 +6381,10 @@
           </a:solidFill>
           <a:ln/>
         </p:spPr>
+        <p:txBody>
+          <a:bodyPr/>
+          <a:p/>
+        </p:txBody>
       </p:sp>
       <p:sp>
         <p:nvSpPr>
@@ -6452,6 +6613,10 @@
             </a:outerShdw>
           </a:effectLst>
         </p:spPr>
+        <p:txBody>
+          <a:bodyPr/>
+          <a:p/>
+        </p:txBody>
       </p:sp>
       <p:sp>
         <p:nvSpPr>
@@ -6472,6 +6637,10 @@
           </a:solidFill>
           <a:ln/>
         </p:spPr>
+        <p:txBody>
+          <a:bodyPr/>
+          <a:p/>
+        </p:txBody>
       </p:sp>
       <p:sp>
         <p:nvSpPr>
@@ -6640,6 +6809,10 @@
             </a:outerShdw>
           </a:effectLst>
         </p:spPr>
+        <p:txBody>
+          <a:bodyPr/>
+          <a:p/>
+        </p:txBody>
       </p:sp>
       <p:sp>
         <p:nvSpPr>
@@ -6660,6 +6833,10 @@
           </a:solidFill>
           <a:ln/>
         </p:spPr>
+        <p:txBody>
+          <a:bodyPr/>
+          <a:p/>
+        </p:txBody>
       </p:sp>
       <p:sp>
         <p:nvSpPr>

--- a/3.2 Hoofdstuk 2 - Marktvormen en hun marktevenwicht/3.2.5 Paragraaf 5 - Monopolistische concurrentie/2. Leren/3.2.5 Monopolistische concurrentie – presentatie.pptx
+++ b/3.2 Hoofdstuk 2 - Marktvormen en hun marktevenwicht/3.2.5 Paragraaf 5 - Monopolistische concurrentie/2. Leren/3.2.5 Monopolistische concurrentie – presentatie.pptx
@@ -17,9 +17,10 @@
     <p:sldId id="265" r:id="rId11"/>
     <p:sldId id="266" r:id="rId12"/>
     <p:sldId id="267" r:id="rId13"/>
+    <p:sldId id="268" r:id="rId14"/>
   </p:sldIdLst>
   <p:notesMasterIdLst>
-    <p:notesMasterId r:id="rId14"/>
+    <p:notesMasterId r:id="rId15"/>
   </p:notesMasterIdLst>
   <p:sldSz cx="9144000" cy="5143500"/>
   <p:notesSz cx="5143500" cy="9144000"/>
@@ -513,7 +514,7 @@
           <a:p>
             <a:r>
               <a:rPr lang="en-US" dirty="0"/>
-              <a:t>Paragraaf 3.2.5: monopolistische concurrentie. Een marktvorm met veel aanbieders die heterogene producten verkopen. Denk aan restaurants, kappers, kledingmerken.</a:t>
+              <a:t>Welkom bij de les over monopolistische concurrentie. Dit is een marktvorm die kenmerken heeft van zowel volkomen concurrentie als monopolie. Denk aan markten als restaurants, kappers en kledingwinkels.</a:t>
             </a:r>
             <a:endParaRPr lang="en-US" dirty="0"/>
           </a:p>
@@ -601,7 +602,7 @@
           <a:p>
             <a:r>
               <a:rPr lang="en-US" dirty="0"/>
-              <a:t>Marktaandeel berekenen: individuele productie of afzet gedeeld door totale marktproductie, maal 100%. Simpele formule maar komt regelmatig voor in opgaven.</a:t>
+              <a:t>Vergelijking: bij volkomen concurrentie produceren bedrijven bij GTK-minimum (efficiënt). Bij MC produceren ze links van GTK-minimum: hogere prijs, lagere productie. De overcapaciteit is de prijs die we betalen voor productdifferentiatie en keuzevrijheid.</a:t>
             </a:r>
             <a:endParaRPr lang="en-US" dirty="0"/>
           </a:p>
@@ -689,7 +690,7 @@
           <a:p>
             <a:r>
               <a:rPr lang="en-US" dirty="0"/>
-              <a:t>Drie veelgemaakte fouten: MC is geen monopolie, op lange termijn verdwijnt winst maar niet concurrentie, en overcapaciteit is een afweging tegen productdifferentiatie.</a:t>
+              <a:t>Marktaandeel berekenen: eigen afzet delen door totale marktafzet, maal 100%. Het voorbeeld laat zien dat eetcafés 21,2% van de totale horecamarkt in Limburg hebben. Dit is een typisch rekenvoorbeeld voor het proefwerk.</a:t>
             </a:r>
             <a:endParaRPr lang="en-US" dirty="0"/>
           </a:p>
@@ -777,7 +778,7 @@
           <a:p>
             <a:r>
               <a:rPr lang="en-US" dirty="0"/>
-              <a:t>Samenvatting: MC combineert elementen van monopolie (eigen vraaglijn) en volkomen concurrentie (vrije toetreding, winst 0 op lange termijn). Overcapaciteit is het gevolg.</a:t>
+              <a:t>Drie veelgemaakte fouten. 1) MC is geen monopolie - er is juist veel concurrentie. 2) Op lange termijn verdwijnt winst, niet concurrentie. 3) Overcapaciteit klinkt negatief maar brengt productdifferentiatie en keuzevrijheid.</a:t>
             </a:r>
             <a:endParaRPr lang="en-US" dirty="0"/>
           </a:p>
@@ -801,6 +802,94 @@
             <a:fld id="{F7021451-1387-4CA6-816F-3879F97B5CBC}" type="slidenum">
               <a:rPr lang="en-US"/>
               <a:t>12</a:t>
+            </a:fld>
+            <a:endParaRPr lang="en-US"/>
+          </a:p>
+        </p:txBody>
+      </p:sp>
+    </p:spTree>
+    <p:extLst>
+      <p:ext uri="{BB962C8B-B14F-4D97-AF65-F5344CB8AC3E}">
+        <p14:creationId xmlns:p14="http://schemas.microsoft.com/office/powerpoint/2010/main" val="1024086991"/>
+      </p:ext>
+    </p:extLst>
+  </p:cSld>
+  <p:clrMapOvr>
+    <a:masterClrMapping/>
+  </p:clrMapOvr>
+</p:notes>
+</file>
+
+<file path=ppt/notesSlides/notesSlide13.xml><?xml version="1.0" encoding="utf-8"?>
+<p:notes xmlns:a="http://schemas.openxmlformats.org/drawingml/2006/main" xmlns:r="http://schemas.openxmlformats.org/officeDocument/2006/relationships" xmlns:p="http://schemas.openxmlformats.org/presentationml/2006/main">
+  <p:cSld>
+    <p:spTree>
+      <p:nvGrpSpPr>
+        <p:cNvPr id="1" name=""/>
+        <p:cNvGrpSpPr/>
+        <p:nvPr/>
+      </p:nvGrpSpPr>
+      <p:grpSpPr>
+        <a:xfrm>
+          <a:off x="0" y="0"/>
+          <a:ext cx="0" cy="0"/>
+          <a:chOff x="0" y="0"/>
+          <a:chExt cx="0" cy="0"/>
+        </a:xfrm>
+      </p:grpSpPr>
+      <p:sp>
+        <p:nvSpPr>
+          <p:cNvPr id="2" name="Slide Image Placeholder 1"/>
+          <p:cNvSpPr>
+            <a:spLocks noGrp="1" noRot="1" noChangeAspect="1"/>
+          </p:cNvSpPr>
+          <p:nvPr>
+            <p:ph type="sldImg"/>
+          </p:nvPr>
+        </p:nvSpPr>
+        <p:spPr/>
+      </p:sp>
+      <p:sp>
+        <p:nvSpPr>
+          <p:cNvPr id="3" name="Notes Placeholder 2"/>
+          <p:cNvSpPr>
+            <a:spLocks noGrp="1"/>
+          </p:cNvSpPr>
+          <p:nvPr>
+            <p:ph type="body" idx="1"/>
+          </p:nvPr>
+        </p:nvSpPr>
+        <p:spPr/>
+        <p:txBody>
+          <a:bodyPr/>
+          <a:lstStyle/>
+          <a:p>
+            <a:r>
+              <a:rPr lang="en-US" dirty="0"/>
+              <a:t>Samenvattingsdia. Loop de punten door en check of leerlingen alles begrijpen. Benadruk het verschil korte/lange termijn en de vergelijking met volkomen concurrentie.</a:t>
+            </a:r>
+            <a:endParaRPr lang="en-US" dirty="0"/>
+          </a:p>
+        </p:txBody>
+      </p:sp>
+      <p:sp>
+        <p:nvSpPr>
+          <p:cNvPr id="4" name="Slide Number Placeholder 3"/>
+          <p:cNvSpPr>
+            <a:spLocks noGrp="1"/>
+          </p:cNvSpPr>
+          <p:nvPr>
+            <p:ph type="sldNum" sz="quarter" idx="10"/>
+          </p:nvPr>
+        </p:nvSpPr>
+        <p:spPr/>
+        <p:txBody>
+          <a:bodyPr/>
+          <a:lstStyle/>
+          <a:p>
+            <a:fld id="{F7021451-1387-4CA6-816F-3879F97B5CBC}" type="slidenum">
+              <a:rPr lang="en-US"/>
+              <a:t>13</a:t>
             </a:fld>
             <a:endParaRPr lang="en-US"/>
           </a:p>
@@ -865,7 +954,7 @@
           <a:p>
             <a:r>
               <a:rPr lang="en-US" dirty="0"/>
-              <a:t>Zes leerdoelen: kenmerken begrijpen, winst berekenen op korte en lange termijn, vergelijken met volkomen concurrentie, marktaandeel berekenen.</a:t>
+              <a:t>Loop de leerdoelen door. Leerlingen moeten aan het eind van de les al deze punten beheersen. Benadruk dat MO = MK-berekening terugkomt van het monopolie-hoofdstuk.</a:t>
             </a:r>
             <a:endParaRPr lang="en-US" dirty="0"/>
           </a:p>
@@ -953,7 +1042,7 @@
           <a:p>
             <a:r>
               <a:rPr lang="en-US" dirty="0"/>
-              <a:t>Drie kenmerken: veel aanbieders, heterogeen product (merken, varianten), lage toetredingsdrempels. Elke aanbieder heeft zijn eigen vraaglijn doordat het product net anders is.</a:t>
+              <a:t>Drie kenmerken: heterogeen product, veel aanbieders, lage toetredingsdrempels. Vergelijk met volkomen concurrentie (homogeen) en monopolie (uniek). Het heterogene product geeft elke aanbieder een beperkte prijszettingsmacht.</a:t>
             </a:r>
             <a:endParaRPr lang="en-US" dirty="0"/>
           </a:p>
@@ -1041,7 +1130,7 @@
           <a:p>
             <a:r>
               <a:rPr lang="en-US" dirty="0"/>
-              <a:t>Heterogeen product = eigen vraaglijn. De aanbieder heeft enige marktmacht: hij kan de prijs iets verhogen zonder alle klanten te verliezen. Maar de marktmacht is beperkt door concurrenten. Bij toetreding verschuift de individuele vraaglijn naar links.</a:t>
+              <a:t>Heterogeen product = dalende vraaglijn. Elke aanbieder is een kleine monopolist op zijn eigen product. Bij toetreding worden de klanten verdeeld over meer aanbieders, dus de individuele vraaglijn schuift naar links.</a:t>
             </a:r>
             <a:endParaRPr lang="en-US" dirty="0"/>
           </a:p>
@@ -1129,7 +1218,7 @@
           <a:p>
             <a:r>
               <a:rPr lang="en-US" dirty="0"/>
-              <a:t>Korte termijn: de aanbieder kan winst maken, net als een monopolist. MO = MK geeft de optimale hoeveelheid Q*. De prijs lees je af op de vraaglijn. Winst = (p* - GTK) maal Q*.</a:t>
+              <a:t>Korte termijn: de aanbieder maximaliseert winst door MO = MK. Q* aflezen, prijs op vraaglijn bij Q*. Als p* &gt; GTK, dan is er winst. De volgende dia toont dit in een grafiek.</a:t>
             </a:r>
             <a:endParaRPr lang="en-US" dirty="0"/>
           </a:p>
@@ -1217,7 +1306,7 @@
           <a:p>
             <a:r>
               <a:rPr lang="en-US" dirty="0"/>
-              <a:t>Stap voor stap: 1) Stel MO = MK, 2) Vind Q*, 3) Lees p* af op vraaglijn, 4) Bereken GTK bij Q*, 5) Winst = (p* - GTK) maal Q*. Dit is dezelfde methode als bij monopolie.</a:t>
+              <a:t>Grafiek korte termijn. V = individuele vraaglijn (dalend). MO = marginale opbrengst (dubbele helling). MK = marginale kosten (stijgend). GTK = U-vormig. Q* bij MO=MK. Prijs aflezen op V bij Q*. Winstrechthoek: (p* - GTK) x Q*. Gearceerd vlak is de winst.</a:t>
             </a:r>
             <a:endParaRPr lang="en-US" dirty="0"/>
           </a:p>
@@ -1305,7 +1394,7 @@
           <a:p>
             <a:r>
               <a:rPr lang="en-US" dirty="0"/>
-              <a:t>Lange termijn: winst trekt nieuwe aanbieders aan. Meer aanbieders = minder vraag per aanbieder. De individuele vraaglijn verschuift naar links totdat winst = 0. Omgekeerd: bij verlies treden aanbieders uit.</a:t>
+              <a:t>Vijf stappen om winst te bepalen. Benadruk dat deze methode identiek is aan monopolie. Het verschil zit in de vorm van de vraaglijn (individueel, niet de marktvraag).</a:t>
             </a:r>
             <a:endParaRPr lang="en-US" dirty="0"/>
           </a:p>
@@ -1393,7 +1482,7 @@
           <a:p>
             <a:r>
               <a:rPr lang="en-US" dirty="0"/>
-              <a:t>Break-even: op lange termijn raakt de vraaglijn de GTK-curve. p = GTK, winst = 0. Maar de prijs is HOGER dan bij volkomen concurrentie, want er is overcapaciteit.</a:t>
+              <a:t>Lange termijn mechanisme: winst trekt toetreders aan, waardoor de individuele vraaglijn naar links schuift tot winst = 0. Omgekeerd: bij verlies treden aanbieders uit, vraaglijn schuift rechts. Evenwicht: break-even.</a:t>
             </a:r>
             <a:endParaRPr lang="en-US" dirty="0"/>
           </a:p>
@@ -1481,7 +1570,7 @@
           <a:p>
             <a:r>
               <a:rPr lang="en-US" dirty="0"/>
-              <a:t>Vergelijking met volkomen concurrentie: beide hebben winst = 0 op de lange termijn, maar bij MC is p &gt; MK (welvaartsverlies) en wordt er minder geproduceerd dan bij het GTK-minimum.</a:t>
+              <a:t>Grafiek lange termijn. De vraaglijn raakt nu de GTK-curve (tangent). p = GTK, dus winst = 0. MO = MK geeft nog steeds Q*. Let op: prijs is HOGER dan bij volkomen concurrentie, en Q* ligt LINKS van GTK-minimum (overcapaciteit).</a:t>
             </a:r>
             <a:endParaRPr lang="en-US" dirty="0"/>
           </a:p>
@@ -1981,8 +2070,8 @@
         </p:nvSpPr>
         <p:spPr>
           <a:xfrm>
-            <a:off x="640080" y="914400"/>
-            <a:ext cx="7863840" cy="2011680"/>
+            <a:off x="640080" y="1097280"/>
+            <a:ext cx="7863840" cy="1828800"/>
           </a:xfrm>
           <a:prstGeom prst="rect">
             <a:avLst/>
@@ -1991,7 +2080,7 @@
           <a:ln/>
         </p:spPr>
         <p:txBody>
-          <a:bodyPr wrap="square" rtlCol="0" anchor="ctr"/>
+          <a:bodyPr wrap="square" lIns="0" tIns="0" rIns="0" bIns="0" rtlCol="0" anchor="ctr"/>
           <a:lstStyle/>
           <a:p>
             <a:pPr indent="0" marL="0">
@@ -2047,7 +2136,7 @@
           <a:ln/>
         </p:spPr>
         <p:txBody>
-          <a:bodyPr wrap="square" rtlCol="0" anchor="ctr"/>
+          <a:bodyPr wrap="square" lIns="0" tIns="0" rIns="0" bIns="0" rtlCol="0" anchor="ctr"/>
           <a:lstStyle/>
           <a:p>
             <a:pPr indent="0" marL="0">
@@ -2086,7 +2175,7 @@
           <a:ln/>
         </p:spPr>
         <p:txBody>
-          <a:bodyPr wrap="square" rtlCol="0" anchor="ctr"/>
+          <a:bodyPr wrap="square" lIns="0" tIns="0" rIns="0" bIns="0" rtlCol="0" anchor="ctr"/>
           <a:lstStyle/>
           <a:p>
             <a:pPr indent="0" marL="0">
@@ -2150,7 +2239,7 @@
           <a:ln/>
         </p:spPr>
         <p:txBody>
-          <a:bodyPr wrap="square" rtlCol="0" anchor="ctr"/>
+          <a:bodyPr wrap="square" lIns="0" tIns="0" rIns="0" bIns="0" rtlCol="0" anchor="ctr"/>
           <a:lstStyle/>
           <a:p>
             <a:pPr indent="0" marL="0">
@@ -2165,7 +2254,7 @@
                 <a:ea typeface="Arial" pitchFamily="34" charset="-122"/>
                 <a:cs typeface="Arial" pitchFamily="34" charset="-120"/>
               </a:rPr>
-              <a:t>Marktaandeel berekenen</a:t>
+              <a:t>MC vs. volkomen concurrentie</a:t>
             </a:r>
             <a:endParaRPr lang="en-US" sz="2400" dirty="0"/>
           </a:p>
@@ -2179,108 +2268,14 @@
         </p:nvSpPr>
         <p:spPr>
           <a:xfrm>
-            <a:off x="640080" y="1051560"/>
-            <a:ext cx="7863840" cy="594360"/>
-          </a:xfrm>
-          <a:prstGeom prst="rect">
-            <a:avLst/>
-          </a:prstGeom>
-          <a:solidFill>
-            <a:srgbClr val="F7F8FA"/>
-          </a:solidFill>
-          <a:ln w="6350">
-            <a:solidFill>
-              <a:srgbClr val="CBD5E0"/>
-            </a:solidFill>
-            <a:prstDash val="solid"/>
-          </a:ln>
-        </p:spPr>
-        <p:txBody>
-          <a:bodyPr/>
-          <a:p/>
-        </p:txBody>
-      </p:sp>
-      <p:sp>
-        <p:nvSpPr>
-          <p:cNvPr id="4" name="Shape 2"/>
-          <p:cNvSpPr/>
-          <p:nvPr/>
-        </p:nvSpPr>
-        <p:spPr>
-          <a:xfrm>
-            <a:off x="640080" y="1051560"/>
-            <a:ext cx="54864" cy="594360"/>
-          </a:xfrm>
-          <a:prstGeom prst="rect">
-            <a:avLst/>
-          </a:prstGeom>
-          <a:solidFill>
-            <a:srgbClr val="1A5276"/>
-          </a:solidFill>
-          <a:ln/>
-        </p:spPr>
-        <p:txBody>
-          <a:bodyPr/>
-          <a:p/>
-        </p:txBody>
-      </p:sp>
-      <p:sp>
-        <p:nvSpPr>
-          <p:cNvPr id="5" name="Text 3"/>
-          <p:cNvSpPr/>
-          <p:nvPr/>
-        </p:nvSpPr>
-        <p:spPr>
-          <a:xfrm>
-            <a:off x="914400" y="1051560"/>
-            <a:ext cx="7406640" cy="594360"/>
-          </a:xfrm>
-          <a:prstGeom prst="rect">
-            <a:avLst/>
-          </a:prstGeom>
-          <a:noFill/>
-          <a:ln/>
-        </p:spPr>
-        <p:txBody>
-          <a:bodyPr wrap="square" rtlCol="0" anchor="ctr"/>
-          <a:lstStyle/>
-          <a:p>
-            <a:pPr indent="0" marL="0">
-              <a:buNone/>
-            </a:pPr>
-            <a:r>
-              <a:rPr lang="en-US" sz="1600" dirty="0">
-                <a:solidFill>
-                  <a:srgbClr val="2D3748"/>
-                </a:solidFill>
-                <a:latin typeface="Consolas" pitchFamily="34" charset="0"/>
-                <a:ea typeface="Consolas" pitchFamily="34" charset="-122"/>
-                <a:cs typeface="Consolas" pitchFamily="34" charset="-120"/>
-              </a:rPr>
-              <a:t>Marktaandeel = (eigen afzet / totale marktafzet) × 100%</a:t>
-            </a:r>
-            <a:endParaRPr lang="en-US" sz="1600" dirty="0"/>
-          </a:p>
-        </p:txBody>
-      </p:sp>
-      <p:sp>
-        <p:nvSpPr>
-          <p:cNvPr id="6" name="Shape 4"/>
-          <p:cNvSpPr/>
-          <p:nvPr/>
-        </p:nvSpPr>
-        <p:spPr>
-          <a:xfrm>
-            <a:off x="640080" y="2011680"/>
-            <a:ext cx="7863840" cy="2560320"/>
-          </a:xfrm>
-          <a:prstGeom prst="rect">
-            <a:avLst>
-              <a:gd name="adj" fmla="val 1786"/>
-            </a:avLst>
-          </a:prstGeom>
-          <a:solidFill>
-            <a:srgbClr val="FEF5E7"/>
+            <a:off x="457200" y="1005840"/>
+            <a:ext cx="3931920" cy="2926080"/>
+          </a:xfrm>
+          <a:prstGeom prst="rect">
+            <a:avLst/>
+          </a:prstGeom>
+          <a:solidFill>
+            <a:srgbClr val="F9F6F1"/>
           </a:solidFill>
           <a:ln/>
           <a:effectLst>
@@ -2291,9 +2286,170 @@
             </a:outerShdw>
           </a:effectLst>
         </p:spPr>
-        <p:txBody>
-          <a:bodyPr/>
-          <a:p/>
+      </p:sp>
+      <p:sp>
+        <p:nvSpPr>
+          <p:cNvPr id="4" name="Shape 2"/>
+          <p:cNvSpPr/>
+          <p:nvPr/>
+        </p:nvSpPr>
+        <p:spPr>
+          <a:xfrm>
+            <a:off x="457200" y="1005840"/>
+            <a:ext cx="54864" cy="2926080"/>
+          </a:xfrm>
+          <a:prstGeom prst="rect">
+            <a:avLst/>
+          </a:prstGeom>
+          <a:solidFill>
+            <a:srgbClr val="1A5276"/>
+          </a:solidFill>
+          <a:ln/>
+        </p:spPr>
+      </p:sp>
+      <p:sp>
+        <p:nvSpPr>
+          <p:cNvPr id="5" name="Text 3"/>
+          <p:cNvSpPr/>
+          <p:nvPr/>
+        </p:nvSpPr>
+        <p:spPr>
+          <a:xfrm>
+            <a:off x="685800" y="1143000"/>
+            <a:ext cx="3566160" cy="411480"/>
+          </a:xfrm>
+          <a:prstGeom prst="rect">
+            <a:avLst/>
+          </a:prstGeom>
+          <a:noFill/>
+          <a:ln/>
+        </p:spPr>
+        <p:txBody>
+          <a:bodyPr wrap="square" lIns="0" tIns="0" rIns="0" bIns="0" rtlCol="0" anchor="ctr"/>
+          <a:lstStyle/>
+          <a:p>
+            <a:pPr indent="0" marL="0">
+              <a:buNone/>
+            </a:pPr>
+            <a:r>
+              <a:rPr lang="en-US" sz="2000" b="1" dirty="0">
+                <a:solidFill>
+                  <a:srgbClr val="1A5276"/>
+                </a:solidFill>
+                <a:latin typeface="Arial" pitchFamily="34" charset="0"/>
+                <a:ea typeface="Arial" pitchFamily="34" charset="-122"/>
+                <a:cs typeface="Arial" pitchFamily="34" charset="-120"/>
+              </a:rPr>
+              <a:t>Volkomen concurrentie</a:t>
+            </a:r>
+            <a:endParaRPr lang="en-US" sz="2000" dirty="0"/>
+          </a:p>
+        </p:txBody>
+      </p:sp>
+      <p:sp>
+        <p:nvSpPr>
+          <p:cNvPr id="6" name="Text 4"/>
+          <p:cNvSpPr/>
+          <p:nvPr/>
+        </p:nvSpPr>
+        <p:spPr>
+          <a:xfrm>
+            <a:off x="685800" y="1600200"/>
+            <a:ext cx="3566160" cy="2194560"/>
+          </a:xfrm>
+          <a:prstGeom prst="rect">
+            <a:avLst/>
+          </a:prstGeom>
+          <a:noFill/>
+          <a:ln/>
+        </p:spPr>
+        <p:txBody>
+          <a:bodyPr wrap="square" rtlCol="0" anchor="ctr"/>
+          <a:lstStyle/>
+          <a:p>
+            <a:pPr marL="342900" indent="-342900">
+              <a:spcAft>
+                <a:spcPts val="800"/>
+              </a:spcAft>
+              <a:buSzPct val="100000"/>
+              <a:buChar char="•"/>
+            </a:pPr>
+            <a:r>
+              <a:rPr lang="en-US" sz="1400" dirty="0">
+                <a:solidFill>
+                  <a:srgbClr val="2D3748"/>
+                </a:solidFill>
+                <a:latin typeface="Arial" pitchFamily="34" charset="0"/>
+                <a:ea typeface="Arial" pitchFamily="34" charset="-122"/>
+                <a:cs typeface="Arial" pitchFamily="34" charset="-120"/>
+              </a:rPr>
+              <a:t>Horizontale vraaglijn</a:t>
+            </a:r>
+            <a:endParaRPr lang="en-US" sz="1400" dirty="0"/>
+          </a:p>
+          <a:p>
+            <a:pPr marL="342900" indent="-342900">
+              <a:spcAft>
+                <a:spcPts val="800"/>
+              </a:spcAft>
+              <a:buSzPct val="100000"/>
+              <a:buChar char="•"/>
+            </a:pPr>
+            <a:r>
+              <a:rPr lang="en-US" sz="1400" dirty="0">
+                <a:solidFill>
+                  <a:srgbClr val="2D3748"/>
+                </a:solidFill>
+                <a:latin typeface="Arial" pitchFamily="34" charset="0"/>
+                <a:ea typeface="Arial" pitchFamily="34" charset="-122"/>
+                <a:cs typeface="Arial" pitchFamily="34" charset="-120"/>
+              </a:rPr>
+              <a:t>Productie bij GTK-minimum</a:t>
+            </a:r>
+            <a:endParaRPr lang="en-US" sz="1400" dirty="0"/>
+          </a:p>
+          <a:p>
+            <a:pPr marL="342900" indent="-342900">
+              <a:spcAft>
+                <a:spcPts val="800"/>
+              </a:spcAft>
+              <a:buSzPct val="100000"/>
+              <a:buChar char="•"/>
+            </a:pPr>
+            <a:r>
+              <a:rPr lang="en-US" sz="1400" dirty="0">
+                <a:solidFill>
+                  <a:srgbClr val="2D3748"/>
+                </a:solidFill>
+                <a:latin typeface="Arial" pitchFamily="34" charset="0"/>
+                <a:ea typeface="Arial" pitchFamily="34" charset="-122"/>
+                <a:cs typeface="Arial" pitchFamily="34" charset="-120"/>
+              </a:rPr>
+              <a:t>Laagste prijs voor consument</a:t>
+            </a:r>
+            <a:endParaRPr lang="en-US" sz="1400" dirty="0"/>
+          </a:p>
+          <a:p>
+            <a:pPr marL="342900" indent="-342900">
+              <a:spcAft>
+                <a:spcPts val="800"/>
+              </a:spcAft>
+              <a:buSzPct val="100000"/>
+              <a:buChar char="•"/>
+            </a:pPr>
+            <a:r>
+              <a:rPr lang="en-US" sz="1400" dirty="0">
+                <a:solidFill>
+                  <a:srgbClr val="2D3748"/>
+                </a:solidFill>
+                <a:latin typeface="Arial" pitchFamily="34" charset="0"/>
+                <a:ea typeface="Arial" pitchFamily="34" charset="-122"/>
+                <a:cs typeface="Arial" pitchFamily="34" charset="-120"/>
+              </a:rPr>
+              <a:t>Geen overcapaciteit</a:t>
+            </a:r>
+            <a:endParaRPr lang="en-US" sz="1400" dirty="0"/>
+          </a:p>
         </p:txBody>
       </p:sp>
       <p:sp>
@@ -2304,8 +2460,35 @@
         </p:nvSpPr>
         <p:spPr>
           <a:xfrm>
-            <a:off x="640080" y="2011680"/>
-            <a:ext cx="54864" cy="2560320"/>
+            <a:off x="4754880" y="1005840"/>
+            <a:ext cx="3931920" cy="2926080"/>
+          </a:xfrm>
+          <a:prstGeom prst="rect">
+            <a:avLst/>
+          </a:prstGeom>
+          <a:solidFill>
+            <a:srgbClr val="F9F6F1"/>
+          </a:solidFill>
+          <a:ln/>
+          <a:effectLst>
+            <a:outerShdw sx="100000" sy="100000" kx="0" ky="0" algn="bl" rotWithShape="0" blurRad="76200" dist="25400" dir="8100000">
+              <a:srgbClr val="000000">
+                <a:alpha val="10000"/>
+              </a:srgbClr>
+            </a:outerShdw>
+          </a:effectLst>
+        </p:spPr>
+      </p:sp>
+      <p:sp>
+        <p:nvSpPr>
+          <p:cNvPr id="8" name="Shape 6"/>
+          <p:cNvSpPr/>
+          <p:nvPr/>
+        </p:nvSpPr>
+        <p:spPr>
+          <a:xfrm>
+            <a:off x="4754880" y="1005840"/>
+            <a:ext cx="54864" cy="2926080"/>
           </a:xfrm>
           <a:prstGeom prst="rect">
             <a:avLst/>
@@ -2315,21 +2498,17 @@
           </a:solidFill>
           <a:ln/>
         </p:spPr>
-        <p:txBody>
-          <a:bodyPr/>
-          <a:p/>
-        </p:txBody>
-      </p:sp>
-      <p:sp>
-        <p:nvSpPr>
-          <p:cNvPr id="8" name="Text 6"/>
-          <p:cNvSpPr/>
-          <p:nvPr/>
-        </p:nvSpPr>
-        <p:spPr>
-          <a:xfrm>
-            <a:off x="822960" y="2148840"/>
-            <a:ext cx="7543800" cy="365760"/>
+      </p:sp>
+      <p:sp>
+        <p:nvSpPr>
+          <p:cNvPr id="9" name="Text 7"/>
+          <p:cNvSpPr/>
+          <p:nvPr/>
+        </p:nvSpPr>
+        <p:spPr>
+          <a:xfrm>
+            <a:off x="4983480" y="1143000"/>
+            <a:ext cx="3566160" cy="411480"/>
           </a:xfrm>
           <a:prstGeom prst="rect">
             <a:avLst/>
@@ -2338,14 +2517,14 @@
           <a:ln/>
         </p:spPr>
         <p:txBody>
-          <a:bodyPr wrap="square" rtlCol="0" anchor="t"/>
+          <a:bodyPr wrap="square" lIns="0" tIns="0" rIns="0" bIns="0" rtlCol="0" anchor="ctr"/>
           <a:lstStyle/>
           <a:p>
             <a:pPr indent="0" marL="0">
               <a:buNone/>
             </a:pPr>
             <a:r>
-              <a:rPr lang="en-US" sz="2000" b="1" dirty="0">
+              <a:rPr lang="en-US" sz="1800" b="1" dirty="0">
                 <a:solidFill>
                   <a:srgbClr val="E67E22"/>
                 </a:solidFill>
@@ -2353,22 +2532,22 @@
                 <a:ea typeface="Arial" pitchFamily="34" charset="-122"/>
                 <a:cs typeface="Arial" pitchFamily="34" charset="-120"/>
               </a:rPr>
-              <a:t>Voorbeeld</a:t>
-            </a:r>
-            <a:endParaRPr lang="en-US" sz="2000" dirty="0"/>
-          </a:p>
-        </p:txBody>
-      </p:sp>
-      <p:sp>
-        <p:nvSpPr>
-          <p:cNvPr id="9" name="Text 7"/>
-          <p:cNvSpPr/>
-          <p:nvPr/>
-        </p:nvSpPr>
-        <p:spPr>
-          <a:xfrm>
-            <a:off x="822960" y="2560320"/>
-            <a:ext cx="7543800" cy="1874520"/>
+              <a:t>Monopolistische concurrentie</a:t>
+            </a:r>
+            <a:endParaRPr lang="en-US" sz="1800" dirty="0"/>
+          </a:p>
+        </p:txBody>
+      </p:sp>
+      <p:sp>
+        <p:nvSpPr>
+          <p:cNvPr id="10" name="Text 8"/>
+          <p:cNvSpPr/>
+          <p:nvPr/>
+        </p:nvSpPr>
+        <p:spPr>
+          <a:xfrm>
+            <a:off x="4983480" y="1600200"/>
+            <a:ext cx="3566160" cy="2194560"/>
           </a:xfrm>
           <a:prstGeom prst="rect">
             <a:avLst/>
@@ -2377,14 +2556,15 @@
           <a:ln/>
         </p:spPr>
         <p:txBody>
-          <a:bodyPr wrap="square" rtlCol="0" anchor="t"/>
-          <a:lstStyle/>
-          <a:p>
-            <a:pPr algn="l" indent="0" marL="0">
-              <a:lnSpc>
-                <a:spcPct val="115000"/>
-              </a:lnSpc>
-              <a:buNone/>
+          <a:bodyPr wrap="square" rtlCol="0" anchor="ctr"/>
+          <a:lstStyle/>
+          <a:p>
+            <a:pPr marL="342900" indent="-342900">
+              <a:spcAft>
+                <a:spcPts val="800"/>
+              </a:spcAft>
+              <a:buSzPct val="100000"/>
+              <a:buChar char="•"/>
             </a:pPr>
             <a:r>
               <a:rPr lang="en-US" sz="1400" dirty="0">
@@ -2395,14 +2575,17 @@
                 <a:ea typeface="Arial" pitchFamily="34" charset="-122"/>
                 <a:cs typeface="Arial" pitchFamily="34" charset="-120"/>
               </a:rPr>
-              <a:t>In 2009 zijn er 573 eetcafés in Limburg.
-</a:t>
-            </a:r>
-            <a:pPr algn="l" indent="0" marL="0">
-              <a:lnSpc>
-                <a:spcPct val="115000"/>
-              </a:lnSpc>
-              <a:buNone/>
+              <a:t>Dalende vraaglijn</a:t>
+            </a:r>
+            <a:endParaRPr lang="en-US" sz="1400" dirty="0"/>
+          </a:p>
+          <a:p>
+            <a:pPr marL="342900" indent="-342900">
+              <a:spcAft>
+                <a:spcPts val="800"/>
+              </a:spcAft>
+              <a:buSzPct val="100000"/>
+              <a:buChar char="•"/>
             </a:pPr>
             <a:r>
               <a:rPr lang="en-US" sz="1400" dirty="0">
@@ -2413,14 +2596,17 @@
                 <a:ea typeface="Arial" pitchFamily="34" charset="-122"/>
                 <a:cs typeface="Arial" pitchFamily="34" charset="-120"/>
               </a:rPr>
-              <a:t>Er komen 276 eetcafés bij → 573 + 276 = 849
-</a:t>
-            </a:r>
-            <a:pPr algn="l" indent="0" marL="0">
-              <a:lnSpc>
-                <a:spcPct val="115000"/>
-              </a:lnSpc>
-              <a:buNone/>
+              <a:t>Productie links van GTK-minimum</a:t>
+            </a:r>
+            <a:endParaRPr lang="en-US" sz="1400" dirty="0"/>
+          </a:p>
+          <a:p>
+            <a:pPr marL="342900" indent="-342900">
+              <a:spcAft>
+                <a:spcPts val="800"/>
+              </a:spcAft>
+              <a:buSzPct val="100000"/>
+              <a:buChar char="•"/>
             </a:pPr>
             <a:r>
               <a:rPr lang="en-US" sz="1400" dirty="0">
@@ -2431,25 +2617,87 @@
                 <a:ea typeface="Arial" pitchFamily="34" charset="-122"/>
                 <a:cs typeface="Arial" pitchFamily="34" charset="-120"/>
               </a:rPr>
-              <a:t>Totaal horecazaken: 4.000
-</a:t>
-            </a:r>
-            <a:pPr algn="l" indent="0" marL="0">
-              <a:lnSpc>
-                <a:spcPct val="115000"/>
-              </a:lnSpc>
-              <a:buNone/>
-            </a:pPr>
-            <a:r>
-              <a:rPr lang="en-US" sz="1500" b="1" dirty="0">
-                <a:solidFill>
-                  <a:srgbClr val="E67E22"/>
-                </a:solidFill>
-                <a:latin typeface="Arial" pitchFamily="34" charset="0"/>
-                <a:ea typeface="Arial" pitchFamily="34" charset="-122"/>
-                <a:cs typeface="Arial" pitchFamily="34" charset="-120"/>
-              </a:rPr>
-              <a:t>Marktaandeel = 849 / 4.000 × 100% = 21,2%</a:t>
+              <a:t>Hogere prijs</a:t>
+            </a:r>
+            <a:endParaRPr lang="en-US" sz="1400" dirty="0"/>
+          </a:p>
+          <a:p>
+            <a:pPr marL="342900" indent="-342900">
+              <a:spcAft>
+                <a:spcPts val="800"/>
+              </a:spcAft>
+              <a:buSzPct val="100000"/>
+              <a:buChar char="•"/>
+            </a:pPr>
+            <a:r>
+              <a:rPr lang="en-US" sz="1400" dirty="0">
+                <a:solidFill>
+                  <a:srgbClr val="2D3748"/>
+                </a:solidFill>
+                <a:latin typeface="Arial" pitchFamily="34" charset="0"/>
+                <a:ea typeface="Arial" pitchFamily="34" charset="-122"/>
+                <a:cs typeface="Arial" pitchFamily="34" charset="-120"/>
+              </a:rPr>
+              <a:t>Overcapaciteit (= inefficiëntie)</a:t>
+            </a:r>
+            <a:endParaRPr lang="en-US" sz="1400" dirty="0"/>
+          </a:p>
+        </p:txBody>
+      </p:sp>
+      <p:sp>
+        <p:nvSpPr>
+          <p:cNvPr id="11" name="Shape 9"/>
+          <p:cNvSpPr/>
+          <p:nvPr/>
+        </p:nvSpPr>
+        <p:spPr>
+          <a:xfrm>
+            <a:off x="457200" y="4160520"/>
+            <a:ext cx="8229600" cy="457200"/>
+          </a:xfrm>
+          <a:prstGeom prst="rect">
+            <a:avLst/>
+          </a:prstGeom>
+          <a:solidFill>
+            <a:srgbClr val="EBF5FB"/>
+          </a:solidFill>
+          <a:ln/>
+        </p:spPr>
+      </p:sp>
+      <p:sp>
+        <p:nvSpPr>
+          <p:cNvPr id="12" name="Text 10"/>
+          <p:cNvSpPr/>
+          <p:nvPr/>
+        </p:nvSpPr>
+        <p:spPr>
+          <a:xfrm>
+            <a:off x="640080" y="4160520"/>
+            <a:ext cx="7863840" cy="457200"/>
+          </a:xfrm>
+          <a:prstGeom prst="rect">
+            <a:avLst/>
+          </a:prstGeom>
+          <a:noFill/>
+          <a:ln/>
+        </p:spPr>
+        <p:txBody>
+          <a:bodyPr wrap="square" lIns="0" tIns="0" rIns="0" bIns="0" rtlCol="0" anchor="ctr"/>
+          <a:lstStyle/>
+          <a:p>
+            <a:pPr indent="0" marL="0">
+              <a:buNone/>
+            </a:pPr>
+            <a:r>
+              <a:rPr lang="en-US" sz="1400" b="1" dirty="0">
+                <a:solidFill>
+                  <a:srgbClr val="154360"/>
+                </a:solidFill>
+                <a:latin typeface="Arial" pitchFamily="34" charset="0"/>
+                <a:ea typeface="Arial" pitchFamily="34" charset="-122"/>
+                <a:cs typeface="Arial" pitchFamily="34" charset="-120"/>
+              </a:rPr>
+              <a:t>Beide markten: op lange termijn geen winst</a:t>
             </a:r>
             <a:endParaRPr lang="en-US" sz="1400" dirty="0"/>
           </a:p>
@@ -2498,7 +2746,7 @@
           <a:ln/>
         </p:spPr>
         <p:txBody>
-          <a:bodyPr wrap="square" rtlCol="0" anchor="ctr"/>
+          <a:bodyPr wrap="square" lIns="0" tIns="0" rIns="0" bIns="0" rtlCol="0" anchor="ctr"/>
           <a:lstStyle/>
           <a:p>
             <a:pPr indent="0" marL="0">
@@ -2513,7 +2761,7 @@
                 <a:ea typeface="Arial" pitchFamily="34" charset="-122"/>
                 <a:cs typeface="Arial" pitchFamily="34" charset="-120"/>
               </a:rPr>
-              <a:t>Valkuilen</a:t>
+              <a:t>Marktaandeel berekenen</a:t>
             </a:r>
             <a:endParaRPr lang="en-US" sz="2400" dirty="0"/>
           </a:p>
@@ -2527,16 +2775,98 @@
         </p:nvSpPr>
         <p:spPr>
           <a:xfrm>
-            <a:off x="457200" y="960120"/>
-            <a:ext cx="8229600" cy="1005840"/>
-          </a:xfrm>
-          <a:prstGeom prst="rect">
-            <a:avLst>
-              <a:gd name="adj" fmla="val 4545"/>
-            </a:avLst>
-          </a:prstGeom>
-          <a:solidFill>
-            <a:srgbClr val="FDE8E8"/>
+            <a:off x="640080" y="1005840"/>
+            <a:ext cx="7863840" cy="548640"/>
+          </a:xfrm>
+          <a:prstGeom prst="rect">
+            <a:avLst/>
+          </a:prstGeom>
+          <a:solidFill>
+            <a:srgbClr val="F7F8FA"/>
+          </a:solidFill>
+          <a:ln w="6350">
+            <a:solidFill>
+              <a:srgbClr val="CBD5E0"/>
+            </a:solidFill>
+            <a:prstDash val="solid"/>
+          </a:ln>
+        </p:spPr>
+      </p:sp>
+      <p:sp>
+        <p:nvSpPr>
+          <p:cNvPr id="4" name="Shape 2"/>
+          <p:cNvSpPr/>
+          <p:nvPr/>
+        </p:nvSpPr>
+        <p:spPr>
+          <a:xfrm>
+            <a:off x="640080" y="1005840"/>
+            <a:ext cx="54864" cy="548640"/>
+          </a:xfrm>
+          <a:prstGeom prst="rect">
+            <a:avLst/>
+          </a:prstGeom>
+          <a:solidFill>
+            <a:srgbClr val="1A5276"/>
+          </a:solidFill>
+          <a:ln/>
+        </p:spPr>
+      </p:sp>
+      <p:sp>
+        <p:nvSpPr>
+          <p:cNvPr id="5" name="Text 3"/>
+          <p:cNvSpPr/>
+          <p:nvPr/>
+        </p:nvSpPr>
+        <p:spPr>
+          <a:xfrm>
+            <a:off x="914400" y="1005840"/>
+            <a:ext cx="7315200" cy="548640"/>
+          </a:xfrm>
+          <a:prstGeom prst="rect">
+            <a:avLst/>
+          </a:prstGeom>
+          <a:noFill/>
+          <a:ln/>
+        </p:spPr>
+        <p:txBody>
+          <a:bodyPr wrap="square" lIns="0" tIns="0" rIns="0" bIns="0" rtlCol="0" anchor="ctr"/>
+          <a:lstStyle/>
+          <a:p>
+            <a:pPr indent="0" marL="0">
+              <a:buNone/>
+            </a:pPr>
+            <a:r>
+              <a:rPr lang="en-US" sz="1600" dirty="0">
+                <a:solidFill>
+                  <a:srgbClr val="2D3748"/>
+                </a:solidFill>
+                <a:latin typeface="Consolas" pitchFamily="34" charset="0"/>
+                <a:ea typeface="Consolas" pitchFamily="34" charset="-122"/>
+                <a:cs typeface="Consolas" pitchFamily="34" charset="-120"/>
+              </a:rPr>
+              <a:t>Marktaandeel = (eigen afzet / totale marktafzet) × 100%</a:t>
+            </a:r>
+            <a:endParaRPr lang="en-US" sz="1600" dirty="0"/>
+          </a:p>
+        </p:txBody>
+      </p:sp>
+      <p:sp>
+        <p:nvSpPr>
+          <p:cNvPr id="6" name="Shape 4"/>
+          <p:cNvSpPr/>
+          <p:nvPr/>
+        </p:nvSpPr>
+        <p:spPr>
+          <a:xfrm>
+            <a:off x="640080" y="1920240"/>
+            <a:ext cx="7863840" cy="2286000"/>
+          </a:xfrm>
+          <a:prstGeom prst="rect">
+            <a:avLst/>
+          </a:prstGeom>
+          <a:solidFill>
+            <a:srgbClr val="F9F6F1"/>
           </a:solidFill>
           <a:ln/>
           <a:effectLst>
@@ -2547,45 +2877,37 @@
             </a:outerShdw>
           </a:effectLst>
         </p:spPr>
-        <p:txBody>
-          <a:bodyPr/>
-          <a:p/>
-        </p:txBody>
-      </p:sp>
-      <p:sp>
-        <p:nvSpPr>
-          <p:cNvPr id="4" name="Shape 2"/>
-          <p:cNvSpPr/>
-          <p:nvPr/>
-        </p:nvSpPr>
-        <p:spPr>
-          <a:xfrm>
-            <a:off x="457200" y="960120"/>
-            <a:ext cx="54864" cy="1005840"/>
-          </a:xfrm>
-          <a:prstGeom prst="rect">
-            <a:avLst/>
-          </a:prstGeom>
-          <a:solidFill>
-            <a:srgbClr val="D9534F"/>
-          </a:solidFill>
-          <a:ln/>
-        </p:spPr>
-        <p:txBody>
-          <a:bodyPr/>
-          <a:p/>
-        </p:txBody>
-      </p:sp>
-      <p:sp>
-        <p:nvSpPr>
-          <p:cNvPr id="5" name="Text 3"/>
-          <p:cNvSpPr/>
-          <p:nvPr/>
-        </p:nvSpPr>
-        <p:spPr>
-          <a:xfrm>
-            <a:off x="658368" y="1033272"/>
-            <a:ext cx="7863840" cy="320040"/>
+      </p:sp>
+      <p:sp>
+        <p:nvSpPr>
+          <p:cNvPr id="7" name="Shape 5"/>
+          <p:cNvSpPr/>
+          <p:nvPr/>
+        </p:nvSpPr>
+        <p:spPr>
+          <a:xfrm>
+            <a:off x="640080" y="1920240"/>
+            <a:ext cx="54864" cy="2286000"/>
+          </a:xfrm>
+          <a:prstGeom prst="rect">
+            <a:avLst/>
+          </a:prstGeom>
+          <a:solidFill>
+            <a:srgbClr val="E67E22"/>
+          </a:solidFill>
+          <a:ln/>
+        </p:spPr>
+      </p:sp>
+      <p:sp>
+        <p:nvSpPr>
+          <p:cNvPr id="8" name="Text 6"/>
+          <p:cNvSpPr/>
+          <p:nvPr/>
+        </p:nvSpPr>
+        <p:spPr>
+          <a:xfrm>
+            <a:off x="868680" y="2011680"/>
+            <a:ext cx="7406640" cy="365760"/>
           </a:xfrm>
           <a:prstGeom prst="rect">
             <a:avLst/>
@@ -2594,333 +2916,108 @@
           <a:ln/>
         </p:spPr>
         <p:txBody>
-          <a:bodyPr wrap="square" rtlCol="0" anchor="t"/>
-          <a:lstStyle/>
-          <a:p>
-            <a:pPr algn="l" indent="0" marL="0">
-              <a:buNone/>
-            </a:pPr>
-            <a:r>
-              <a:rPr lang="en-US" sz="1400" b="1" dirty="0">
-                <a:solidFill>
-                  <a:srgbClr val="D9534F"/>
-                </a:solidFill>
-                <a:latin typeface="Arial" pitchFamily="34" charset="0"/>
-                <a:ea typeface="Arial" pitchFamily="34" charset="-122"/>
-                <a:cs typeface="Arial" pitchFamily="34" charset="-120"/>
-              </a:rPr>
-              <a:t>"MC = monopolie"</a:t>
+          <a:bodyPr wrap="square" lIns="0" tIns="0" rIns="0" bIns="0" rtlCol="0" anchor="ctr"/>
+          <a:lstStyle/>
+          <a:p>
+            <a:pPr indent="0" marL="0">
+              <a:buNone/>
+            </a:pPr>
+            <a:r>
+              <a:rPr lang="en-US" sz="1800" b="1" dirty="0">
+                <a:solidFill>
+                  <a:srgbClr val="E67E22"/>
+                </a:solidFill>
+                <a:latin typeface="Arial" pitchFamily="34" charset="0"/>
+                <a:ea typeface="Arial" pitchFamily="34" charset="-122"/>
+                <a:cs typeface="Arial" pitchFamily="34" charset="-120"/>
+              </a:rPr>
+              <a:t>Voorbeeld</a:t>
+            </a:r>
+            <a:endParaRPr lang="en-US" sz="1800" dirty="0"/>
+          </a:p>
+        </p:txBody>
+      </p:sp>
+      <p:sp>
+        <p:nvSpPr>
+          <p:cNvPr id="9" name="Text 7"/>
+          <p:cNvSpPr/>
+          <p:nvPr/>
+        </p:nvSpPr>
+        <p:spPr>
+          <a:xfrm>
+            <a:off x="868680" y="2468880"/>
+            <a:ext cx="7406640" cy="1554480"/>
+          </a:xfrm>
+          <a:prstGeom prst="rect">
+            <a:avLst/>
+          </a:prstGeom>
+          <a:noFill/>
+          <a:ln/>
+        </p:spPr>
+        <p:txBody>
+          <a:bodyPr wrap="square" rtlCol="0" anchor="ctr"/>
+          <a:lstStyle/>
+          <a:p>
+            <a:pPr indent="0" marL="0">
+              <a:buNone/>
+            </a:pPr>
+            <a:r>
+              <a:rPr lang="en-US" sz="1400" dirty="0">
+                <a:solidFill>
+                  <a:srgbClr val="2D3748"/>
+                </a:solidFill>
+                <a:latin typeface="Arial" pitchFamily="34" charset="0"/>
+                <a:ea typeface="Arial" pitchFamily="34" charset="-122"/>
+                <a:cs typeface="Arial" pitchFamily="34" charset="-120"/>
+              </a:rPr>
+              <a:t>In 2009 zijn er 573 eetcafés in Limburg.
+</a:t>
+            </a:r>
+            <a:pPr indent="0" marL="0">
+              <a:buNone/>
+            </a:pPr>
+            <a:r>
+              <a:rPr lang="en-US" sz="1400" dirty="0">
+                <a:solidFill>
+                  <a:srgbClr val="2D3748"/>
+                </a:solidFill>
+                <a:latin typeface="Arial" pitchFamily="34" charset="0"/>
+                <a:ea typeface="Arial" pitchFamily="34" charset="-122"/>
+                <a:cs typeface="Arial" pitchFamily="34" charset="-120"/>
+              </a:rPr>
+              <a:t>Er komen 276 eetcafés bij → 573 + 276 = 849
+</a:t>
+            </a:r>
+            <a:pPr indent="0" marL="0">
+              <a:buNone/>
+            </a:pPr>
+            <a:r>
+              <a:rPr lang="en-US" sz="1400" dirty="0">
+                <a:solidFill>
+                  <a:srgbClr val="2D3748"/>
+                </a:solidFill>
+                <a:latin typeface="Arial" pitchFamily="34" charset="0"/>
+                <a:ea typeface="Arial" pitchFamily="34" charset="-122"/>
+                <a:cs typeface="Arial" pitchFamily="34" charset="-120"/>
+              </a:rPr>
+              <a:t>Totaal horecazaken: 4.000
+</a:t>
+            </a:r>
+            <a:pPr indent="0" marL="0">
+              <a:buNone/>
+            </a:pPr>
+            <a:r>
+              <a:rPr lang="en-US" sz="1600" b="1" dirty="0">
+                <a:solidFill>
+                  <a:srgbClr val="154360"/>
+                </a:solidFill>
+                <a:latin typeface="Consolas" pitchFamily="34" charset="0"/>
+                <a:ea typeface="Consolas" pitchFamily="34" charset="-122"/>
+                <a:cs typeface="Consolas" pitchFamily="34" charset="-120"/>
+              </a:rPr>
+              <a:t>Marktaandeel = (849 / 4.000) × 100% = 21,2%</a:t>
             </a:r>
             <a:endParaRPr lang="en-US" sz="1400" dirty="0"/>
-          </a:p>
-        </p:txBody>
-      </p:sp>
-      <p:sp>
-        <p:nvSpPr>
-          <p:cNvPr id="6" name="Text 4"/>
-          <p:cNvSpPr/>
-          <p:nvPr/>
-        </p:nvSpPr>
-        <p:spPr>
-          <a:xfrm>
-            <a:off x="658368" y="1344168"/>
-            <a:ext cx="7863840" cy="548640"/>
-          </a:xfrm>
-          <a:prstGeom prst="rect">
-            <a:avLst/>
-          </a:prstGeom>
-          <a:noFill/>
-          <a:ln/>
-        </p:spPr>
-        <p:txBody>
-          <a:bodyPr wrap="square" rtlCol="0" anchor="t"/>
-          <a:lstStyle/>
-          <a:p>
-            <a:pPr algn="l" indent="0" marL="0">
-              <a:buNone/>
-            </a:pPr>
-            <a:r>
-              <a:rPr lang="en-US" sz="1300" dirty="0">
-                <a:solidFill>
-                  <a:srgbClr val="2D3748"/>
-                </a:solidFill>
-                <a:latin typeface="Arial" pitchFamily="34" charset="0"/>
-                <a:ea typeface="Arial" pitchFamily="34" charset="-122"/>
-                <a:cs typeface="Arial" pitchFamily="34" charset="-120"/>
-              </a:rPr>
-              <a:t>Onjuist: bij MC is er juist veel concurrentie. De 'monopolistische' verwijst naar de dalende vraaglijn, niet naar marktmacht.</a:t>
-            </a:r>
-            <a:endParaRPr lang="en-US" sz="1300" dirty="0"/>
-          </a:p>
-        </p:txBody>
-      </p:sp>
-      <p:sp>
-        <p:nvSpPr>
-          <p:cNvPr id="7" name="Shape 5"/>
-          <p:cNvSpPr/>
-          <p:nvPr/>
-        </p:nvSpPr>
-        <p:spPr>
-          <a:xfrm>
-            <a:off x="457200" y="2148840"/>
-            <a:ext cx="8229600" cy="1005840"/>
-          </a:xfrm>
-          <a:prstGeom prst="rect">
-            <a:avLst>
-              <a:gd name="adj" fmla="val 4545"/>
-            </a:avLst>
-          </a:prstGeom>
-          <a:solidFill>
-            <a:srgbClr val="FDE8E8"/>
-          </a:solidFill>
-          <a:ln/>
-          <a:effectLst>
-            <a:outerShdw sx="100000" sy="100000" kx="0" ky="0" algn="bl" rotWithShape="0" blurRad="76200" dist="25400" dir="8100000">
-              <a:srgbClr val="000000">
-                <a:alpha val="10000"/>
-              </a:srgbClr>
-            </a:outerShdw>
-          </a:effectLst>
-        </p:spPr>
-        <p:txBody>
-          <a:bodyPr/>
-          <a:p/>
-        </p:txBody>
-      </p:sp>
-      <p:sp>
-        <p:nvSpPr>
-          <p:cNvPr id="8" name="Shape 6"/>
-          <p:cNvSpPr/>
-          <p:nvPr/>
-        </p:nvSpPr>
-        <p:spPr>
-          <a:xfrm>
-            <a:off x="457200" y="2148840"/>
-            <a:ext cx="54864" cy="1005840"/>
-          </a:xfrm>
-          <a:prstGeom prst="rect">
-            <a:avLst/>
-          </a:prstGeom>
-          <a:solidFill>
-            <a:srgbClr val="D9534F"/>
-          </a:solidFill>
-          <a:ln/>
-        </p:spPr>
-        <p:txBody>
-          <a:bodyPr/>
-          <a:p/>
-        </p:txBody>
-      </p:sp>
-      <p:sp>
-        <p:nvSpPr>
-          <p:cNvPr id="9" name="Text 7"/>
-          <p:cNvSpPr/>
-          <p:nvPr/>
-        </p:nvSpPr>
-        <p:spPr>
-          <a:xfrm>
-            <a:off x="658368" y="2221992"/>
-            <a:ext cx="7863840" cy="320040"/>
-          </a:xfrm>
-          <a:prstGeom prst="rect">
-            <a:avLst/>
-          </a:prstGeom>
-          <a:noFill/>
-          <a:ln/>
-        </p:spPr>
-        <p:txBody>
-          <a:bodyPr wrap="square" rtlCol="0" anchor="t"/>
-          <a:lstStyle/>
-          <a:p>
-            <a:pPr algn="l" indent="0" marL="0">
-              <a:buNone/>
-            </a:pPr>
-            <a:r>
-              <a:rPr lang="en-US" sz="1400" b="1" dirty="0">
-                <a:solidFill>
-                  <a:srgbClr val="D9534F"/>
-                </a:solidFill>
-                <a:latin typeface="Arial" pitchFamily="34" charset="0"/>
-                <a:ea typeface="Arial" pitchFamily="34" charset="-122"/>
-                <a:cs typeface="Arial" pitchFamily="34" charset="-120"/>
-              </a:rPr>
-              <a:t>"Op lange termijn verdwijnt alle concurrentie"</a:t>
-            </a:r>
-            <a:endParaRPr lang="en-US" sz="1400" dirty="0"/>
-          </a:p>
-        </p:txBody>
-      </p:sp>
-      <p:sp>
-        <p:nvSpPr>
-          <p:cNvPr id="10" name="Text 8"/>
-          <p:cNvSpPr/>
-          <p:nvPr/>
-        </p:nvSpPr>
-        <p:spPr>
-          <a:xfrm>
-            <a:off x="658368" y="2532888"/>
-            <a:ext cx="7863840" cy="548640"/>
-          </a:xfrm>
-          <a:prstGeom prst="rect">
-            <a:avLst/>
-          </a:prstGeom>
-          <a:noFill/>
-          <a:ln/>
-        </p:spPr>
-        <p:txBody>
-          <a:bodyPr wrap="square" rtlCol="0" anchor="t"/>
-          <a:lstStyle/>
-          <a:p>
-            <a:pPr algn="l" indent="0" marL="0">
-              <a:buNone/>
-            </a:pPr>
-            <a:r>
-              <a:rPr lang="en-US" sz="1300" dirty="0">
-                <a:solidFill>
-                  <a:srgbClr val="2D3748"/>
-                </a:solidFill>
-                <a:latin typeface="Arial" pitchFamily="34" charset="0"/>
-                <a:ea typeface="Arial" pitchFamily="34" charset="-122"/>
-                <a:cs typeface="Arial" pitchFamily="34" charset="-120"/>
-              </a:rPr>
-              <a:t>Onjuist: er verdwijnt winst, niet concurrentie. Er zijn nog steeds veel aanbieders.</a:t>
-            </a:r>
-            <a:endParaRPr lang="en-US" sz="1300" dirty="0"/>
-          </a:p>
-        </p:txBody>
-      </p:sp>
-      <p:sp>
-        <p:nvSpPr>
-          <p:cNvPr id="11" name="Shape 9"/>
-          <p:cNvSpPr/>
-          <p:nvPr/>
-        </p:nvSpPr>
-        <p:spPr>
-          <a:xfrm>
-            <a:off x="457200" y="3337560"/>
-            <a:ext cx="8229600" cy="1005840"/>
-          </a:xfrm>
-          <a:prstGeom prst="rect">
-            <a:avLst>
-              <a:gd name="adj" fmla="val 4545"/>
-            </a:avLst>
-          </a:prstGeom>
-          <a:solidFill>
-            <a:srgbClr val="FDE8E8"/>
-          </a:solidFill>
-          <a:ln/>
-          <a:effectLst>
-            <a:outerShdw sx="100000" sy="100000" kx="0" ky="0" algn="bl" rotWithShape="0" blurRad="76200" dist="25400" dir="8100000">
-              <a:srgbClr val="000000">
-                <a:alpha val="10000"/>
-              </a:srgbClr>
-            </a:outerShdw>
-          </a:effectLst>
-        </p:spPr>
-        <p:txBody>
-          <a:bodyPr/>
-          <a:p/>
-        </p:txBody>
-      </p:sp>
-      <p:sp>
-        <p:nvSpPr>
-          <p:cNvPr id="12" name="Shape 10"/>
-          <p:cNvSpPr/>
-          <p:nvPr/>
-        </p:nvSpPr>
-        <p:spPr>
-          <a:xfrm>
-            <a:off x="457200" y="3337560"/>
-            <a:ext cx="54864" cy="1005840"/>
-          </a:xfrm>
-          <a:prstGeom prst="rect">
-            <a:avLst/>
-          </a:prstGeom>
-          <a:solidFill>
-            <a:srgbClr val="D9534F"/>
-          </a:solidFill>
-          <a:ln/>
-        </p:spPr>
-        <p:txBody>
-          <a:bodyPr/>
-          <a:p/>
-        </p:txBody>
-      </p:sp>
-      <p:sp>
-        <p:nvSpPr>
-          <p:cNvPr id="13" name="Text 11"/>
-          <p:cNvSpPr/>
-          <p:nvPr/>
-        </p:nvSpPr>
-        <p:spPr>
-          <a:xfrm>
-            <a:off x="658368" y="3410712"/>
-            <a:ext cx="7863840" cy="320040"/>
-          </a:xfrm>
-          <a:prstGeom prst="rect">
-            <a:avLst/>
-          </a:prstGeom>
-          <a:noFill/>
-          <a:ln/>
-        </p:spPr>
-        <p:txBody>
-          <a:bodyPr wrap="square" rtlCol="0" anchor="t"/>
-          <a:lstStyle/>
-          <a:p>
-            <a:pPr algn="l" indent="0" marL="0">
-              <a:buNone/>
-            </a:pPr>
-            <a:r>
-              <a:rPr lang="en-US" sz="1400" b="1" dirty="0">
-                <a:solidFill>
-                  <a:srgbClr val="D9534F"/>
-                </a:solidFill>
-                <a:latin typeface="Arial" pitchFamily="34" charset="0"/>
-                <a:ea typeface="Arial" pitchFamily="34" charset="-122"/>
-                <a:cs typeface="Arial" pitchFamily="34" charset="-120"/>
-              </a:rPr>
-              <a:t>"Overcapaciteit = slecht voor iedereen"</a:t>
-            </a:r>
-            <a:endParaRPr lang="en-US" sz="1400" dirty="0"/>
-          </a:p>
-        </p:txBody>
-      </p:sp>
-      <p:sp>
-        <p:nvSpPr>
-          <p:cNvPr id="14" name="Text 12"/>
-          <p:cNvSpPr/>
-          <p:nvPr/>
-        </p:nvSpPr>
-        <p:spPr>
-          <a:xfrm>
-            <a:off x="658368" y="3721608"/>
-            <a:ext cx="7863840" cy="548640"/>
-          </a:xfrm>
-          <a:prstGeom prst="rect">
-            <a:avLst/>
-          </a:prstGeom>
-          <a:noFill/>
-          <a:ln/>
-        </p:spPr>
-        <p:txBody>
-          <a:bodyPr wrap="square" rtlCol="0" anchor="t"/>
-          <a:lstStyle/>
-          <a:p>
-            <a:pPr algn="l" indent="0" marL="0">
-              <a:buNone/>
-            </a:pPr>
-            <a:r>
-              <a:rPr lang="en-US" sz="1300" dirty="0">
-                <a:solidFill>
-                  <a:srgbClr val="2D3748"/>
-                </a:solidFill>
-                <a:latin typeface="Arial" pitchFamily="34" charset="0"/>
-                <a:ea typeface="Arial" pitchFamily="34" charset="-122"/>
-                <a:cs typeface="Arial" pitchFamily="34" charset="-120"/>
-              </a:rPr>
-              <a:t>Nuance: overcapaciteit is inefficiënt, maar consumenten profiteren van meer keuzevrijheid (variatie in producten).</a:t>
-            </a:r>
-            <a:endParaRPr lang="en-US" sz="1300" dirty="0"/>
           </a:p>
         </p:txBody>
       </p:sp>
@@ -2957,8 +3054,8 @@
         </p:nvSpPr>
         <p:spPr>
           <a:xfrm>
-            <a:off x="640080" y="457200"/>
-            <a:ext cx="7863840" cy="640080"/>
+            <a:off x="457200" y="0"/>
+            <a:ext cx="8229600" cy="685800"/>
           </a:xfrm>
           <a:prstGeom prst="rect">
             <a:avLst/>
@@ -2967,93 +3064,528 @@
           <a:ln/>
         </p:spPr>
         <p:txBody>
+          <a:bodyPr wrap="square" lIns="0" tIns="0" rIns="0" bIns="0" rtlCol="0" anchor="ctr"/>
+          <a:lstStyle/>
+          <a:p>
+            <a:pPr indent="0" marL="0">
+              <a:buNone/>
+            </a:pPr>
+            <a:r>
+              <a:rPr lang="en-US" sz="2400" b="1" dirty="0">
+                <a:solidFill>
+                  <a:srgbClr val="FFFFFF"/>
+                </a:solidFill>
+                <a:latin typeface="Arial" pitchFamily="34" charset="0"/>
+                <a:ea typeface="Arial" pitchFamily="34" charset="-122"/>
+                <a:cs typeface="Arial" pitchFamily="34" charset="-120"/>
+              </a:rPr>
+              <a:t>Valkuilen</a:t>
+            </a:r>
+            <a:endParaRPr lang="en-US" sz="2400" dirty="0"/>
+          </a:p>
+        </p:txBody>
+      </p:sp>
+      <p:sp>
+        <p:nvSpPr>
+          <p:cNvPr id="3" name="Shape 1"/>
+          <p:cNvSpPr/>
+          <p:nvPr/>
+        </p:nvSpPr>
+        <p:spPr>
+          <a:xfrm>
+            <a:off x="640080" y="1005840"/>
+            <a:ext cx="7863840" cy="1005840"/>
+          </a:xfrm>
+          <a:prstGeom prst="rect">
+            <a:avLst/>
+          </a:prstGeom>
+          <a:solidFill>
+            <a:srgbClr val="FDE8E8"/>
+          </a:solidFill>
+          <a:ln/>
+        </p:spPr>
+      </p:sp>
+      <p:sp>
+        <p:nvSpPr>
+          <p:cNvPr id="4" name="Shape 2"/>
+          <p:cNvSpPr/>
+          <p:nvPr/>
+        </p:nvSpPr>
+        <p:spPr>
+          <a:xfrm>
+            <a:off x="640080" y="1005840"/>
+            <a:ext cx="54864" cy="1005840"/>
+          </a:xfrm>
+          <a:prstGeom prst="rect">
+            <a:avLst/>
+          </a:prstGeom>
+          <a:solidFill>
+            <a:srgbClr val="D9534F"/>
+          </a:solidFill>
+          <a:ln/>
+        </p:spPr>
+      </p:sp>
+      <p:sp>
+        <p:nvSpPr>
+          <p:cNvPr id="5" name="Text 3"/>
+          <p:cNvSpPr/>
+          <p:nvPr/>
+        </p:nvSpPr>
+        <p:spPr>
+          <a:xfrm>
+            <a:off x="868680" y="1078992"/>
+            <a:ext cx="7406640" cy="320040"/>
+          </a:xfrm>
+          <a:prstGeom prst="rect">
+            <a:avLst/>
+          </a:prstGeom>
+          <a:noFill/>
+          <a:ln/>
+        </p:spPr>
+        <p:txBody>
+          <a:bodyPr wrap="square" lIns="0" tIns="0" rIns="0" bIns="0" rtlCol="0" anchor="ctr"/>
+          <a:lstStyle/>
+          <a:p>
+            <a:pPr indent="0" marL="0">
+              <a:buNone/>
+            </a:pPr>
+            <a:r>
+              <a:rPr lang="en-US" sz="1600" b="1" dirty="0">
+                <a:solidFill>
+                  <a:srgbClr val="D9534F"/>
+                </a:solidFill>
+                <a:latin typeface="Arial" pitchFamily="34" charset="0"/>
+                <a:ea typeface="Arial" pitchFamily="34" charset="-122"/>
+                <a:cs typeface="Arial" pitchFamily="34" charset="-120"/>
+              </a:rPr>
+              <a:t>"MC = monopolie"</a:t>
+            </a:r>
+            <a:endParaRPr lang="en-US" sz="1600" dirty="0"/>
+          </a:p>
+        </p:txBody>
+      </p:sp>
+      <p:sp>
+        <p:nvSpPr>
+          <p:cNvPr id="6" name="Text 4"/>
+          <p:cNvSpPr/>
+          <p:nvPr/>
+        </p:nvSpPr>
+        <p:spPr>
+          <a:xfrm>
+            <a:off x="868680" y="1417320"/>
+            <a:ext cx="7406640" cy="502920"/>
+          </a:xfrm>
+          <a:prstGeom prst="rect">
+            <a:avLst/>
+          </a:prstGeom>
+          <a:noFill/>
+          <a:ln/>
+        </p:spPr>
+        <p:txBody>
+          <a:bodyPr wrap="square" lIns="0" tIns="0" rIns="0" bIns="0" rtlCol="0" anchor="ctr"/>
+          <a:lstStyle/>
+          <a:p>
+            <a:pPr indent="0" marL="0">
+              <a:buNone/>
+            </a:pPr>
+            <a:r>
+              <a:rPr lang="en-US" sz="1300" dirty="0">
+                <a:solidFill>
+                  <a:srgbClr val="2D3748"/>
+                </a:solidFill>
+                <a:latin typeface="Arial" pitchFamily="34" charset="0"/>
+                <a:ea typeface="Arial" pitchFamily="34" charset="-122"/>
+                <a:cs typeface="Arial" pitchFamily="34" charset="-120"/>
+              </a:rPr>
+              <a:t>Onjuist: bij MC is er juist veel concurrentie. De ‘monopolistische’ verwijst naar de dalende vraaglijn, niet naar marktmacht.</a:t>
+            </a:r>
+            <a:endParaRPr lang="en-US" sz="1300" dirty="0"/>
+          </a:p>
+        </p:txBody>
+      </p:sp>
+      <p:sp>
+        <p:nvSpPr>
+          <p:cNvPr id="7" name="Shape 5"/>
+          <p:cNvSpPr/>
+          <p:nvPr/>
+        </p:nvSpPr>
+        <p:spPr>
+          <a:xfrm>
+            <a:off x="640080" y="2148840"/>
+            <a:ext cx="7863840" cy="1005840"/>
+          </a:xfrm>
+          <a:prstGeom prst="rect">
+            <a:avLst/>
+          </a:prstGeom>
+          <a:solidFill>
+            <a:srgbClr val="FDE8E8"/>
+          </a:solidFill>
+          <a:ln/>
+        </p:spPr>
+      </p:sp>
+      <p:sp>
+        <p:nvSpPr>
+          <p:cNvPr id="8" name="Shape 6"/>
+          <p:cNvSpPr/>
+          <p:nvPr/>
+        </p:nvSpPr>
+        <p:spPr>
+          <a:xfrm>
+            <a:off x="640080" y="2148840"/>
+            <a:ext cx="54864" cy="1005840"/>
+          </a:xfrm>
+          <a:prstGeom prst="rect">
+            <a:avLst/>
+          </a:prstGeom>
+          <a:solidFill>
+            <a:srgbClr val="D9534F"/>
+          </a:solidFill>
+          <a:ln/>
+        </p:spPr>
+      </p:sp>
+      <p:sp>
+        <p:nvSpPr>
+          <p:cNvPr id="9" name="Text 7"/>
+          <p:cNvSpPr/>
+          <p:nvPr/>
+        </p:nvSpPr>
+        <p:spPr>
+          <a:xfrm>
+            <a:off x="868680" y="2221992"/>
+            <a:ext cx="7406640" cy="320040"/>
+          </a:xfrm>
+          <a:prstGeom prst="rect">
+            <a:avLst/>
+          </a:prstGeom>
+          <a:noFill/>
+          <a:ln/>
+        </p:spPr>
+        <p:txBody>
+          <a:bodyPr wrap="square" lIns="0" tIns="0" rIns="0" bIns="0" rtlCol="0" anchor="ctr"/>
+          <a:lstStyle/>
+          <a:p>
+            <a:pPr indent="0" marL="0">
+              <a:buNone/>
+            </a:pPr>
+            <a:r>
+              <a:rPr lang="en-US" sz="1600" b="1" dirty="0">
+                <a:solidFill>
+                  <a:srgbClr val="D9534F"/>
+                </a:solidFill>
+                <a:latin typeface="Arial" pitchFamily="34" charset="0"/>
+                <a:ea typeface="Arial" pitchFamily="34" charset="-122"/>
+                <a:cs typeface="Arial" pitchFamily="34" charset="-120"/>
+              </a:rPr>
+              <a:t>"Op lange termijn verdwijnt alle concurrentie"</a:t>
+            </a:r>
+            <a:endParaRPr lang="en-US" sz="1600" dirty="0"/>
+          </a:p>
+        </p:txBody>
+      </p:sp>
+      <p:sp>
+        <p:nvSpPr>
+          <p:cNvPr id="10" name="Text 8"/>
+          <p:cNvSpPr/>
+          <p:nvPr/>
+        </p:nvSpPr>
+        <p:spPr>
+          <a:xfrm>
+            <a:off x="868680" y="2560320"/>
+            <a:ext cx="7406640" cy="502920"/>
+          </a:xfrm>
+          <a:prstGeom prst="rect">
+            <a:avLst/>
+          </a:prstGeom>
+          <a:noFill/>
+          <a:ln/>
+        </p:spPr>
+        <p:txBody>
+          <a:bodyPr wrap="square" lIns="0" tIns="0" rIns="0" bIns="0" rtlCol="0" anchor="ctr"/>
+          <a:lstStyle/>
+          <a:p>
+            <a:pPr indent="0" marL="0">
+              <a:buNone/>
+            </a:pPr>
+            <a:r>
+              <a:rPr lang="en-US" sz="1300" dirty="0">
+                <a:solidFill>
+                  <a:srgbClr val="2D3748"/>
+                </a:solidFill>
+                <a:latin typeface="Arial" pitchFamily="34" charset="0"/>
+                <a:ea typeface="Arial" pitchFamily="34" charset="-122"/>
+                <a:cs typeface="Arial" pitchFamily="34" charset="-120"/>
+              </a:rPr>
+              <a:t>Onjuist: er verdwijnt winst, niet concurrentie. Er zijn nog steeds veel aanbieders.</a:t>
+            </a:r>
+            <a:endParaRPr lang="en-US" sz="1300" dirty="0"/>
+          </a:p>
+        </p:txBody>
+      </p:sp>
+      <p:sp>
+        <p:nvSpPr>
+          <p:cNvPr id="11" name="Shape 9"/>
+          <p:cNvSpPr/>
+          <p:nvPr/>
+        </p:nvSpPr>
+        <p:spPr>
+          <a:xfrm>
+            <a:off x="640080" y="3291840"/>
+            <a:ext cx="7863840" cy="1005840"/>
+          </a:xfrm>
+          <a:prstGeom prst="rect">
+            <a:avLst/>
+          </a:prstGeom>
+          <a:solidFill>
+            <a:srgbClr val="FDE8E8"/>
+          </a:solidFill>
+          <a:ln/>
+        </p:spPr>
+      </p:sp>
+      <p:sp>
+        <p:nvSpPr>
+          <p:cNvPr id="12" name="Shape 10"/>
+          <p:cNvSpPr/>
+          <p:nvPr/>
+        </p:nvSpPr>
+        <p:spPr>
+          <a:xfrm>
+            <a:off x="640080" y="3291840"/>
+            <a:ext cx="54864" cy="1005840"/>
+          </a:xfrm>
+          <a:prstGeom prst="rect">
+            <a:avLst/>
+          </a:prstGeom>
+          <a:solidFill>
+            <a:srgbClr val="D9534F"/>
+          </a:solidFill>
+          <a:ln/>
+        </p:spPr>
+      </p:sp>
+      <p:sp>
+        <p:nvSpPr>
+          <p:cNvPr id="13" name="Text 11"/>
+          <p:cNvSpPr/>
+          <p:nvPr/>
+        </p:nvSpPr>
+        <p:spPr>
+          <a:xfrm>
+            <a:off x="868680" y="3364992"/>
+            <a:ext cx="7406640" cy="320040"/>
+          </a:xfrm>
+          <a:prstGeom prst="rect">
+            <a:avLst/>
+          </a:prstGeom>
+          <a:noFill/>
+          <a:ln/>
+        </p:spPr>
+        <p:txBody>
+          <a:bodyPr wrap="square" lIns="0" tIns="0" rIns="0" bIns="0" rtlCol="0" anchor="ctr"/>
+          <a:lstStyle/>
+          <a:p>
+            <a:pPr indent="0" marL="0">
+              <a:buNone/>
+            </a:pPr>
+            <a:r>
+              <a:rPr lang="en-US" sz="1600" b="1" dirty="0">
+                <a:solidFill>
+                  <a:srgbClr val="D9534F"/>
+                </a:solidFill>
+                <a:latin typeface="Arial" pitchFamily="34" charset="0"/>
+                <a:ea typeface="Arial" pitchFamily="34" charset="-122"/>
+                <a:cs typeface="Arial" pitchFamily="34" charset="-120"/>
+              </a:rPr>
+              <a:t>"Overcapaciteit = slecht voor iedereen"</a:t>
+            </a:r>
+            <a:endParaRPr lang="en-US" sz="1600" dirty="0"/>
+          </a:p>
+        </p:txBody>
+      </p:sp>
+      <p:sp>
+        <p:nvSpPr>
+          <p:cNvPr id="14" name="Text 12"/>
+          <p:cNvSpPr/>
+          <p:nvPr/>
+        </p:nvSpPr>
+        <p:spPr>
+          <a:xfrm>
+            <a:off x="868680" y="3703320"/>
+            <a:ext cx="7406640" cy="502920"/>
+          </a:xfrm>
+          <a:prstGeom prst="rect">
+            <a:avLst/>
+          </a:prstGeom>
+          <a:noFill/>
+          <a:ln/>
+        </p:spPr>
+        <p:txBody>
+          <a:bodyPr wrap="square" lIns="0" tIns="0" rIns="0" bIns="0" rtlCol="0" anchor="ctr"/>
+          <a:lstStyle/>
+          <a:p>
+            <a:pPr indent="0" marL="0">
+              <a:buNone/>
+            </a:pPr>
+            <a:r>
+              <a:rPr lang="en-US" sz="1300" dirty="0">
+                <a:solidFill>
+                  <a:srgbClr val="2D3748"/>
+                </a:solidFill>
+                <a:latin typeface="Arial" pitchFamily="34" charset="0"/>
+                <a:ea typeface="Arial" pitchFamily="34" charset="-122"/>
+                <a:cs typeface="Arial" pitchFamily="34" charset="-120"/>
+              </a:rPr>
+              <a:t>Nuance: overcapaciteit is inefficiënt, maar consumenten profiteren van meer keuzevrijheid (variatie in producten).</a:t>
+            </a:r>
+            <a:endParaRPr lang="en-US" sz="1300" dirty="0"/>
+          </a:p>
+        </p:txBody>
+      </p:sp>
+    </p:spTree>
+  </p:cSld>
+  <p:clrMapOvr>
+    <a:masterClrMapping/>
+  </p:clrMapOvr>
+</p:sld>
+</file>
+
+<file path=ppt/slides/slide13.xml><?xml version="1.0" encoding="utf-8"?>
+<p:sld xmlns:a="http://schemas.openxmlformats.org/drawingml/2006/main" xmlns:r="http://schemas.openxmlformats.org/officeDocument/2006/relationships" xmlns:p="http://schemas.openxmlformats.org/presentationml/2006/main">
+  <p:cSld name="Slide 13">
+    <p:spTree>
+      <p:nvGrpSpPr>
+        <p:cNvPr id="1" name=""/>
+        <p:cNvGrpSpPr/>
+        <p:nvPr/>
+      </p:nvGrpSpPr>
+      <p:grpSpPr>
+        <a:xfrm>
+          <a:off x="0" y="0"/>
+          <a:ext cx="0" cy="0"/>
+          <a:chOff x="0" y="0"/>
+          <a:chExt cx="0" cy="0"/>
+        </a:xfrm>
+      </p:grpSpPr>
+      <p:sp>
+        <p:nvSpPr>
+          <p:cNvPr id="2" name="Shape 0"/>
+          <p:cNvSpPr/>
+          <p:nvPr/>
+        </p:nvSpPr>
+        <p:spPr>
+          <a:xfrm>
+            <a:off x="0" y="0"/>
+            <a:ext cx="9144000" cy="54864"/>
+          </a:xfrm>
+          <a:prstGeom prst="rect">
+            <a:avLst/>
+          </a:prstGeom>
+          <a:solidFill>
+            <a:srgbClr val="1A5276"/>
+          </a:solidFill>
+          <a:ln/>
+        </p:spPr>
+      </p:sp>
+      <p:sp>
+        <p:nvSpPr>
+          <p:cNvPr id="3" name="Text 1"/>
+          <p:cNvSpPr/>
+          <p:nvPr/>
+        </p:nvSpPr>
+        <p:spPr>
+          <a:xfrm>
+            <a:off x="640080" y="274320"/>
+            <a:ext cx="7863840" cy="548640"/>
+          </a:xfrm>
+          <a:prstGeom prst="rect">
+            <a:avLst/>
+          </a:prstGeom>
+          <a:noFill/>
+          <a:ln/>
+        </p:spPr>
+        <p:txBody>
+          <a:bodyPr wrap="square" lIns="0" tIns="0" rIns="0" bIns="0" rtlCol="0" anchor="ctr"/>
+          <a:lstStyle/>
+          <a:p>
+            <a:pPr indent="0" marL="0">
+              <a:buNone/>
+            </a:pPr>
+            <a:r>
+              <a:rPr lang="en-US" sz="2800" b="1" dirty="0">
+                <a:solidFill>
+                  <a:srgbClr val="FFFFFF"/>
+                </a:solidFill>
+                <a:latin typeface="Arial" pitchFamily="34" charset="0"/>
+                <a:ea typeface="Arial" pitchFamily="34" charset="-122"/>
+                <a:cs typeface="Arial" pitchFamily="34" charset="-120"/>
+              </a:rPr>
+              <a:t>Samenvatting</a:t>
+            </a:r>
+            <a:endParaRPr lang="en-US" sz="2800" dirty="0"/>
+          </a:p>
+        </p:txBody>
+      </p:sp>
+      <p:sp>
+        <p:nvSpPr>
+          <p:cNvPr id="4" name="Text 2"/>
+          <p:cNvSpPr/>
+          <p:nvPr/>
+        </p:nvSpPr>
+        <p:spPr>
+          <a:xfrm>
+            <a:off x="640080" y="777240"/>
+            <a:ext cx="7863840" cy="365760"/>
+          </a:xfrm>
+          <a:prstGeom prst="rect">
+            <a:avLst/>
+          </a:prstGeom>
+          <a:noFill/>
+          <a:ln/>
+        </p:spPr>
+        <p:txBody>
+          <a:bodyPr wrap="square" lIns="0" tIns="0" rIns="0" bIns="0" rtlCol="0" anchor="ctr"/>
+          <a:lstStyle/>
+          <a:p>
+            <a:pPr indent="0" marL="0">
+              <a:buNone/>
+            </a:pPr>
+            <a:r>
+              <a:rPr lang="en-US" sz="1400" i="1" dirty="0">
+                <a:solidFill>
+                  <a:srgbClr val="718096"/>
+                </a:solidFill>
+                <a:latin typeface="Arial" pitchFamily="34" charset="0"/>
+                <a:ea typeface="Arial" pitchFamily="34" charset="-122"/>
+                <a:cs typeface="Arial" pitchFamily="34" charset="-120"/>
+              </a:rPr>
+              <a:t>Beheers je dit voordat je gaat oefenen?</a:t>
+            </a:r>
+            <a:endParaRPr lang="en-US" sz="1400" dirty="0"/>
+          </a:p>
+        </p:txBody>
+      </p:sp>
+      <p:sp>
+        <p:nvSpPr>
+          <p:cNvPr id="5" name="Text 3"/>
+          <p:cNvSpPr/>
+          <p:nvPr/>
+        </p:nvSpPr>
+        <p:spPr>
+          <a:xfrm>
+            <a:off x="640080" y="1371600"/>
+            <a:ext cx="7863840" cy="3200400"/>
+          </a:xfrm>
+          <a:prstGeom prst="rect">
+            <a:avLst/>
+          </a:prstGeom>
+          <a:noFill/>
+          <a:ln/>
+        </p:spPr>
+        <p:txBody>
           <a:bodyPr wrap="square" rtlCol="0" anchor="ctr"/>
           <a:lstStyle/>
           <a:p>
-            <a:pPr indent="0" marL="0">
-              <a:buNone/>
-            </a:pPr>
-            <a:r>
-              <a:rPr lang="en-US" sz="2800" b="1" dirty="0">
-                <a:solidFill>
-                  <a:srgbClr val="FFFFFF"/>
-                </a:solidFill>
-                <a:latin typeface="Arial" pitchFamily="34" charset="0"/>
-                <a:ea typeface="Arial" pitchFamily="34" charset="-122"/>
-                <a:cs typeface="Arial" pitchFamily="34" charset="-120"/>
-              </a:rPr>
-              <a:t>Samenvatting</a:t>
-            </a:r>
-            <a:endParaRPr lang="en-US" sz="2800" dirty="0"/>
-          </a:p>
-        </p:txBody>
-      </p:sp>
-      <p:sp>
-        <p:nvSpPr>
-          <p:cNvPr id="3" name="Text 1"/>
-          <p:cNvSpPr/>
-          <p:nvPr/>
-        </p:nvSpPr>
-        <p:spPr>
-          <a:xfrm>
-            <a:off x="640080" y="1051560"/>
-            <a:ext cx="7863840" cy="365760"/>
-          </a:xfrm>
-          <a:prstGeom prst="rect">
-            <a:avLst/>
-          </a:prstGeom>
-          <a:noFill/>
-          <a:ln/>
-        </p:spPr>
-        <p:txBody>
-          <a:bodyPr wrap="square" rtlCol="0" anchor="ctr"/>
-          <a:lstStyle/>
-          <a:p>
-            <a:pPr indent="0" marL="0">
-              <a:buNone/>
-            </a:pPr>
-            <a:r>
-              <a:rPr lang="en-US" sz="1400" i="1" dirty="0">
-                <a:solidFill>
-                  <a:srgbClr val="718096"/>
-                </a:solidFill>
-                <a:latin typeface="Arial" pitchFamily="34" charset="0"/>
-                <a:ea typeface="Arial" pitchFamily="34" charset="-122"/>
-                <a:cs typeface="Arial" pitchFamily="34" charset="-120"/>
-              </a:rPr>
-              <a:t>Beheers je dit voordat je gaat oefenen?</a:t>
-            </a:r>
-            <a:endParaRPr lang="en-US" sz="1400" dirty="0"/>
-          </a:p>
-        </p:txBody>
-      </p:sp>
-      <p:sp>
-        <p:nvSpPr>
-          <p:cNvPr id="4" name="Text 2"/>
-          <p:cNvSpPr/>
-          <p:nvPr/>
-        </p:nvSpPr>
-        <p:spPr>
-          <a:xfrm>
-            <a:off x="640080" y="1554480"/>
-            <a:ext cx="7863840" cy="2926080"/>
-          </a:xfrm>
-          <a:prstGeom prst="rect">
-            <a:avLst/>
-          </a:prstGeom>
-          <a:noFill/>
-          <a:ln/>
-        </p:spPr>
-        <p:txBody>
-          <a:bodyPr wrap="square" rtlCol="0" anchor="t"/>
-          <a:lstStyle/>
-          <a:p>
-            <a:pPr algn="l" marL="342900" indent="-342900">
-              <a:lnSpc>
-                <a:spcPct val="160000"/>
-              </a:lnSpc>
+            <a:pPr marL="342900" indent="-342900">
               <a:spcAft>
-                <a:spcPts val="600"/>
+                <a:spcPts val="800"/>
               </a:spcAft>
               <a:buSzPct val="100000"/>
               <a:buChar char="•"/>
@@ -3069,14 +3601,12 @@
               </a:rPr>
               <a:t>Heterogeen product, veel aanbieders, lage drempels</a:t>
             </a:r>
-          </a:p>
-          <a:p>
-            <a:pPr algn="l" marL="342900" indent="-342900">
-              <a:lnSpc>
-                <a:spcPct val="160000"/>
-              </a:lnSpc>
+            <a:endParaRPr lang="en-US" sz="1500" dirty="0"/>
+          </a:p>
+          <a:p>
+            <a:pPr marL="342900" indent="-342900">
               <a:spcAft>
-                <a:spcPts val="600"/>
+                <a:spcPts val="800"/>
               </a:spcAft>
               <a:buSzPct val="100000"/>
               <a:buChar char="•"/>
@@ -3092,14 +3622,12 @@
               </a:rPr>
               <a:t>Elke aanbieder heeft een dalende vraaglijn</a:t>
             </a:r>
-          </a:p>
-          <a:p>
-            <a:pPr algn="l" marL="342900" indent="-342900">
-              <a:lnSpc>
-                <a:spcPct val="160000"/>
-              </a:lnSpc>
+            <a:endParaRPr lang="en-US" sz="1500" dirty="0"/>
+          </a:p>
+          <a:p>
+            <a:pPr marL="342900" indent="-342900">
               <a:spcAft>
-                <a:spcPts val="600"/>
+                <a:spcPts val="800"/>
               </a:spcAft>
               <a:buSzPct val="100000"/>
               <a:buChar char="•"/>
@@ -3113,16 +3641,14 @@
                 <a:ea typeface="Arial" pitchFamily="34" charset="-122"/>
                 <a:cs typeface="Arial" pitchFamily="34" charset="-120"/>
               </a:rPr>
-              <a:t>Korte termijn: winst mogelijk (MO = MK, p &gt; GTK)</a:t>
-            </a:r>
-          </a:p>
-          <a:p>
-            <a:pPr algn="l" marL="342900" indent="-342900">
-              <a:lnSpc>
-                <a:spcPct val="160000"/>
-              </a:lnSpc>
+              <a:t>Korte termijn: winst mogelijk (MO = MK, p* &gt; GTK)</a:t>
+            </a:r>
+            <a:endParaRPr lang="en-US" sz="1500" dirty="0"/>
+          </a:p>
+          <a:p>
+            <a:pPr marL="342900" indent="-342900">
               <a:spcAft>
-                <a:spcPts val="600"/>
+                <a:spcPts val="800"/>
               </a:spcAft>
               <a:buSzPct val="100000"/>
               <a:buChar char="•"/>
@@ -3136,16 +3662,14 @@
                 <a:ea typeface="Arial" pitchFamily="34" charset="-122"/>
                 <a:cs typeface="Arial" pitchFamily="34" charset="-120"/>
               </a:rPr>
-              <a:t>Lange termijn: toetreding → winst verdwijnt (V raakt GTK)</a:t>
-            </a:r>
-          </a:p>
-          <a:p>
-            <a:pPr algn="l" marL="342900" indent="-342900">
-              <a:lnSpc>
-                <a:spcPct val="160000"/>
-              </a:lnSpc>
+              <a:t>Lange termijn: toetreding → vraaglijn schuift links → winst = 0</a:t>
+            </a:r>
+            <a:endParaRPr lang="en-US" sz="1500" dirty="0"/>
+          </a:p>
+          <a:p>
+            <a:pPr marL="342900" indent="-342900">
               <a:spcAft>
-                <a:spcPts val="600"/>
+                <a:spcPts val="800"/>
               </a:spcAft>
               <a:buSzPct val="100000"/>
               <a:buChar char="•"/>
@@ -3159,16 +3683,14 @@
                 <a:ea typeface="Arial" pitchFamily="34" charset="-122"/>
                 <a:cs typeface="Arial" pitchFamily="34" charset="-120"/>
               </a:rPr>
-              <a:t>Productie links van GTK-minimum → overcapaciteit</a:t>
-            </a:r>
-          </a:p>
-          <a:p>
-            <a:pPr algn="l" marL="342900" indent="-342900">
-              <a:lnSpc>
-                <a:spcPct val="160000"/>
-              </a:lnSpc>
+              <a:t>Break-even: vraaglijn raakt GTK (tangent)</a:t>
+            </a:r>
+            <a:endParaRPr lang="en-US" sz="1500" dirty="0"/>
+          </a:p>
+          <a:p>
+            <a:pPr marL="342900" indent="-342900">
               <a:spcAft>
-                <a:spcPts val="600"/>
+                <a:spcPts val="800"/>
               </a:spcAft>
               <a:buSzPct val="100000"/>
               <a:buChar char="•"/>
@@ -3182,10 +3704,52 @@
                 <a:ea typeface="Arial" pitchFamily="34" charset="-122"/>
                 <a:cs typeface="Arial" pitchFamily="34" charset="-120"/>
               </a:rPr>
-              <a:t>Marktaandeel = eigen afzet / totale afzet × 100%</a:t>
-            </a:r>
-          </a:p>
-        </p:txBody>
+              <a:t>Vergelijking VC: MC heeft hogere prijs en overcapaciteit</a:t>
+            </a:r>
+            <a:endParaRPr lang="en-US" sz="1500" dirty="0"/>
+          </a:p>
+          <a:p>
+            <a:pPr marL="342900" indent="-342900">
+              <a:spcAft>
+                <a:spcPts val="800"/>
+              </a:spcAft>
+              <a:buSzPct val="100000"/>
+              <a:buChar char="•"/>
+            </a:pPr>
+            <a:r>
+              <a:rPr lang="en-US" sz="1500" dirty="0">
+                <a:solidFill>
+                  <a:srgbClr val="FFFFFF"/>
+                </a:solidFill>
+                <a:latin typeface="Arial" pitchFamily="34" charset="0"/>
+                <a:ea typeface="Arial" pitchFamily="34" charset="-122"/>
+                <a:cs typeface="Arial" pitchFamily="34" charset="-120"/>
+              </a:rPr>
+              <a:t>Marktaandeel = (eigen afzet / totale marktafzet) × 100%</a:t>
+            </a:r>
+            <a:endParaRPr lang="en-US" sz="1500" dirty="0"/>
+          </a:p>
+        </p:txBody>
+      </p:sp>
+      <p:sp>
+        <p:nvSpPr>
+          <p:cNvPr id="6" name="Shape 4"/>
+          <p:cNvSpPr/>
+          <p:nvPr/>
+        </p:nvSpPr>
+        <p:spPr>
+          <a:xfrm>
+            <a:off x="0" y="4709160"/>
+            <a:ext cx="9144000" cy="434340"/>
+          </a:xfrm>
+          <a:prstGeom prst="rect">
+            <a:avLst/>
+          </a:prstGeom>
+          <a:solidFill>
+            <a:srgbClr val="151D4A"/>
+          </a:solidFill>
+          <a:ln/>
+        </p:spPr>
       </p:sp>
     </p:spTree>
   </p:cSld>
@@ -3230,52 +3794,49 @@
           <a:ln/>
         </p:spPr>
         <p:txBody>
+          <a:bodyPr wrap="square" lIns="0" tIns="0" rIns="0" bIns="0" rtlCol="0" anchor="ctr"/>
+          <a:lstStyle/>
+          <a:p>
+            <a:pPr indent="0" marL="0">
+              <a:buNone/>
+            </a:pPr>
+            <a:r>
+              <a:rPr lang="en-US" sz="2400" b="1" dirty="0">
+                <a:solidFill>
+                  <a:srgbClr val="FFFFFF"/>
+                </a:solidFill>
+                <a:latin typeface="Arial" pitchFamily="34" charset="0"/>
+                <a:ea typeface="Arial" pitchFamily="34" charset="-122"/>
+                <a:cs typeface="Arial" pitchFamily="34" charset="-120"/>
+              </a:rPr>
+              <a:t>Wat moet je kunnen?</a:t>
+            </a:r>
+            <a:endParaRPr lang="en-US" sz="2400" dirty="0"/>
+          </a:p>
+        </p:txBody>
+      </p:sp>
+      <p:sp>
+        <p:nvSpPr>
+          <p:cNvPr id="3" name="Text 1"/>
+          <p:cNvSpPr/>
+          <p:nvPr/>
+        </p:nvSpPr>
+        <p:spPr>
+          <a:xfrm>
+            <a:off x="640080" y="1097280"/>
+            <a:ext cx="7863840" cy="3200400"/>
+          </a:xfrm>
+          <a:prstGeom prst="rect">
+            <a:avLst/>
+          </a:prstGeom>
+          <a:noFill/>
+          <a:ln/>
+        </p:spPr>
+        <p:txBody>
           <a:bodyPr wrap="square" rtlCol="0" anchor="ctr"/>
           <a:lstStyle/>
           <a:p>
-            <a:pPr indent="0" marL="0">
-              <a:buNone/>
-            </a:pPr>
-            <a:r>
-              <a:rPr lang="en-US" sz="2400" b="1" dirty="0">
-                <a:solidFill>
-                  <a:srgbClr val="FFFFFF"/>
-                </a:solidFill>
-                <a:latin typeface="Arial" pitchFamily="34" charset="0"/>
-                <a:ea typeface="Arial" pitchFamily="34" charset="-122"/>
-                <a:cs typeface="Arial" pitchFamily="34" charset="-120"/>
-              </a:rPr>
-              <a:t>Wat ga je leren?</a:t>
-            </a:r>
-            <a:endParaRPr lang="en-US" sz="2400" dirty="0"/>
-          </a:p>
-        </p:txBody>
-      </p:sp>
-      <p:sp>
-        <p:nvSpPr>
-          <p:cNvPr id="3" name="Text 1"/>
-          <p:cNvSpPr/>
-          <p:nvPr/>
-        </p:nvSpPr>
-        <p:spPr>
-          <a:xfrm>
-            <a:off x="640080" y="1097280"/>
-            <a:ext cx="7863840" cy="3474720"/>
-          </a:xfrm>
-          <a:prstGeom prst="rect">
-            <a:avLst/>
-          </a:prstGeom>
-          <a:noFill/>
-          <a:ln/>
-        </p:spPr>
-        <p:txBody>
-          <a:bodyPr wrap="square" rtlCol="0" anchor="t"/>
-          <a:lstStyle/>
-          <a:p>
-            <a:pPr algn="l" marL="342900" indent="-342900">
-              <a:lnSpc>
-                <a:spcPct val="150000"/>
-              </a:lnSpc>
+            <a:pPr marL="342900" indent="-342900">
               <a:spcAft>
                 <a:spcPts val="800"/>
               </a:spcAft>
@@ -3293,10 +3854,10 @@
               </a:rPr>
               <a:t>Kenmerken van monopolistische concurrentie herkennen</a:t>
             </a:r>
-            <a:pPr algn="l" marL="342900" indent="-342900">
-              <a:lnSpc>
-                <a:spcPct val="150000"/>
-              </a:lnSpc>
+            <a:endParaRPr lang="en-US" sz="1600" dirty="0"/>
+          </a:p>
+          <a:p>
+            <a:pPr marL="342900" indent="-342900">
               <a:spcAft>
                 <a:spcPts val="800"/>
               </a:spcAft>
@@ -3314,10 +3875,10 @@
               </a:rPr>
               <a:t>Effect van toetreding op de vraaglijn uitleggen</a:t>
             </a:r>
-            <a:pPr algn="l" marL="342900" indent="-342900">
-              <a:lnSpc>
-                <a:spcPct val="150000"/>
-              </a:lnSpc>
+            <a:endParaRPr lang="en-US" sz="1600" dirty="0"/>
+          </a:p>
+          <a:p>
+            <a:pPr marL="342900" indent="-342900">
               <a:spcAft>
                 <a:spcPts val="800"/>
               </a:spcAft>
@@ -3335,10 +3896,10 @@
               </a:rPr>
               <a:t>Winst bepalen via MO = MK en vergelijken met GTK</a:t>
             </a:r>
-            <a:pPr algn="l" marL="342900" indent="-342900">
-              <a:lnSpc>
-                <a:spcPct val="150000"/>
-              </a:lnSpc>
+            <a:endParaRPr lang="en-US" sz="1600" dirty="0"/>
+          </a:p>
+          <a:p>
+            <a:pPr marL="342900" indent="-342900">
               <a:spcAft>
                 <a:spcPts val="800"/>
               </a:spcAft>
@@ -3354,12 +3915,12 @@
                 <a:ea typeface="Arial" pitchFamily="34" charset="-122"/>
                 <a:cs typeface="Arial" pitchFamily="34" charset="-120"/>
               </a:rPr>
-              <a:t>Uitleggen waarom winst op lange termijn verdwijnt</a:t>
-            </a:r>
-            <a:pPr algn="l" marL="342900" indent="-342900">
-              <a:lnSpc>
-                <a:spcPct val="150000"/>
-              </a:lnSpc>
+              <a:t>Verschil tussen korte en lange termijn uitleggen</a:t>
+            </a:r>
+            <a:endParaRPr lang="en-US" sz="1600" dirty="0"/>
+          </a:p>
+          <a:p>
+            <a:pPr marL="342900" indent="-342900">
               <a:spcAft>
                 <a:spcPts val="800"/>
               </a:spcAft>
@@ -3375,12 +3936,12 @@
                 <a:ea typeface="Arial" pitchFamily="34" charset="-122"/>
                 <a:cs typeface="Arial" pitchFamily="34" charset="-120"/>
               </a:rPr>
-              <a:t>Verschil met volkomen concurrentie benoemen</a:t>
-            </a:r>
-            <a:pPr algn="l" marL="342900" indent="-342900">
-              <a:lnSpc>
-                <a:spcPct val="150000"/>
-              </a:lnSpc>
+              <a:t>MC vergelijken met volkomen concurrentie</a:t>
+            </a:r>
+            <a:endParaRPr lang="en-US" sz="1600" dirty="0"/>
+          </a:p>
+          <a:p>
+            <a:pPr marL="342900" indent="-342900">
               <a:spcAft>
                 <a:spcPts val="800"/>
               </a:spcAft>
@@ -3445,7 +4006,7 @@
           <a:ln/>
         </p:spPr>
         <p:txBody>
-          <a:bodyPr wrap="square" rtlCol="0" anchor="ctr"/>
+          <a:bodyPr wrap="square" lIns="0" tIns="0" rIns="0" bIns="0" rtlCol="0" anchor="ctr"/>
           <a:lstStyle/>
           <a:p>
             <a:pPr indent="0" marL="0">
@@ -3474,76 +4035,11 @@
         </p:nvSpPr>
         <p:spPr>
           <a:xfrm>
-            <a:off x="640080" y="1051560"/>
-            <a:ext cx="502920" cy="502920"/>
-          </a:xfrm>
-          <a:prstGeom prst="ellipse">
-            <a:avLst/>
-          </a:prstGeom>
-          <a:solidFill>
-            <a:srgbClr val="1A5276"/>
-          </a:solidFill>
-          <a:ln/>
-        </p:spPr>
-        <p:txBody>
-          <a:bodyPr/>
-          <a:p/>
-        </p:txBody>
-      </p:sp>
-      <p:sp>
-        <p:nvSpPr>
-          <p:cNvPr id="4" name="Text 2"/>
-          <p:cNvSpPr/>
-          <p:nvPr/>
-        </p:nvSpPr>
-        <p:spPr>
-          <a:xfrm>
-            <a:off x="640080" y="1051560"/>
-            <a:ext cx="502920" cy="502920"/>
-          </a:xfrm>
-          <a:prstGeom prst="rect">
-            <a:avLst/>
-          </a:prstGeom>
-          <a:noFill/>
-          <a:ln/>
-        </p:spPr>
-        <p:txBody>
-          <a:bodyPr wrap="square" rtlCol="0" anchor="ctr"/>
-          <a:lstStyle/>
-          <a:p>
-            <a:pPr algn="ctr" indent="0" marL="0">
-              <a:buNone/>
-            </a:pPr>
-            <a:r>
-              <a:rPr lang="en-US" sz="2000" b="1" dirty="0">
-                <a:solidFill>
-                  <a:srgbClr val="FFFFFF"/>
-                </a:solidFill>
-                <a:latin typeface="Arial" pitchFamily="34" charset="0"/>
-                <a:ea typeface="Arial" pitchFamily="34" charset="-122"/>
-                <a:cs typeface="Arial" pitchFamily="34" charset="-120"/>
-              </a:rPr>
-              <a:t>1</a:t>
-            </a:r>
-            <a:endParaRPr lang="en-US" sz="2000" dirty="0"/>
-          </a:p>
-        </p:txBody>
-      </p:sp>
-      <p:sp>
-        <p:nvSpPr>
-          <p:cNvPr id="5" name="Shape 3"/>
-          <p:cNvSpPr/>
-          <p:nvPr/>
-        </p:nvSpPr>
-        <p:spPr>
-          <a:xfrm>
-            <a:off x="1371600" y="960120"/>
-            <a:ext cx="7132320" cy="1005840"/>
-          </a:xfrm>
-          <a:prstGeom prst="rect">
-            <a:avLst>
-              <a:gd name="adj" fmla="val 4545"/>
-            </a:avLst>
+            <a:off x="640080" y="1005840"/>
+            <a:ext cx="7863840" cy="1097280"/>
+          </a:xfrm>
+          <a:prstGeom prst="rect">
+            <a:avLst/>
           </a:prstGeom>
           <a:solidFill>
             <a:srgbClr val="F9F6F1"/>
@@ -3557,21 +4053,17 @@
             </a:outerShdw>
           </a:effectLst>
         </p:spPr>
-        <p:txBody>
-          <a:bodyPr/>
-          <a:p/>
-        </p:txBody>
-      </p:sp>
-      <p:sp>
-        <p:nvSpPr>
-          <p:cNvPr id="6" name="Shape 4"/>
-          <p:cNvSpPr/>
-          <p:nvPr/>
-        </p:nvSpPr>
-        <p:spPr>
-          <a:xfrm>
-            <a:off x="1371600" y="960120"/>
-            <a:ext cx="54864" cy="1005840"/>
+      </p:sp>
+      <p:sp>
+        <p:nvSpPr>
+          <p:cNvPr id="4" name="Shape 2"/>
+          <p:cNvSpPr/>
+          <p:nvPr/>
+        </p:nvSpPr>
+        <p:spPr>
+          <a:xfrm>
+            <a:off x="640080" y="1005840"/>
+            <a:ext cx="54864" cy="1097280"/>
           </a:xfrm>
           <a:prstGeom prst="rect">
             <a:avLst/>
@@ -3581,9 +4073,64 @@
           </a:solidFill>
           <a:ln/>
         </p:spPr>
-        <p:txBody>
-          <a:bodyPr/>
-          <a:p/>
+      </p:sp>
+      <p:sp>
+        <p:nvSpPr>
+          <p:cNvPr id="5" name="Shape 3"/>
+          <p:cNvSpPr/>
+          <p:nvPr/>
+        </p:nvSpPr>
+        <p:spPr>
+          <a:xfrm>
+            <a:off x="822960" y="1188720"/>
+            <a:ext cx="502920" cy="502920"/>
+          </a:xfrm>
+          <a:prstGeom prst="ellipse">
+            <a:avLst/>
+          </a:prstGeom>
+          <a:solidFill>
+            <a:srgbClr val="1A5276"/>
+          </a:solidFill>
+          <a:ln/>
+        </p:spPr>
+      </p:sp>
+      <p:sp>
+        <p:nvSpPr>
+          <p:cNvPr id="6" name="Text 4"/>
+          <p:cNvSpPr/>
+          <p:nvPr/>
+        </p:nvSpPr>
+        <p:spPr>
+          <a:xfrm>
+            <a:off x="822960" y="1188720"/>
+            <a:ext cx="502920" cy="502920"/>
+          </a:xfrm>
+          <a:prstGeom prst="rect">
+            <a:avLst/>
+          </a:prstGeom>
+          <a:noFill/>
+          <a:ln/>
+        </p:spPr>
+        <p:txBody>
+          <a:bodyPr wrap="square" lIns="0" tIns="0" rIns="0" bIns="0" rtlCol="0" anchor="ctr"/>
+          <a:lstStyle/>
+          <a:p>
+            <a:pPr algn="ctr" indent="0" marL="0">
+              <a:buNone/>
+            </a:pPr>
+            <a:r>
+              <a:rPr lang="en-US" sz="2000" b="1" dirty="0">
+                <a:solidFill>
+                  <a:srgbClr val="FFFFFF"/>
+                </a:solidFill>
+                <a:latin typeface="Arial" pitchFamily="34" charset="0"/>
+                <a:ea typeface="Arial" pitchFamily="34" charset="-122"/>
+                <a:cs typeface="Arial" pitchFamily="34" charset="-120"/>
+              </a:rPr>
+              <a:t>1</a:t>
+            </a:r>
+            <a:endParaRPr lang="en-US" sz="2000" dirty="0"/>
+          </a:p>
         </p:txBody>
       </p:sp>
       <p:sp>
@@ -3594,7 +4141,7 @@
         </p:nvSpPr>
         <p:spPr>
           <a:xfrm>
-            <a:off x="1600200" y="1051560"/>
+            <a:off x="1554480" y="1097280"/>
             <a:ext cx="6675120" cy="365760"/>
           </a:xfrm>
           <a:prstGeom prst="rect">
@@ -3604,7 +4151,7 @@
           <a:ln/>
         </p:spPr>
         <p:txBody>
-          <a:bodyPr wrap="square" rtlCol="0" anchor="t"/>
+          <a:bodyPr wrap="square" lIns="0" tIns="0" rIns="0" bIns="0" rtlCol="0" anchor="ctr"/>
           <a:lstStyle/>
           <a:p>
             <a:pPr indent="0" marL="0">
@@ -3633,8 +4180,8 @@
         </p:nvSpPr>
         <p:spPr>
           <a:xfrm>
-            <a:off x="1600200" y="1435608"/>
-            <a:ext cx="6675120" cy="411480"/>
+            <a:off x="1554480" y="1508760"/>
+            <a:ext cx="6675120" cy="502920"/>
           </a:xfrm>
           <a:prstGeom prst="rect">
             <a:avLst/>
@@ -3643,7 +4190,7 @@
           <a:ln/>
         </p:spPr>
         <p:txBody>
-          <a:bodyPr wrap="square" rtlCol="0" anchor="t"/>
+          <a:bodyPr wrap="square" lIns="0" tIns="0" rIns="0" bIns="0" rtlCol="0" anchor="ctr"/>
           <a:lstStyle/>
           <a:p>
             <a:pPr indent="0" marL="0">
@@ -3672,76 +4219,11 @@
         </p:nvSpPr>
         <p:spPr>
           <a:xfrm>
-            <a:off x="640080" y="2286000"/>
-            <a:ext cx="502920" cy="502920"/>
-          </a:xfrm>
-          <a:prstGeom prst="ellipse">
-            <a:avLst/>
-          </a:prstGeom>
-          <a:solidFill>
-            <a:srgbClr val="1A5276"/>
-          </a:solidFill>
-          <a:ln/>
-        </p:spPr>
-        <p:txBody>
-          <a:bodyPr/>
-          <a:p/>
-        </p:txBody>
-      </p:sp>
-      <p:sp>
-        <p:nvSpPr>
-          <p:cNvPr id="10" name="Text 8"/>
-          <p:cNvSpPr/>
-          <p:nvPr/>
-        </p:nvSpPr>
-        <p:spPr>
-          <a:xfrm>
-            <a:off x="640080" y="2286000"/>
-            <a:ext cx="502920" cy="502920"/>
-          </a:xfrm>
-          <a:prstGeom prst="rect">
-            <a:avLst/>
-          </a:prstGeom>
-          <a:noFill/>
-          <a:ln/>
-        </p:spPr>
-        <p:txBody>
-          <a:bodyPr wrap="square" rtlCol="0" anchor="ctr"/>
-          <a:lstStyle/>
-          <a:p>
-            <a:pPr algn="ctr" indent="0" marL="0">
-              <a:buNone/>
-            </a:pPr>
-            <a:r>
-              <a:rPr lang="en-US" sz="2000" b="1" dirty="0">
-                <a:solidFill>
-                  <a:srgbClr val="FFFFFF"/>
-                </a:solidFill>
-                <a:latin typeface="Arial" pitchFamily="34" charset="0"/>
-                <a:ea typeface="Arial" pitchFamily="34" charset="-122"/>
-                <a:cs typeface="Arial" pitchFamily="34" charset="-120"/>
-              </a:rPr>
-              <a:t>2</a:t>
-            </a:r>
-            <a:endParaRPr lang="en-US" sz="2000" dirty="0"/>
-          </a:p>
-        </p:txBody>
-      </p:sp>
-      <p:sp>
-        <p:nvSpPr>
-          <p:cNvPr id="11" name="Shape 9"/>
-          <p:cNvSpPr/>
-          <p:nvPr/>
-        </p:nvSpPr>
-        <p:spPr>
-          <a:xfrm>
-            <a:off x="1371600" y="2194560"/>
-            <a:ext cx="7132320" cy="1005840"/>
-          </a:xfrm>
-          <a:prstGeom prst="rect">
-            <a:avLst>
-              <a:gd name="adj" fmla="val 4545"/>
-            </a:avLst>
+            <a:off x="640080" y="2240280"/>
+            <a:ext cx="7863840" cy="1097280"/>
+          </a:xfrm>
+          <a:prstGeom prst="rect">
+            <a:avLst/>
           </a:prstGeom>
           <a:solidFill>
             <a:srgbClr val="F9F6F1"/>
@@ -3755,21 +4237,17 @@
             </a:outerShdw>
           </a:effectLst>
         </p:spPr>
-        <p:txBody>
-          <a:bodyPr/>
-          <a:p/>
-        </p:txBody>
-      </p:sp>
-      <p:sp>
-        <p:nvSpPr>
-          <p:cNvPr id="12" name="Shape 10"/>
-          <p:cNvSpPr/>
-          <p:nvPr/>
-        </p:nvSpPr>
-        <p:spPr>
-          <a:xfrm>
-            <a:off x="1371600" y="2194560"/>
-            <a:ext cx="54864" cy="1005840"/>
+      </p:sp>
+      <p:sp>
+        <p:nvSpPr>
+          <p:cNvPr id="10" name="Shape 8"/>
+          <p:cNvSpPr/>
+          <p:nvPr/>
+        </p:nvSpPr>
+        <p:spPr>
+          <a:xfrm>
+            <a:off x="640080" y="2240280"/>
+            <a:ext cx="54864" cy="1097280"/>
           </a:xfrm>
           <a:prstGeom prst="rect">
             <a:avLst/>
@@ -3779,9 +4257,64 @@
           </a:solidFill>
           <a:ln/>
         </p:spPr>
-        <p:txBody>
-          <a:bodyPr/>
-          <a:p/>
+      </p:sp>
+      <p:sp>
+        <p:nvSpPr>
+          <p:cNvPr id="11" name="Shape 9"/>
+          <p:cNvSpPr/>
+          <p:nvPr/>
+        </p:nvSpPr>
+        <p:spPr>
+          <a:xfrm>
+            <a:off x="822960" y="2423160"/>
+            <a:ext cx="502920" cy="502920"/>
+          </a:xfrm>
+          <a:prstGeom prst="ellipse">
+            <a:avLst/>
+          </a:prstGeom>
+          <a:solidFill>
+            <a:srgbClr val="1A5276"/>
+          </a:solidFill>
+          <a:ln/>
+        </p:spPr>
+      </p:sp>
+      <p:sp>
+        <p:nvSpPr>
+          <p:cNvPr id="12" name="Text 10"/>
+          <p:cNvSpPr/>
+          <p:nvPr/>
+        </p:nvSpPr>
+        <p:spPr>
+          <a:xfrm>
+            <a:off x="822960" y="2423160"/>
+            <a:ext cx="502920" cy="502920"/>
+          </a:xfrm>
+          <a:prstGeom prst="rect">
+            <a:avLst/>
+          </a:prstGeom>
+          <a:noFill/>
+          <a:ln/>
+        </p:spPr>
+        <p:txBody>
+          <a:bodyPr wrap="square" lIns="0" tIns="0" rIns="0" bIns="0" rtlCol="0" anchor="ctr"/>
+          <a:lstStyle/>
+          <a:p>
+            <a:pPr algn="ctr" indent="0" marL="0">
+              <a:buNone/>
+            </a:pPr>
+            <a:r>
+              <a:rPr lang="en-US" sz="2000" b="1" dirty="0">
+                <a:solidFill>
+                  <a:srgbClr val="FFFFFF"/>
+                </a:solidFill>
+                <a:latin typeface="Arial" pitchFamily="34" charset="0"/>
+                <a:ea typeface="Arial" pitchFamily="34" charset="-122"/>
+                <a:cs typeface="Arial" pitchFamily="34" charset="-120"/>
+              </a:rPr>
+              <a:t>2</a:t>
+            </a:r>
+            <a:endParaRPr lang="en-US" sz="2000" dirty="0"/>
+          </a:p>
         </p:txBody>
       </p:sp>
       <p:sp>
@@ -3792,7 +4325,7 @@
         </p:nvSpPr>
         <p:spPr>
           <a:xfrm>
-            <a:off x="1600200" y="2286000"/>
+            <a:off x="1554480" y="2331720"/>
             <a:ext cx="6675120" cy="365760"/>
           </a:xfrm>
           <a:prstGeom prst="rect">
@@ -3802,7 +4335,7 @@
           <a:ln/>
         </p:spPr>
         <p:txBody>
-          <a:bodyPr wrap="square" rtlCol="0" anchor="t"/>
+          <a:bodyPr wrap="square" lIns="0" tIns="0" rIns="0" bIns="0" rtlCol="0" anchor="ctr"/>
           <a:lstStyle/>
           <a:p>
             <a:pPr indent="0" marL="0">
@@ -3831,8 +4364,8 @@
         </p:nvSpPr>
         <p:spPr>
           <a:xfrm>
-            <a:off x="1600200" y="2670048"/>
-            <a:ext cx="6675120" cy="411480"/>
+            <a:off x="1554480" y="2743200"/>
+            <a:ext cx="6675120" cy="502920"/>
           </a:xfrm>
           <a:prstGeom prst="rect">
             <a:avLst/>
@@ -3841,7 +4374,7 @@
           <a:ln/>
         </p:spPr>
         <p:txBody>
-          <a:bodyPr wrap="square" rtlCol="0" anchor="t"/>
+          <a:bodyPr wrap="square" lIns="0" tIns="0" rIns="0" bIns="0" rtlCol="0" anchor="ctr"/>
           <a:lstStyle/>
           <a:p>
             <a:pPr indent="0" marL="0">
@@ -3870,76 +4403,11 @@
         </p:nvSpPr>
         <p:spPr>
           <a:xfrm>
-            <a:off x="640080" y="3520440"/>
-            <a:ext cx="502920" cy="502920"/>
-          </a:xfrm>
-          <a:prstGeom prst="ellipse">
-            <a:avLst/>
-          </a:prstGeom>
-          <a:solidFill>
-            <a:srgbClr val="1A5276"/>
-          </a:solidFill>
-          <a:ln/>
-        </p:spPr>
-        <p:txBody>
-          <a:bodyPr/>
-          <a:p/>
-        </p:txBody>
-      </p:sp>
-      <p:sp>
-        <p:nvSpPr>
-          <p:cNvPr id="16" name="Text 14"/>
-          <p:cNvSpPr/>
-          <p:nvPr/>
-        </p:nvSpPr>
-        <p:spPr>
-          <a:xfrm>
-            <a:off x="640080" y="3520440"/>
-            <a:ext cx="502920" cy="502920"/>
-          </a:xfrm>
-          <a:prstGeom prst="rect">
-            <a:avLst/>
-          </a:prstGeom>
-          <a:noFill/>
-          <a:ln/>
-        </p:spPr>
-        <p:txBody>
-          <a:bodyPr wrap="square" rtlCol="0" anchor="ctr"/>
-          <a:lstStyle/>
-          <a:p>
-            <a:pPr algn="ctr" indent="0" marL="0">
-              <a:buNone/>
-            </a:pPr>
-            <a:r>
-              <a:rPr lang="en-US" sz="2000" b="1" dirty="0">
-                <a:solidFill>
-                  <a:srgbClr val="FFFFFF"/>
-                </a:solidFill>
-                <a:latin typeface="Arial" pitchFamily="34" charset="0"/>
-                <a:ea typeface="Arial" pitchFamily="34" charset="-122"/>
-                <a:cs typeface="Arial" pitchFamily="34" charset="-120"/>
-              </a:rPr>
-              <a:t>3</a:t>
-            </a:r>
-            <a:endParaRPr lang="en-US" sz="2000" dirty="0"/>
-          </a:p>
-        </p:txBody>
-      </p:sp>
-      <p:sp>
-        <p:nvSpPr>
-          <p:cNvPr id="17" name="Shape 15"/>
-          <p:cNvSpPr/>
-          <p:nvPr/>
-        </p:nvSpPr>
-        <p:spPr>
-          <a:xfrm>
-            <a:off x="1371600" y="3429000"/>
-            <a:ext cx="7132320" cy="1005840"/>
-          </a:xfrm>
-          <a:prstGeom prst="rect">
-            <a:avLst>
-              <a:gd name="adj" fmla="val 4545"/>
-            </a:avLst>
+            <a:off x="640080" y="3474720"/>
+            <a:ext cx="7863840" cy="1097280"/>
+          </a:xfrm>
+          <a:prstGeom prst="rect">
+            <a:avLst/>
           </a:prstGeom>
           <a:solidFill>
             <a:srgbClr val="F9F6F1"/>
@@ -3953,21 +4421,17 @@
             </a:outerShdw>
           </a:effectLst>
         </p:spPr>
-        <p:txBody>
-          <a:bodyPr/>
-          <a:p/>
-        </p:txBody>
-      </p:sp>
-      <p:sp>
-        <p:nvSpPr>
-          <p:cNvPr id="18" name="Shape 16"/>
-          <p:cNvSpPr/>
-          <p:nvPr/>
-        </p:nvSpPr>
-        <p:spPr>
-          <a:xfrm>
-            <a:off x="1371600" y="3429000"/>
-            <a:ext cx="54864" cy="1005840"/>
+      </p:sp>
+      <p:sp>
+        <p:nvSpPr>
+          <p:cNvPr id="16" name="Shape 14"/>
+          <p:cNvSpPr/>
+          <p:nvPr/>
+        </p:nvSpPr>
+        <p:spPr>
+          <a:xfrm>
+            <a:off x="640080" y="3474720"/>
+            <a:ext cx="54864" cy="1097280"/>
           </a:xfrm>
           <a:prstGeom prst="rect">
             <a:avLst/>
@@ -3977,9 +4441,64 @@
           </a:solidFill>
           <a:ln/>
         </p:spPr>
-        <p:txBody>
-          <a:bodyPr/>
-          <a:p/>
+      </p:sp>
+      <p:sp>
+        <p:nvSpPr>
+          <p:cNvPr id="17" name="Shape 15"/>
+          <p:cNvSpPr/>
+          <p:nvPr/>
+        </p:nvSpPr>
+        <p:spPr>
+          <a:xfrm>
+            <a:off x="822960" y="3657600"/>
+            <a:ext cx="502920" cy="502920"/>
+          </a:xfrm>
+          <a:prstGeom prst="ellipse">
+            <a:avLst/>
+          </a:prstGeom>
+          <a:solidFill>
+            <a:srgbClr val="1A5276"/>
+          </a:solidFill>
+          <a:ln/>
+        </p:spPr>
+      </p:sp>
+      <p:sp>
+        <p:nvSpPr>
+          <p:cNvPr id="18" name="Text 16"/>
+          <p:cNvSpPr/>
+          <p:nvPr/>
+        </p:nvSpPr>
+        <p:spPr>
+          <a:xfrm>
+            <a:off x="822960" y="3657600"/>
+            <a:ext cx="502920" cy="502920"/>
+          </a:xfrm>
+          <a:prstGeom prst="rect">
+            <a:avLst/>
+          </a:prstGeom>
+          <a:noFill/>
+          <a:ln/>
+        </p:spPr>
+        <p:txBody>
+          <a:bodyPr wrap="square" lIns="0" tIns="0" rIns="0" bIns="0" rtlCol="0" anchor="ctr"/>
+          <a:lstStyle/>
+          <a:p>
+            <a:pPr algn="ctr" indent="0" marL="0">
+              <a:buNone/>
+            </a:pPr>
+            <a:r>
+              <a:rPr lang="en-US" sz="2000" b="1" dirty="0">
+                <a:solidFill>
+                  <a:srgbClr val="FFFFFF"/>
+                </a:solidFill>
+                <a:latin typeface="Arial" pitchFamily="34" charset="0"/>
+                <a:ea typeface="Arial" pitchFamily="34" charset="-122"/>
+                <a:cs typeface="Arial" pitchFamily="34" charset="-120"/>
+              </a:rPr>
+              <a:t>3</a:t>
+            </a:r>
+            <a:endParaRPr lang="en-US" sz="2000" dirty="0"/>
+          </a:p>
         </p:txBody>
       </p:sp>
       <p:sp>
@@ -3990,7 +4509,7 @@
         </p:nvSpPr>
         <p:spPr>
           <a:xfrm>
-            <a:off x="1600200" y="3520440"/>
+            <a:off x="1554480" y="3566160"/>
             <a:ext cx="6675120" cy="365760"/>
           </a:xfrm>
           <a:prstGeom prst="rect">
@@ -4000,7 +4519,7 @@
           <a:ln/>
         </p:spPr>
         <p:txBody>
-          <a:bodyPr wrap="square" rtlCol="0" anchor="t"/>
+          <a:bodyPr wrap="square" lIns="0" tIns="0" rIns="0" bIns="0" rtlCol="0" anchor="ctr"/>
           <a:lstStyle/>
           <a:p>
             <a:pPr indent="0" marL="0">
@@ -4029,8 +4548,8 @@
         </p:nvSpPr>
         <p:spPr>
           <a:xfrm>
-            <a:off x="1600200" y="3904488"/>
-            <a:ext cx="6675120" cy="411480"/>
+            <a:off x="1554480" y="3977640"/>
+            <a:ext cx="6675120" cy="502920"/>
           </a:xfrm>
           <a:prstGeom prst="rect">
             <a:avLst/>
@@ -4039,7 +4558,7 @@
           <a:ln/>
         </p:spPr>
         <p:txBody>
-          <a:bodyPr wrap="square" rtlCol="0" anchor="t"/>
+          <a:bodyPr wrap="square" lIns="0" tIns="0" rIns="0" bIns="0" rtlCol="0" anchor="ctr"/>
           <a:lstStyle/>
           <a:p>
             <a:pPr indent="0" marL="0">
@@ -4103,7 +4622,7 @@
           <a:ln/>
         </p:spPr>
         <p:txBody>
-          <a:bodyPr wrap="square" rtlCol="0" anchor="ctr"/>
+          <a:bodyPr wrap="square" lIns="0" tIns="0" rIns="0" bIns="0" rtlCol="0" anchor="ctr"/>
           <a:lstStyle/>
           <a:p>
             <a:pPr indent="0" marL="0">
@@ -4133,12 +4652,10 @@
         <p:spPr>
           <a:xfrm>
             <a:off x="457200" y="1005840"/>
-            <a:ext cx="3931920" cy="3200400"/>
-          </a:xfrm>
-          <a:prstGeom prst="rect">
-            <a:avLst>
-              <a:gd name="adj" fmla="val 1429"/>
-            </a:avLst>
+            <a:ext cx="3931920" cy="3108960"/>
+          </a:xfrm>
+          <a:prstGeom prst="rect">
+            <a:avLst/>
           </a:prstGeom>
           <a:solidFill>
             <a:srgbClr val="F9F6F1"/>
@@ -4152,10 +4669,6 @@
             </a:outerShdw>
           </a:effectLst>
         </p:spPr>
-        <p:txBody>
-          <a:bodyPr/>
-          <a:p/>
-        </p:txBody>
       </p:sp>
       <p:sp>
         <p:nvSpPr>
@@ -4166,7 +4679,7 @@
         <p:spPr>
           <a:xfrm>
             <a:off x="457200" y="1005840"/>
-            <a:ext cx="54864" cy="3200400"/>
+            <a:ext cx="54864" cy="3108960"/>
           </a:xfrm>
           <a:prstGeom prst="rect">
             <a:avLst/>
@@ -4176,10 +4689,6 @@
           </a:solidFill>
           <a:ln/>
         </p:spPr>
-        <p:txBody>
-          <a:bodyPr/>
-          <a:p/>
-        </p:txBody>
       </p:sp>
       <p:sp>
         <p:nvSpPr>
@@ -4189,8 +4698,8 @@
         </p:nvSpPr>
         <p:spPr>
           <a:xfrm>
-            <a:off x="640080" y="1143000"/>
-            <a:ext cx="3611880" cy="365760"/>
+            <a:off x="685800" y="1143000"/>
+            <a:ext cx="3566160" cy="411480"/>
           </a:xfrm>
           <a:prstGeom prst="rect">
             <a:avLst/>
@@ -4199,7 +4708,7 @@
           <a:ln/>
         </p:spPr>
         <p:txBody>
-          <a:bodyPr wrap="square" rtlCol="0" anchor="t"/>
+          <a:bodyPr wrap="square" lIns="0" tIns="0" rIns="0" bIns="0" rtlCol="0" anchor="ctr"/>
           <a:lstStyle/>
           <a:p>
             <a:pPr indent="0" marL="0">
@@ -4228,8 +4737,8 @@
         </p:nvSpPr>
         <p:spPr>
           <a:xfrm>
-            <a:off x="640080" y="1554480"/>
-            <a:ext cx="3611880" cy="2514600"/>
+            <a:off x="685800" y="1600200"/>
+            <a:ext cx="3566160" cy="2377440"/>
           </a:xfrm>
           <a:prstGeom prst="rect">
             <a:avLst/>
@@ -4238,13 +4747,10 @@
           <a:ln/>
         </p:spPr>
         <p:txBody>
-          <a:bodyPr wrap="square" rtlCol="0" anchor="t"/>
-          <a:lstStyle/>
-          <a:p>
-            <a:pPr algn="l" indent="0" marL="0">
-              <a:lnSpc>
-                <a:spcPct val="115000"/>
-              </a:lnSpc>
+          <a:bodyPr wrap="square" rtlCol="0" anchor="ctr"/>
+          <a:lstStyle/>
+          <a:p>
+            <a:pPr indent="0" marL="0">
               <a:buNone/>
             </a:pPr>
             <a:r>
@@ -4259,10 +4765,7 @@
               <a:t>Elke aanbieder heeft een eigen, dalende vraaglijn
 </a:t>
             </a:r>
-            <a:pPr algn="l" indent="0" marL="0">
-              <a:lnSpc>
-                <a:spcPct val="115000"/>
-              </a:lnSpc>
+            <a:pPr indent="0" marL="0">
               <a:buNone/>
             </a:pPr>
             <a:r>
@@ -4274,42 +4777,29 @@
                 <a:ea typeface="Arial" pitchFamily="34" charset="-122"/>
                 <a:cs typeface="Arial" pitchFamily="34" charset="-120"/>
               </a:rPr>
-              <a:t>Beperkte prijszettingsmacht
+              <a:t>
+Beperkte prijszettingsmacht
 </a:t>
             </a:r>
-            <a:pPr algn="l" indent="0" marL="0">
-              <a:lnSpc>
-                <a:spcPct val="115000"/>
-              </a:lnSpc>
-              <a:buNone/>
-            </a:pPr>
-            <a:r>
-              <a:rPr lang="en-US" sz="1400" b="1" dirty="0">
-                <a:solidFill>
-                  <a:srgbClr val="2D3748"/>
-                </a:solidFill>
-                <a:latin typeface="Arial" pitchFamily="34" charset="0"/>
-                <a:ea typeface="Arial" pitchFamily="34" charset="-122"/>
-                <a:cs typeface="Arial" pitchFamily="34" charset="-120"/>
-              </a:rPr>
-              <a:t>Voorbeelden: </a:t>
-            </a:r>
-            <a:pPr algn="l" indent="0" marL="0">
-              <a:lnSpc>
-                <a:spcPct val="115000"/>
-              </a:lnSpc>
+            <a:pPr indent="0" marL="0">
+              <a:buNone/>
+            </a:pPr>
+            <a:endParaRPr lang="en-US" sz="1400" dirty="0"/>
+          </a:p>
+          <a:p>
+            <a:pPr indent="0" marL="0">
               <a:buNone/>
             </a:pPr>
             <a:r>
               <a:rPr lang="en-US" sz="1400" dirty="0">
                 <a:solidFill>
-                  <a:srgbClr val="2D3748"/>
-                </a:solidFill>
-                <a:latin typeface="Arial" pitchFamily="34" charset="0"/>
-                <a:ea typeface="Arial" pitchFamily="34" charset="-122"/>
-                <a:cs typeface="Arial" pitchFamily="34" charset="-120"/>
-              </a:rPr>
-              <a:t>restaurants, kappers, kledingmerken</a:t>
+                  <a:srgbClr val="718096"/>
+                </a:solidFill>
+                <a:latin typeface="Arial" pitchFamily="34" charset="0"/>
+                <a:ea typeface="Arial" pitchFamily="34" charset="-122"/>
+                <a:cs typeface="Arial" pitchFamily="34" charset="-120"/>
+              </a:rPr>
+              <a:t>Voorbeelden: restaurants, kappers, kledingwinkels</a:t>
             </a:r>
             <a:endParaRPr lang="en-US" sz="1400" dirty="0"/>
           </a:p>
@@ -4324,15 +4814,13 @@
         <p:spPr>
           <a:xfrm>
             <a:off x="4754880" y="1005840"/>
-            <a:ext cx="3931920" cy="3200400"/>
-          </a:xfrm>
-          <a:prstGeom prst="rect">
-            <a:avLst>
-              <a:gd name="adj" fmla="val 1429"/>
-            </a:avLst>
-          </a:prstGeom>
-          <a:solidFill>
-            <a:srgbClr val="FEF5E7"/>
+            <a:ext cx="3931920" cy="3108960"/>
+          </a:xfrm>
+          <a:prstGeom prst="rect">
+            <a:avLst/>
+          </a:prstGeom>
+          <a:solidFill>
+            <a:srgbClr val="F9F6F1"/>
           </a:solidFill>
           <a:ln/>
           <a:effectLst>
@@ -4343,10 +4831,6 @@
             </a:outerShdw>
           </a:effectLst>
         </p:spPr>
-        <p:txBody>
-          <a:bodyPr/>
-          <a:p/>
-        </p:txBody>
       </p:sp>
       <p:sp>
         <p:nvSpPr>
@@ -4357,7 +4841,7 @@
         <p:spPr>
           <a:xfrm>
             <a:off x="4754880" y="1005840"/>
-            <a:ext cx="54864" cy="3200400"/>
+            <a:ext cx="54864" cy="3108960"/>
           </a:xfrm>
           <a:prstGeom prst="rect">
             <a:avLst/>
@@ -4367,10 +4851,6 @@
           </a:solidFill>
           <a:ln/>
         </p:spPr>
-        <p:txBody>
-          <a:bodyPr/>
-          <a:p/>
-        </p:txBody>
       </p:sp>
       <p:sp>
         <p:nvSpPr>
@@ -4380,8 +4860,8 @@
         </p:nvSpPr>
         <p:spPr>
           <a:xfrm>
-            <a:off x="4937760" y="1143000"/>
-            <a:ext cx="3611880" cy="365760"/>
+            <a:off x="4983480" y="1143000"/>
+            <a:ext cx="3566160" cy="411480"/>
           </a:xfrm>
           <a:prstGeom prst="rect">
             <a:avLst/>
@@ -4390,7 +4870,7 @@
           <a:ln/>
         </p:spPr>
         <p:txBody>
-          <a:bodyPr wrap="square" rtlCol="0" anchor="t"/>
+          <a:bodyPr wrap="square" lIns="0" tIns="0" rIns="0" bIns="0" rtlCol="0" anchor="ctr"/>
           <a:lstStyle/>
           <a:p>
             <a:pPr indent="0" marL="0">
@@ -4419,8 +4899,8 @@
         </p:nvSpPr>
         <p:spPr>
           <a:xfrm>
-            <a:off x="4937760" y="1554480"/>
-            <a:ext cx="3611880" cy="2514600"/>
+            <a:off x="4983480" y="1600200"/>
+            <a:ext cx="3566160" cy="2377440"/>
           </a:xfrm>
           <a:prstGeom prst="rect">
             <a:avLst/>
@@ -4429,13 +4909,10 @@
           <a:ln/>
         </p:spPr>
         <p:txBody>
-          <a:bodyPr wrap="square" rtlCol="0" anchor="t"/>
-          <a:lstStyle/>
-          <a:p>
-            <a:pPr algn="l" indent="0" marL="0">
-              <a:lnSpc>
-                <a:spcPct val="115000"/>
-              </a:lnSpc>
+          <a:bodyPr wrap="square" rtlCol="0" anchor="ctr"/>
+          <a:lstStyle/>
+          <a:p>
+            <a:pPr indent="0" marL="0">
               <a:buNone/>
             </a:pPr>
             <a:r>
@@ -4450,14 +4927,11 @@
               <a:t>Marktvraag verschuift rechts
 </a:t>
             </a:r>
-            <a:pPr algn="l" indent="0" marL="0">
-              <a:lnSpc>
-                <a:spcPct val="115000"/>
-              </a:lnSpc>
-              <a:buNone/>
-            </a:pPr>
-            <a:r>
-              <a:rPr lang="en-US" sz="1300" dirty="0">
+            <a:pPr indent="0" marL="0">
+              <a:buNone/>
+            </a:pPr>
+            <a:r>
+              <a:rPr lang="en-US" sz="1400" dirty="0">
                 <a:solidFill>
                   <a:srgbClr val="718096"/>
                 </a:solidFill>
@@ -4468,10 +4942,7 @@
               <a:t>(meer keuze trekt meer vragers)
 </a:t>
             </a:r>
-            <a:pPr algn="l" indent="0" marL="0">
-              <a:lnSpc>
-                <a:spcPct val="115000"/>
-              </a:lnSpc>
+            <a:pPr indent="0" marL="0">
               <a:buNone/>
             </a:pPr>
             <a:r>
@@ -4486,14 +4957,11 @@
               <a:t>Residuele vraag verschuift links
 </a:t>
             </a:r>
-            <a:pPr algn="l" indent="0" marL="0">
-              <a:lnSpc>
-                <a:spcPct val="115000"/>
-              </a:lnSpc>
-              <a:buNone/>
-            </a:pPr>
-            <a:r>
-              <a:rPr lang="en-US" sz="1300" dirty="0">
+            <a:pPr indent="0" marL="0">
+              <a:buNone/>
+            </a:pPr>
+            <a:r>
+              <a:rPr lang="en-US" sz="1400" dirty="0">
                 <a:solidFill>
                   <a:srgbClr val="718096"/>
                 </a:solidFill>
@@ -4501,7 +4969,22 @@
                 <a:ea typeface="Arial" pitchFamily="34" charset="-122"/>
                 <a:cs typeface="Arial" pitchFamily="34" charset="-120"/>
               </a:rPr>
-              <a:t>(minder klanten per aanbieder)</a:t>
+              <a:t>(minder klanten per aanbieder)
+</a:t>
+            </a:r>
+            <a:pPr indent="0" marL="0">
+              <a:buNone/>
+            </a:pPr>
+            <a:r>
+              <a:rPr lang="en-US" sz="1400" b="1" dirty="0">
+                <a:solidFill>
+                  <a:srgbClr val="D9534F"/>
+                </a:solidFill>
+                <a:latin typeface="Arial" pitchFamily="34" charset="0"/>
+                <a:ea typeface="Arial" pitchFamily="34" charset="-122"/>
+                <a:cs typeface="Arial" pitchFamily="34" charset="-120"/>
+              </a:rPr>
+              <a:t>Gevolg: winst wordt kleiner</a:t>
             </a:r>
             <a:endParaRPr lang="en-US" sz="1400" dirty="0"/>
           </a:p>
@@ -4550,7 +5033,7 @@
           <a:ln/>
         </p:spPr>
         <p:txBody>
-          <a:bodyPr wrap="square" rtlCol="0" anchor="ctr"/>
+          <a:bodyPr wrap="square" lIns="0" tIns="0" rIns="0" bIns="0" rtlCol="0" anchor="ctr"/>
           <a:lstStyle/>
           <a:p>
             <a:pPr indent="0" marL="0">
@@ -4579,39 +5062,48 @@
         </p:nvSpPr>
         <p:spPr>
           <a:xfrm>
-            <a:off x="457200" y="1005840"/>
-            <a:ext cx="5029200" cy="3657600"/>
-          </a:xfrm>
-          <a:prstGeom prst="rect">
-            <a:avLst>
-              <a:gd name="adj" fmla="val 1250"/>
-            </a:avLst>
-          </a:prstGeom>
-          <a:solidFill>
-            <a:srgbClr val="F7F8FA"/>
-          </a:solidFill>
-          <a:ln w="6350">
-            <a:solidFill>
-              <a:srgbClr val="CBD5E0"/>
-            </a:solidFill>
-            <a:prstDash val="solid"/>
-          </a:ln>
-        </p:spPr>
-        <p:txBody>
-          <a:bodyPr/>
-          <a:p/>
-        </p:txBody>
-      </p:sp>
-      <p:sp>
-        <p:nvSpPr>
-          <p:cNvPr id="4" name="Text 2"/>
-          <p:cNvSpPr/>
-          <p:nvPr/>
-        </p:nvSpPr>
-        <p:spPr>
-          <a:xfrm>
-            <a:off x="457200" y="2286000"/>
-            <a:ext cx="5029200" cy="1097280"/>
+            <a:off x="457200" y="914400"/>
+            <a:ext cx="8229600" cy="457200"/>
+          </a:xfrm>
+          <a:prstGeom prst="rect">
+            <a:avLst/>
+          </a:prstGeom>
+          <a:solidFill>
+            <a:srgbClr val="EBF5FB"/>
+          </a:solidFill>
+          <a:ln/>
+        </p:spPr>
+      </p:sp>
+      <p:sp>
+        <p:nvSpPr>
+          <p:cNvPr id="4" name="Shape 2"/>
+          <p:cNvSpPr/>
+          <p:nvPr/>
+        </p:nvSpPr>
+        <p:spPr>
+          <a:xfrm>
+            <a:off x="457200" y="914400"/>
+            <a:ext cx="54864" cy="457200"/>
+          </a:xfrm>
+          <a:prstGeom prst="rect">
+            <a:avLst/>
+          </a:prstGeom>
+          <a:solidFill>
+            <a:srgbClr val="1A5276"/>
+          </a:solidFill>
+          <a:ln/>
+        </p:spPr>
+      </p:sp>
+      <p:sp>
+        <p:nvSpPr>
+          <p:cNvPr id="5" name="Text 3"/>
+          <p:cNvSpPr/>
+          <p:nvPr/>
+        </p:nvSpPr>
+        <p:spPr>
+          <a:xfrm>
+            <a:off x="731520" y="914400"/>
+            <a:ext cx="7772400" cy="457200"/>
           </a:xfrm>
           <a:prstGeom prst="rect">
             <a:avLst/>
@@ -4620,59 +5112,40 @@
           <a:ln/>
         </p:spPr>
         <p:txBody>
-          <a:bodyPr wrap="square" rtlCol="0" anchor="ctr"/>
-          <a:lstStyle/>
-          <a:p>
-            <a:pPr algn="ctr" indent="0" marL="0">
-              <a:buNone/>
-            </a:pPr>
-            <a:r>
-              <a:rPr lang="en-US" sz="1400" i="1" dirty="0">
-                <a:solidFill>
-                  <a:srgbClr val="718096"/>
-                </a:solidFill>
-                <a:latin typeface="Arial" pitchFamily="34" charset="0"/>
-                <a:ea typeface="Arial" pitchFamily="34" charset="-122"/>
-                <a:cs typeface="Arial" pitchFamily="34" charset="-120"/>
-              </a:rPr>
-              <a:t>Grafiek: MO = MK, winst als</a:t>
+          <a:bodyPr wrap="square" lIns="0" tIns="0" rIns="0" bIns="0" rtlCol="0" anchor="ctr"/>
+          <a:lstStyle/>
+          <a:p>
+            <a:pPr indent="0" marL="0">
+              <a:buNone/>
+            </a:pPr>
+            <a:r>
+              <a:rPr lang="en-US" sz="1400" dirty="0">
+                <a:solidFill>
+                  <a:srgbClr val="2D3748"/>
+                </a:solidFill>
+                <a:latin typeface="Arial" pitchFamily="34" charset="0"/>
+                <a:ea typeface="Arial" pitchFamily="34" charset="-122"/>
+                <a:cs typeface="Arial" pitchFamily="34" charset="-120"/>
+              </a:rPr>
+              <a:t>Op korte termijn kan een monopolistisch concurrent winst maken, vergelijkbaar met een monopolist.</a:t>
             </a:r>
             <a:endParaRPr lang="en-US" sz="1400" dirty="0"/>
           </a:p>
-          <a:p>
-            <a:pPr algn="ctr" indent="0" marL="0">
-              <a:buNone/>
-            </a:pPr>
-            <a:r>
-              <a:rPr lang="en-US" sz="1400" i="1" dirty="0">
-                <a:solidFill>
-                  <a:srgbClr val="718096"/>
-                </a:solidFill>
-                <a:latin typeface="Arial" pitchFamily="34" charset="0"/>
-                <a:ea typeface="Arial" pitchFamily="34" charset="-122"/>
-                <a:cs typeface="Arial" pitchFamily="34" charset="-120"/>
-              </a:rPr>
-              <a:t>gearceerd vlak (p* &gt; GTK)</a:t>
-            </a:r>
-            <a:endParaRPr lang="en-US" sz="1400" dirty="0"/>
-          </a:p>
-        </p:txBody>
-      </p:sp>
-      <p:sp>
-        <p:nvSpPr>
-          <p:cNvPr id="5" name="Shape 3"/>
-          <p:cNvSpPr/>
-          <p:nvPr/>
-        </p:nvSpPr>
-        <p:spPr>
-          <a:xfrm>
-            <a:off x="5760720" y="1005840"/>
-            <a:ext cx="2926080" cy="3657600"/>
-          </a:xfrm>
-          <a:prstGeom prst="rect">
-            <a:avLst>
-              <a:gd name="adj" fmla="val 1563"/>
-            </a:avLst>
+        </p:txBody>
+      </p:sp>
+      <p:sp>
+        <p:nvSpPr>
+          <p:cNvPr id="6" name="Shape 4"/>
+          <p:cNvSpPr/>
+          <p:nvPr/>
+        </p:nvSpPr>
+        <p:spPr>
+          <a:xfrm>
+            <a:off x="457200" y="1554480"/>
+            <a:ext cx="8229600" cy="640080"/>
+          </a:xfrm>
+          <a:prstGeom prst="rect">
+            <a:avLst/>
           </a:prstGeom>
           <a:solidFill>
             <a:srgbClr val="F9F6F1"/>
@@ -4686,21 +5159,17 @@
             </a:outerShdw>
           </a:effectLst>
         </p:spPr>
-        <p:txBody>
-          <a:bodyPr/>
-          <a:p/>
-        </p:txBody>
-      </p:sp>
-      <p:sp>
-        <p:nvSpPr>
-          <p:cNvPr id="6" name="Shape 4"/>
-          <p:cNvSpPr/>
-          <p:nvPr/>
-        </p:nvSpPr>
-        <p:spPr>
-          <a:xfrm>
-            <a:off x="5760720" y="1005840"/>
-            <a:ext cx="54864" cy="3657600"/>
+      </p:sp>
+      <p:sp>
+        <p:nvSpPr>
+          <p:cNvPr id="7" name="Shape 5"/>
+          <p:cNvSpPr/>
+          <p:nvPr/>
+        </p:nvSpPr>
+        <p:spPr>
+          <a:xfrm>
+            <a:off x="457200" y="1554480"/>
+            <a:ext cx="54864" cy="640080"/>
           </a:xfrm>
           <a:prstGeom prst="rect">
             <a:avLst/>
@@ -4710,21 +5179,17 @@
           </a:solidFill>
           <a:ln/>
         </p:spPr>
-        <p:txBody>
-          <a:bodyPr/>
-          <a:p/>
-        </p:txBody>
-      </p:sp>
-      <p:sp>
-        <p:nvSpPr>
-          <p:cNvPr id="7" name="Text 5"/>
-          <p:cNvSpPr/>
-          <p:nvPr/>
-        </p:nvSpPr>
-        <p:spPr>
-          <a:xfrm>
-            <a:off x="5943600" y="1143000"/>
-            <a:ext cx="2606040" cy="365760"/>
+      </p:sp>
+      <p:sp>
+        <p:nvSpPr>
+          <p:cNvPr id="8" name="Text 6"/>
+          <p:cNvSpPr/>
+          <p:nvPr/>
+        </p:nvSpPr>
+        <p:spPr>
+          <a:xfrm>
+            <a:off x="731520" y="1600200"/>
+            <a:ext cx="2743200" cy="548640"/>
           </a:xfrm>
           <a:prstGeom prst="rect">
             <a:avLst/>
@@ -4733,37 +5198,37 @@
           <a:ln/>
         </p:spPr>
         <p:txBody>
-          <a:bodyPr wrap="square" rtlCol="0" anchor="t"/>
+          <a:bodyPr wrap="square" lIns="0" tIns="0" rIns="0" bIns="0" rtlCol="0" anchor="ctr"/>
           <a:lstStyle/>
           <a:p>
             <a:pPr indent="0" marL="0">
               <a:buNone/>
             </a:pPr>
             <a:r>
-              <a:rPr lang="en-US" sz="2000" b="1" dirty="0">
-                <a:solidFill>
-                  <a:srgbClr val="1A5276"/>
-                </a:solidFill>
-                <a:latin typeface="Arial" pitchFamily="34" charset="0"/>
-                <a:ea typeface="Arial" pitchFamily="34" charset="-122"/>
-                <a:cs typeface="Arial" pitchFamily="34" charset="-120"/>
-              </a:rPr>
-              <a:t>Korte termijn</a:t>
-            </a:r>
-            <a:endParaRPr lang="en-US" sz="2000" dirty="0"/>
-          </a:p>
-        </p:txBody>
-      </p:sp>
-      <p:sp>
-        <p:nvSpPr>
-          <p:cNvPr id="8" name="Text 6"/>
-          <p:cNvSpPr/>
-          <p:nvPr/>
-        </p:nvSpPr>
-        <p:spPr>
-          <a:xfrm>
-            <a:off x="5943600" y="1554480"/>
-            <a:ext cx="2606040" cy="2971800"/>
+              <a:rPr lang="en-US" sz="1600" b="1" dirty="0">
+                <a:solidFill>
+                  <a:srgbClr val="154360"/>
+                </a:solidFill>
+                <a:latin typeface="Arial" pitchFamily="34" charset="0"/>
+                <a:ea typeface="Arial" pitchFamily="34" charset="-122"/>
+                <a:cs typeface="Arial" pitchFamily="34" charset="-120"/>
+              </a:rPr>
+              <a:t>MO = MK</a:t>
+            </a:r>
+            <a:endParaRPr lang="en-US" sz="1600" dirty="0"/>
+          </a:p>
+        </p:txBody>
+      </p:sp>
+      <p:sp>
+        <p:nvSpPr>
+          <p:cNvPr id="9" name="Text 7"/>
+          <p:cNvSpPr/>
+          <p:nvPr/>
+        </p:nvSpPr>
+        <p:spPr>
+          <a:xfrm>
+            <a:off x="3474720" y="1600200"/>
+            <a:ext cx="5029200" cy="548640"/>
           </a:xfrm>
           <a:prstGeom prst="rect">
             <a:avLst/>
@@ -4772,17 +5237,14 @@
           <a:ln/>
         </p:spPr>
         <p:txBody>
-          <a:bodyPr wrap="square" rtlCol="0" anchor="t"/>
-          <a:lstStyle/>
-          <a:p>
-            <a:pPr algn="l" indent="0" marL="0">
-              <a:lnSpc>
-                <a:spcPct val="115000"/>
-              </a:lnSpc>
-              <a:buNone/>
-            </a:pPr>
-            <a:r>
-              <a:rPr lang="en-US" sz="1400" b="1" dirty="0">
+          <a:bodyPr wrap="square" lIns="0" tIns="0" rIns="0" bIns="0" rtlCol="0" anchor="ctr"/>
+          <a:lstStyle/>
+          <a:p>
+            <a:pPr indent="0" marL="0">
+              <a:buNone/>
+            </a:pPr>
+            <a:r>
+              <a:rPr lang="en-US" sz="1400" dirty="0">
                 <a:solidFill>
                   <a:srgbClr val="2D3748"/>
                 </a:solidFill>
@@ -4790,13 +5252,120 @@
                 <a:ea typeface="Arial" pitchFamily="34" charset="-122"/>
                 <a:cs typeface="Arial" pitchFamily="34" charset="-120"/>
               </a:rPr>
-              <a:t>MO = MK geeft Q*
-</a:t>
-            </a:r>
-            <a:pPr algn="l" indent="0" marL="0">
-              <a:lnSpc>
-                <a:spcPct val="115000"/>
-              </a:lnSpc>
+              <a:t>geeft de optimale hoeveelheid Q*</a:t>
+            </a:r>
+            <a:endParaRPr lang="en-US" sz="1400" dirty="0"/>
+          </a:p>
+        </p:txBody>
+      </p:sp>
+      <p:sp>
+        <p:nvSpPr>
+          <p:cNvPr id="10" name="Shape 8"/>
+          <p:cNvSpPr/>
+          <p:nvPr/>
+        </p:nvSpPr>
+        <p:spPr>
+          <a:xfrm>
+            <a:off x="457200" y="2331720"/>
+            <a:ext cx="8229600" cy="640080"/>
+          </a:xfrm>
+          <a:prstGeom prst="rect">
+            <a:avLst/>
+          </a:prstGeom>
+          <a:solidFill>
+            <a:srgbClr val="F9F6F1"/>
+          </a:solidFill>
+          <a:ln/>
+          <a:effectLst>
+            <a:outerShdw sx="100000" sy="100000" kx="0" ky="0" algn="bl" rotWithShape="0" blurRad="76200" dist="25400" dir="8100000">
+              <a:srgbClr val="000000">
+                <a:alpha val="10000"/>
+              </a:srgbClr>
+            </a:outerShdw>
+          </a:effectLst>
+        </p:spPr>
+      </p:sp>
+      <p:sp>
+        <p:nvSpPr>
+          <p:cNvPr id="11" name="Shape 9"/>
+          <p:cNvSpPr/>
+          <p:nvPr/>
+        </p:nvSpPr>
+        <p:spPr>
+          <a:xfrm>
+            <a:off x="457200" y="2331720"/>
+            <a:ext cx="54864" cy="640080"/>
+          </a:xfrm>
+          <a:prstGeom prst="rect">
+            <a:avLst/>
+          </a:prstGeom>
+          <a:solidFill>
+            <a:srgbClr val="1A5276"/>
+          </a:solidFill>
+          <a:ln/>
+        </p:spPr>
+      </p:sp>
+      <p:sp>
+        <p:nvSpPr>
+          <p:cNvPr id="12" name="Text 10"/>
+          <p:cNvSpPr/>
+          <p:nvPr/>
+        </p:nvSpPr>
+        <p:spPr>
+          <a:xfrm>
+            <a:off x="731520" y="2377440"/>
+            <a:ext cx="2743200" cy="548640"/>
+          </a:xfrm>
+          <a:prstGeom prst="rect">
+            <a:avLst/>
+          </a:prstGeom>
+          <a:noFill/>
+          <a:ln/>
+        </p:spPr>
+        <p:txBody>
+          <a:bodyPr wrap="square" lIns="0" tIns="0" rIns="0" bIns="0" rtlCol="0" anchor="ctr"/>
+          <a:lstStyle/>
+          <a:p>
+            <a:pPr indent="0" marL="0">
+              <a:buNone/>
+            </a:pPr>
+            <a:r>
+              <a:rPr lang="en-US" sz="1600" b="1" dirty="0">
+                <a:solidFill>
+                  <a:srgbClr val="154360"/>
+                </a:solidFill>
+                <a:latin typeface="Arial" pitchFamily="34" charset="0"/>
+                <a:ea typeface="Arial" pitchFamily="34" charset="-122"/>
+                <a:cs typeface="Arial" pitchFamily="34" charset="-120"/>
+              </a:rPr>
+              <a:t>↓  Prijs aflezen op vraaglijn</a:t>
+            </a:r>
+            <a:endParaRPr lang="en-US" sz="1600" dirty="0"/>
+          </a:p>
+        </p:txBody>
+      </p:sp>
+      <p:sp>
+        <p:nvSpPr>
+          <p:cNvPr id="13" name="Text 11"/>
+          <p:cNvSpPr/>
+          <p:nvPr/>
+        </p:nvSpPr>
+        <p:spPr>
+          <a:xfrm>
+            <a:off x="3474720" y="2377440"/>
+            <a:ext cx="5029200" cy="548640"/>
+          </a:xfrm>
+          <a:prstGeom prst="rect">
+            <a:avLst/>
+          </a:prstGeom>
+          <a:noFill/>
+          <a:ln/>
+        </p:spPr>
+        <p:txBody>
+          <a:bodyPr wrap="square" lIns="0" tIns="0" rIns="0" bIns="0" rtlCol="0" anchor="ctr"/>
+          <a:lstStyle/>
+          <a:p>
+            <a:pPr indent="0" marL="0">
               <a:buNone/>
             </a:pPr>
             <a:r>
@@ -4808,13 +5377,120 @@
                 <a:ea typeface="Arial" pitchFamily="34" charset="-122"/>
                 <a:cs typeface="Arial" pitchFamily="34" charset="-120"/>
               </a:rPr>
-              <a:t>Prijs aflezen op vraaglijn bij Q*
-</a:t>
-            </a:r>
-            <a:pPr algn="l" indent="0" marL="0">
-              <a:lnSpc>
-                <a:spcPct val="115000"/>
-              </a:lnSpc>
+              <a:t>bij Q* lees je p* af op de vraaglijn (V)</a:t>
+            </a:r>
+            <a:endParaRPr lang="en-US" sz="1400" dirty="0"/>
+          </a:p>
+        </p:txBody>
+      </p:sp>
+      <p:sp>
+        <p:nvSpPr>
+          <p:cNvPr id="14" name="Shape 12"/>
+          <p:cNvSpPr/>
+          <p:nvPr/>
+        </p:nvSpPr>
+        <p:spPr>
+          <a:xfrm>
+            <a:off x="457200" y="3108960"/>
+            <a:ext cx="8229600" cy="640080"/>
+          </a:xfrm>
+          <a:prstGeom prst="rect">
+            <a:avLst/>
+          </a:prstGeom>
+          <a:solidFill>
+            <a:srgbClr val="F9F6F1"/>
+          </a:solidFill>
+          <a:ln/>
+          <a:effectLst>
+            <a:outerShdw sx="100000" sy="100000" kx="0" ky="0" algn="bl" rotWithShape="0" blurRad="76200" dist="25400" dir="8100000">
+              <a:srgbClr val="000000">
+                <a:alpha val="10000"/>
+              </a:srgbClr>
+            </a:outerShdw>
+          </a:effectLst>
+        </p:spPr>
+      </p:sp>
+      <p:sp>
+        <p:nvSpPr>
+          <p:cNvPr id="15" name="Shape 13"/>
+          <p:cNvSpPr/>
+          <p:nvPr/>
+        </p:nvSpPr>
+        <p:spPr>
+          <a:xfrm>
+            <a:off x="457200" y="3108960"/>
+            <a:ext cx="54864" cy="640080"/>
+          </a:xfrm>
+          <a:prstGeom prst="rect">
+            <a:avLst/>
+          </a:prstGeom>
+          <a:solidFill>
+            <a:srgbClr val="1A5276"/>
+          </a:solidFill>
+          <a:ln/>
+        </p:spPr>
+      </p:sp>
+      <p:sp>
+        <p:nvSpPr>
+          <p:cNvPr id="16" name="Text 14"/>
+          <p:cNvSpPr/>
+          <p:nvPr/>
+        </p:nvSpPr>
+        <p:spPr>
+          <a:xfrm>
+            <a:off x="731520" y="3154680"/>
+            <a:ext cx="2743200" cy="548640"/>
+          </a:xfrm>
+          <a:prstGeom prst="rect">
+            <a:avLst/>
+          </a:prstGeom>
+          <a:noFill/>
+          <a:ln/>
+        </p:spPr>
+        <p:txBody>
+          <a:bodyPr wrap="square" lIns="0" tIns="0" rIns="0" bIns="0" rtlCol="0" anchor="ctr"/>
+          <a:lstStyle/>
+          <a:p>
+            <a:pPr indent="0" marL="0">
+              <a:buNone/>
+            </a:pPr>
+            <a:r>
+              <a:rPr lang="en-US" sz="1600" b="1" dirty="0">
+                <a:solidFill>
+                  <a:srgbClr val="154360"/>
+                </a:solidFill>
+                <a:latin typeface="Arial" pitchFamily="34" charset="0"/>
+                <a:ea typeface="Arial" pitchFamily="34" charset="-122"/>
+                <a:cs typeface="Arial" pitchFamily="34" charset="-120"/>
+              </a:rPr>
+              <a:t>↓  Winst als p* &gt; GTK</a:t>
+            </a:r>
+            <a:endParaRPr lang="en-US" sz="1600" dirty="0"/>
+          </a:p>
+        </p:txBody>
+      </p:sp>
+      <p:sp>
+        <p:nvSpPr>
+          <p:cNvPr id="17" name="Text 15"/>
+          <p:cNvSpPr/>
+          <p:nvPr/>
+        </p:nvSpPr>
+        <p:spPr>
+          <a:xfrm>
+            <a:off x="3474720" y="3154680"/>
+            <a:ext cx="5029200" cy="548640"/>
+          </a:xfrm>
+          <a:prstGeom prst="rect">
+            <a:avLst/>
+          </a:prstGeom>
+          <a:noFill/>
+          <a:ln/>
+        </p:spPr>
+        <p:txBody>
+          <a:bodyPr wrap="square" lIns="0" tIns="0" rIns="0" bIns="0" rtlCol="0" anchor="ctr"/>
+          <a:lstStyle/>
+          <a:p>
+            <a:pPr indent="0" marL="0">
               <a:buNone/>
             </a:pPr>
             <a:r>
@@ -4826,27 +5502,93 @@
                 <a:ea typeface="Arial" pitchFamily="34" charset="-122"/>
                 <a:cs typeface="Arial" pitchFamily="34" charset="-120"/>
               </a:rPr>
-              <a:t>Als p* &gt; GTK:
-</a:t>
-            </a:r>
-            <a:pPr algn="l" indent="0" marL="0">
-              <a:lnSpc>
-                <a:spcPct val="115000"/>
-              </a:lnSpc>
-              <a:buNone/>
-            </a:pPr>
-            <a:r>
-              <a:rPr lang="en-US" sz="1400" b="1" dirty="0">
-                <a:solidFill>
-                  <a:srgbClr val="1A5276"/>
-                </a:solidFill>
-                <a:latin typeface="Arial" pitchFamily="34" charset="0"/>
-                <a:ea typeface="Arial" pitchFamily="34" charset="-122"/>
-                <a:cs typeface="Arial" pitchFamily="34" charset="-120"/>
-              </a:rPr>
               <a:t>Winst = (p* − GTK) × Q*</a:t>
             </a:r>
             <a:endParaRPr lang="en-US" sz="1400" dirty="0"/>
+          </a:p>
+        </p:txBody>
+      </p:sp>
+      <p:sp>
+        <p:nvSpPr>
+          <p:cNvPr id="18" name="Shape 16"/>
+          <p:cNvSpPr/>
+          <p:nvPr/>
+        </p:nvSpPr>
+        <p:spPr>
+          <a:xfrm>
+            <a:off x="457200" y="3931920"/>
+            <a:ext cx="8229600" cy="548640"/>
+          </a:xfrm>
+          <a:prstGeom prst="rect">
+            <a:avLst/>
+          </a:prstGeom>
+          <a:solidFill>
+            <a:srgbClr val="F7F8FA"/>
+          </a:solidFill>
+          <a:ln w="6350">
+            <a:solidFill>
+              <a:srgbClr val="CBD5E0"/>
+            </a:solidFill>
+            <a:prstDash val="solid"/>
+          </a:ln>
+        </p:spPr>
+      </p:sp>
+      <p:sp>
+        <p:nvSpPr>
+          <p:cNvPr id="19" name="Shape 17"/>
+          <p:cNvSpPr/>
+          <p:nvPr/>
+        </p:nvSpPr>
+        <p:spPr>
+          <a:xfrm>
+            <a:off x="457200" y="3931920"/>
+            <a:ext cx="54864" cy="548640"/>
+          </a:xfrm>
+          <a:prstGeom prst="rect">
+            <a:avLst/>
+          </a:prstGeom>
+          <a:solidFill>
+            <a:srgbClr val="1A5276"/>
+          </a:solidFill>
+          <a:ln/>
+        </p:spPr>
+      </p:sp>
+      <p:sp>
+        <p:nvSpPr>
+          <p:cNvPr id="20" name="Text 18"/>
+          <p:cNvSpPr/>
+          <p:nvPr/>
+        </p:nvSpPr>
+        <p:spPr>
+          <a:xfrm>
+            <a:off x="731520" y="3931920"/>
+            <a:ext cx="7772400" cy="548640"/>
+          </a:xfrm>
+          <a:prstGeom prst="rect">
+            <a:avLst/>
+          </a:prstGeom>
+          <a:noFill/>
+          <a:ln/>
+        </p:spPr>
+        <p:txBody>
+          <a:bodyPr wrap="square" lIns="0" tIns="0" rIns="0" bIns="0" rtlCol="0" anchor="ctr"/>
+          <a:lstStyle/>
+          <a:p>
+            <a:pPr indent="0" marL="0">
+              <a:buNone/>
+            </a:pPr>
+            <a:r>
+              <a:rPr lang="en-US" sz="1600" dirty="0">
+                <a:solidFill>
+                  <a:srgbClr val="2D3748"/>
+                </a:solidFill>
+                <a:latin typeface="Consolas" pitchFamily="34" charset="0"/>
+                <a:ea typeface="Consolas" pitchFamily="34" charset="-122"/>
+                <a:cs typeface="Consolas" pitchFamily="34" charset="-120"/>
+              </a:rPr>
+              <a:t>Winst = (p* − GTK) × Q*    |    Als p* &lt; GTK → Verlies</a:t>
+            </a:r>
+            <a:endParaRPr lang="en-US" sz="1600" dirty="0"/>
           </a:p>
         </p:txBody>
       </p:sp>
@@ -4893,7 +5635,7 @@
           <a:ln/>
         </p:spPr>
         <p:txBody>
-          <a:bodyPr wrap="square" rtlCol="0" anchor="ctr"/>
+          <a:bodyPr wrap="square" lIns="0" tIns="0" rIns="0" bIns="0" rtlCol="0" anchor="ctr"/>
           <a:lstStyle/>
           <a:p>
             <a:pPr indent="0" marL="0">
@@ -4908,748 +5650,36 @@
                 <a:ea typeface="Arial" pitchFamily="34" charset="-122"/>
                 <a:cs typeface="Arial" pitchFamily="34" charset="-120"/>
               </a:rPr>
-              <a:t>Winstbepaling: stap voor stap</a:t>
+              <a:t>Korte termijn: winstgrafiek</a:t>
             </a:r>
             <a:endParaRPr lang="en-US" sz="2400" dirty="0"/>
           </a:p>
         </p:txBody>
       </p:sp>
-      <p:sp>
-        <p:nvSpPr>
-          <p:cNvPr id="3" name="Shape 1"/>
-          <p:cNvSpPr/>
-          <p:nvPr/>
-        </p:nvSpPr>
-        <p:spPr>
-          <a:xfrm>
-            <a:off x="1371600" y="1051560"/>
-            <a:ext cx="6400800" cy="502920"/>
-          </a:xfrm>
-          <a:prstGeom prst="rect">
-            <a:avLst>
-              <a:gd name="adj" fmla="val 9091"/>
-            </a:avLst>
-          </a:prstGeom>
-          <a:solidFill>
-            <a:srgbClr val="F9F6F1"/>
-          </a:solidFill>
-          <a:ln w="12700">
-            <a:solidFill>
-              <a:srgbClr val="1A5276"/>
-            </a:solidFill>
-            <a:prstDash val="solid"/>
-          </a:ln>
-          <a:effectLst>
-            <a:outerShdw sx="100000" sy="100000" kx="0" ky="0" algn="bl" rotWithShape="0" blurRad="76200" dist="25400" dir="8100000">
-              <a:srgbClr val="000000">
-                <a:alpha val="10000"/>
-              </a:srgbClr>
-            </a:outerShdw>
-          </a:effectLst>
-        </p:spPr>
-        <p:txBody>
-          <a:bodyPr/>
-          <a:p/>
-        </p:txBody>
-      </p:sp>
-      <p:sp>
-        <p:nvSpPr>
-          <p:cNvPr id="4" name="Text 2"/>
-          <p:cNvSpPr/>
-          <p:nvPr/>
-        </p:nvSpPr>
-        <p:spPr>
-          <a:xfrm>
-            <a:off x="1508760" y="1051560"/>
-            <a:ext cx="365760" cy="502920"/>
-          </a:xfrm>
-          <a:prstGeom prst="rect">
-            <a:avLst/>
-          </a:prstGeom>
-          <a:noFill/>
-          <a:ln/>
-        </p:spPr>
-        <p:txBody>
-          <a:bodyPr wrap="square" rtlCol="0" anchor="ctr"/>
-          <a:lstStyle/>
-          <a:p>
-            <a:pPr indent="0" marL="0">
-              <a:buNone/>
-            </a:pPr>
-            <a:r>
-              <a:rPr lang="en-US" sz="1600" b="1" dirty="0">
-                <a:solidFill>
-                  <a:srgbClr val="1A5276"/>
-                </a:solidFill>
-                <a:latin typeface="Arial" pitchFamily="34" charset="0"/>
-                <a:ea typeface="Arial" pitchFamily="34" charset="-122"/>
-                <a:cs typeface="Arial" pitchFamily="34" charset="-120"/>
-              </a:rPr>
-              <a:t>1</a:t>
-            </a:r>
-            <a:endParaRPr lang="en-US" sz="1600" dirty="0"/>
-          </a:p>
-        </p:txBody>
-      </p:sp>
-      <p:sp>
-        <p:nvSpPr>
-          <p:cNvPr id="5" name="Text 3"/>
-          <p:cNvSpPr/>
-          <p:nvPr/>
-        </p:nvSpPr>
-        <p:spPr>
-          <a:xfrm>
-            <a:off x="1874520" y="1051560"/>
-            <a:ext cx="5760720" cy="502920"/>
-          </a:xfrm>
-          <a:prstGeom prst="rect">
-            <a:avLst/>
-          </a:prstGeom>
-          <a:noFill/>
-          <a:ln/>
-        </p:spPr>
-        <p:txBody>
-          <a:bodyPr wrap="square" rtlCol="0" anchor="ctr"/>
-          <a:lstStyle/>
-          <a:p>
-            <a:pPr indent="0" marL="0">
-              <a:buNone/>
-            </a:pPr>
-            <a:r>
-              <a:rPr lang="en-US" sz="1500" dirty="0">
-                <a:solidFill>
-                  <a:srgbClr val="2D3748"/>
-                </a:solidFill>
-                <a:latin typeface="Arial" pitchFamily="34" charset="0"/>
-                <a:ea typeface="Arial" pitchFamily="34" charset="-122"/>
-                <a:cs typeface="Arial" pitchFamily="34" charset="-120"/>
-              </a:rPr>
-              <a:t>Stel MO = MK op</a:t>
-            </a:r>
-            <a:endParaRPr lang="en-US" sz="1500" dirty="0"/>
-          </a:p>
-        </p:txBody>
-      </p:sp>
-      <p:sp>
-        <p:nvSpPr>
-          <p:cNvPr id="6" name="Text 4"/>
-          <p:cNvSpPr/>
-          <p:nvPr/>
-        </p:nvSpPr>
-        <p:spPr>
-          <a:xfrm>
-            <a:off x="1371600" y="1554480"/>
-            <a:ext cx="6400800" cy="164592"/>
-          </a:xfrm>
-          <a:prstGeom prst="rect">
-            <a:avLst/>
-          </a:prstGeom>
-          <a:noFill/>
-          <a:ln/>
-        </p:spPr>
-        <p:txBody>
-          <a:bodyPr wrap="square" rtlCol="0" anchor="ctr"/>
-          <a:lstStyle/>
-          <a:p>
-            <a:pPr algn="ctr" indent="0" marL="0">
-              <a:buNone/>
-            </a:pPr>
-            <a:r>
-              <a:rPr lang="en-US" sz="1600" b="1" dirty="0">
-                <a:solidFill>
-                  <a:srgbClr val="1A5276"/>
-                </a:solidFill>
-                <a:latin typeface="Arial" pitchFamily="34" charset="0"/>
-                <a:ea typeface="Arial" pitchFamily="34" charset="-122"/>
-                <a:cs typeface="Arial" pitchFamily="34" charset="-120"/>
-              </a:rPr>
-              <a:t>↓</a:t>
-            </a:r>
-            <a:endParaRPr lang="en-US" sz="1600" dirty="0"/>
-          </a:p>
-        </p:txBody>
-      </p:sp>
-      <p:sp>
-        <p:nvSpPr>
-          <p:cNvPr id="7" name="Shape 5"/>
-          <p:cNvSpPr/>
-          <p:nvPr/>
-        </p:nvSpPr>
-        <p:spPr>
-          <a:xfrm>
-            <a:off x="1371600" y="1719072"/>
-            <a:ext cx="6400800" cy="502920"/>
-          </a:xfrm>
-          <a:prstGeom prst="rect">
-            <a:avLst>
-              <a:gd name="adj" fmla="val 9091"/>
-            </a:avLst>
-          </a:prstGeom>
-          <a:solidFill>
-            <a:srgbClr val="F9F6F1"/>
-          </a:solidFill>
-          <a:ln w="12700">
-            <a:solidFill>
-              <a:srgbClr val="1A5276"/>
-            </a:solidFill>
-            <a:prstDash val="solid"/>
-          </a:ln>
-          <a:effectLst>
-            <a:outerShdw sx="100000" sy="100000" kx="0" ky="0" algn="bl" rotWithShape="0" blurRad="76200" dist="25400" dir="8100000">
-              <a:srgbClr val="000000">
-                <a:alpha val="10000"/>
-              </a:srgbClr>
-            </a:outerShdw>
-          </a:effectLst>
-        </p:spPr>
-        <p:txBody>
-          <a:bodyPr/>
-          <a:p/>
-        </p:txBody>
-      </p:sp>
-      <p:sp>
-        <p:nvSpPr>
-          <p:cNvPr id="8" name="Text 6"/>
-          <p:cNvSpPr/>
-          <p:nvPr/>
-        </p:nvSpPr>
-        <p:spPr>
-          <a:xfrm>
-            <a:off x="1508760" y="1719072"/>
-            <a:ext cx="365760" cy="502920"/>
-          </a:xfrm>
-          <a:prstGeom prst="rect">
-            <a:avLst/>
-          </a:prstGeom>
-          <a:noFill/>
-          <a:ln/>
-        </p:spPr>
-        <p:txBody>
-          <a:bodyPr wrap="square" rtlCol="0" anchor="ctr"/>
-          <a:lstStyle/>
-          <a:p>
-            <a:pPr indent="0" marL="0">
-              <a:buNone/>
-            </a:pPr>
-            <a:r>
-              <a:rPr lang="en-US" sz="1600" b="1" dirty="0">
-                <a:solidFill>
-                  <a:srgbClr val="1A5276"/>
-                </a:solidFill>
-                <a:latin typeface="Arial" pitchFamily="34" charset="0"/>
-                <a:ea typeface="Arial" pitchFamily="34" charset="-122"/>
-                <a:cs typeface="Arial" pitchFamily="34" charset="-120"/>
-              </a:rPr>
-              <a:t>2</a:t>
-            </a:r>
-            <a:endParaRPr lang="en-US" sz="1600" dirty="0"/>
-          </a:p>
-        </p:txBody>
-      </p:sp>
-      <p:sp>
-        <p:nvSpPr>
-          <p:cNvPr id="9" name="Text 7"/>
-          <p:cNvSpPr/>
-          <p:nvPr/>
-        </p:nvSpPr>
-        <p:spPr>
-          <a:xfrm>
-            <a:off x="1874520" y="1719072"/>
-            <a:ext cx="5760720" cy="502920"/>
-          </a:xfrm>
-          <a:prstGeom prst="rect">
-            <a:avLst/>
-          </a:prstGeom>
-          <a:noFill/>
-          <a:ln/>
-        </p:spPr>
-        <p:txBody>
-          <a:bodyPr wrap="square" rtlCol="0" anchor="ctr"/>
-          <a:lstStyle/>
-          <a:p>
-            <a:pPr indent="0" marL="0">
-              <a:buNone/>
-            </a:pPr>
-            <a:r>
-              <a:rPr lang="en-US" sz="1500" dirty="0">
-                <a:solidFill>
-                  <a:srgbClr val="2D3748"/>
-                </a:solidFill>
-                <a:latin typeface="Arial" pitchFamily="34" charset="0"/>
-                <a:ea typeface="Arial" pitchFamily="34" charset="-122"/>
-                <a:cs typeface="Arial" pitchFamily="34" charset="-120"/>
-              </a:rPr>
-              <a:t>Los Q* op</a:t>
-            </a:r>
-            <a:endParaRPr lang="en-US" sz="1500" dirty="0"/>
-          </a:p>
-        </p:txBody>
-      </p:sp>
-      <p:sp>
-        <p:nvSpPr>
-          <p:cNvPr id="10" name="Text 8"/>
-          <p:cNvSpPr/>
-          <p:nvPr/>
-        </p:nvSpPr>
-        <p:spPr>
-          <a:xfrm>
-            <a:off x="1371600" y="2221992"/>
-            <a:ext cx="6400800" cy="164592"/>
-          </a:xfrm>
-          <a:prstGeom prst="rect">
-            <a:avLst/>
-          </a:prstGeom>
-          <a:noFill/>
-          <a:ln/>
-        </p:spPr>
-        <p:txBody>
-          <a:bodyPr wrap="square" rtlCol="0" anchor="ctr"/>
-          <a:lstStyle/>
-          <a:p>
-            <a:pPr algn="ctr" indent="0" marL="0">
-              <a:buNone/>
-            </a:pPr>
-            <a:r>
-              <a:rPr lang="en-US" sz="1600" b="1" dirty="0">
-                <a:solidFill>
-                  <a:srgbClr val="1A5276"/>
-                </a:solidFill>
-                <a:latin typeface="Arial" pitchFamily="34" charset="0"/>
-                <a:ea typeface="Arial" pitchFamily="34" charset="-122"/>
-                <a:cs typeface="Arial" pitchFamily="34" charset="-120"/>
-              </a:rPr>
-              <a:t>↓</a:t>
-            </a:r>
-            <a:endParaRPr lang="en-US" sz="1600" dirty="0"/>
-          </a:p>
-        </p:txBody>
-      </p:sp>
-      <p:sp>
-        <p:nvSpPr>
-          <p:cNvPr id="11" name="Shape 9"/>
-          <p:cNvSpPr/>
-          <p:nvPr/>
-        </p:nvSpPr>
-        <p:spPr>
-          <a:xfrm>
-            <a:off x="1371600" y="2386584"/>
-            <a:ext cx="6400800" cy="502920"/>
-          </a:xfrm>
-          <a:prstGeom prst="rect">
-            <a:avLst>
-              <a:gd name="adj" fmla="val 9091"/>
-            </a:avLst>
-          </a:prstGeom>
-          <a:solidFill>
-            <a:srgbClr val="F9F6F1"/>
-          </a:solidFill>
-          <a:ln w="12700">
-            <a:solidFill>
-              <a:srgbClr val="1A5276"/>
-            </a:solidFill>
-            <a:prstDash val="solid"/>
-          </a:ln>
-          <a:effectLst>
-            <a:outerShdw sx="100000" sy="100000" kx="0" ky="0" algn="bl" rotWithShape="0" blurRad="76200" dist="25400" dir="8100000">
-              <a:srgbClr val="000000">
-                <a:alpha val="10000"/>
-              </a:srgbClr>
-            </a:outerShdw>
-          </a:effectLst>
-        </p:spPr>
-        <p:txBody>
-          <a:bodyPr/>
-          <a:p/>
-        </p:txBody>
-      </p:sp>
-      <p:sp>
-        <p:nvSpPr>
-          <p:cNvPr id="12" name="Text 10"/>
-          <p:cNvSpPr/>
-          <p:nvPr/>
-        </p:nvSpPr>
-        <p:spPr>
-          <a:xfrm>
-            <a:off x="1508760" y="2386584"/>
-            <a:ext cx="365760" cy="502920"/>
-          </a:xfrm>
-          <a:prstGeom prst="rect">
-            <a:avLst/>
-          </a:prstGeom>
-          <a:noFill/>
-          <a:ln/>
-        </p:spPr>
-        <p:txBody>
-          <a:bodyPr wrap="square" rtlCol="0" anchor="ctr"/>
-          <a:lstStyle/>
-          <a:p>
-            <a:pPr indent="0" marL="0">
-              <a:buNone/>
-            </a:pPr>
-            <a:r>
-              <a:rPr lang="en-US" sz="1600" b="1" dirty="0">
-                <a:solidFill>
-                  <a:srgbClr val="1A5276"/>
-                </a:solidFill>
-                <a:latin typeface="Arial" pitchFamily="34" charset="0"/>
-                <a:ea typeface="Arial" pitchFamily="34" charset="-122"/>
-                <a:cs typeface="Arial" pitchFamily="34" charset="-120"/>
-              </a:rPr>
-              <a:t>3</a:t>
-            </a:r>
-            <a:endParaRPr lang="en-US" sz="1600" dirty="0"/>
-          </a:p>
-        </p:txBody>
-      </p:sp>
-      <p:sp>
-        <p:nvSpPr>
-          <p:cNvPr id="13" name="Text 11"/>
-          <p:cNvSpPr/>
-          <p:nvPr/>
-        </p:nvSpPr>
-        <p:spPr>
-          <a:xfrm>
-            <a:off x="1874520" y="2386584"/>
-            <a:ext cx="5760720" cy="502920"/>
-          </a:xfrm>
-          <a:prstGeom prst="rect">
-            <a:avLst/>
-          </a:prstGeom>
-          <a:noFill/>
-          <a:ln/>
-        </p:spPr>
-        <p:txBody>
-          <a:bodyPr wrap="square" rtlCol="0" anchor="ctr"/>
-          <a:lstStyle/>
-          <a:p>
-            <a:pPr indent="0" marL="0">
-              <a:buNone/>
-            </a:pPr>
-            <a:r>
-              <a:rPr lang="en-US" sz="1500" dirty="0">
-                <a:solidFill>
-                  <a:srgbClr val="2D3748"/>
-                </a:solidFill>
-                <a:latin typeface="Arial" pitchFamily="34" charset="0"/>
-                <a:ea typeface="Arial" pitchFamily="34" charset="-122"/>
-                <a:cs typeface="Arial" pitchFamily="34" charset="-120"/>
-              </a:rPr>
-              <a:t>Lees p* af op de vraaglijn (V) bij Q*</a:t>
-            </a:r>
-            <a:endParaRPr lang="en-US" sz="1500" dirty="0"/>
-          </a:p>
-        </p:txBody>
-      </p:sp>
-      <p:sp>
-        <p:nvSpPr>
-          <p:cNvPr id="14" name="Text 12"/>
-          <p:cNvSpPr/>
-          <p:nvPr/>
-        </p:nvSpPr>
-        <p:spPr>
-          <a:xfrm>
-            <a:off x="1371600" y="2889504"/>
-            <a:ext cx="6400800" cy="164592"/>
-          </a:xfrm>
-          <a:prstGeom prst="rect">
-            <a:avLst/>
-          </a:prstGeom>
-          <a:noFill/>
-          <a:ln/>
-        </p:spPr>
-        <p:txBody>
-          <a:bodyPr wrap="square" rtlCol="0" anchor="ctr"/>
-          <a:lstStyle/>
-          <a:p>
-            <a:pPr algn="ctr" indent="0" marL="0">
-              <a:buNone/>
-            </a:pPr>
-            <a:r>
-              <a:rPr lang="en-US" sz="1600" b="1" dirty="0">
-                <a:solidFill>
-                  <a:srgbClr val="1A5276"/>
-                </a:solidFill>
-                <a:latin typeface="Arial" pitchFamily="34" charset="0"/>
-                <a:ea typeface="Arial" pitchFamily="34" charset="-122"/>
-                <a:cs typeface="Arial" pitchFamily="34" charset="-120"/>
-              </a:rPr>
-              <a:t>↓</a:t>
-            </a:r>
-            <a:endParaRPr lang="en-US" sz="1600" dirty="0"/>
-          </a:p>
-        </p:txBody>
-      </p:sp>
-      <p:sp>
-        <p:nvSpPr>
-          <p:cNvPr id="15" name="Shape 13"/>
-          <p:cNvSpPr/>
-          <p:nvPr/>
-        </p:nvSpPr>
-        <p:spPr>
-          <a:xfrm>
-            <a:off x="1371600" y="3054096"/>
-            <a:ext cx="6400800" cy="502920"/>
-          </a:xfrm>
-          <a:prstGeom prst="rect">
-            <a:avLst>
-              <a:gd name="adj" fmla="val 9091"/>
-            </a:avLst>
-          </a:prstGeom>
-          <a:solidFill>
-            <a:srgbClr val="F9F6F1"/>
-          </a:solidFill>
-          <a:ln w="12700">
-            <a:solidFill>
-              <a:srgbClr val="1A5276"/>
-            </a:solidFill>
-            <a:prstDash val="solid"/>
-          </a:ln>
-          <a:effectLst>
-            <a:outerShdw sx="100000" sy="100000" kx="0" ky="0" algn="bl" rotWithShape="0" blurRad="76200" dist="25400" dir="8100000">
-              <a:srgbClr val="000000">
-                <a:alpha val="10000"/>
-              </a:srgbClr>
-            </a:outerShdw>
-          </a:effectLst>
-        </p:spPr>
-        <p:txBody>
-          <a:bodyPr/>
-          <a:p/>
-        </p:txBody>
-      </p:sp>
-      <p:sp>
-        <p:nvSpPr>
-          <p:cNvPr id="16" name="Text 14"/>
-          <p:cNvSpPr/>
-          <p:nvPr/>
-        </p:nvSpPr>
-        <p:spPr>
-          <a:xfrm>
-            <a:off x="1508760" y="3054096"/>
-            <a:ext cx="365760" cy="502920"/>
-          </a:xfrm>
-          <a:prstGeom prst="rect">
-            <a:avLst/>
-          </a:prstGeom>
-          <a:noFill/>
-          <a:ln/>
-        </p:spPr>
-        <p:txBody>
-          <a:bodyPr wrap="square" rtlCol="0" anchor="ctr"/>
-          <a:lstStyle/>
-          <a:p>
-            <a:pPr indent="0" marL="0">
-              <a:buNone/>
-            </a:pPr>
-            <a:r>
-              <a:rPr lang="en-US" sz="1600" b="1" dirty="0">
-                <a:solidFill>
-                  <a:srgbClr val="1A5276"/>
-                </a:solidFill>
-                <a:latin typeface="Arial" pitchFamily="34" charset="0"/>
-                <a:ea typeface="Arial" pitchFamily="34" charset="-122"/>
-                <a:cs typeface="Arial" pitchFamily="34" charset="-120"/>
-              </a:rPr>
-              <a:t>4</a:t>
-            </a:r>
-            <a:endParaRPr lang="en-US" sz="1600" dirty="0"/>
-          </a:p>
-        </p:txBody>
-      </p:sp>
-      <p:sp>
-        <p:nvSpPr>
-          <p:cNvPr id="17" name="Text 15"/>
-          <p:cNvSpPr/>
-          <p:nvPr/>
-        </p:nvSpPr>
-        <p:spPr>
-          <a:xfrm>
-            <a:off x="1874520" y="3054096"/>
-            <a:ext cx="5760720" cy="502920"/>
-          </a:xfrm>
-          <a:prstGeom prst="rect">
-            <a:avLst/>
-          </a:prstGeom>
-          <a:noFill/>
-          <a:ln/>
-        </p:spPr>
-        <p:txBody>
-          <a:bodyPr wrap="square" rtlCol="0" anchor="ctr"/>
-          <a:lstStyle/>
-          <a:p>
-            <a:pPr indent="0" marL="0">
-              <a:buNone/>
-            </a:pPr>
-            <a:r>
-              <a:rPr lang="en-US" sz="1500" dirty="0">
-                <a:solidFill>
-                  <a:srgbClr val="2D3748"/>
-                </a:solidFill>
-                <a:latin typeface="Arial" pitchFamily="34" charset="0"/>
-                <a:ea typeface="Arial" pitchFamily="34" charset="-122"/>
-                <a:cs typeface="Arial" pitchFamily="34" charset="-120"/>
-              </a:rPr>
-              <a:t>Lees GTK af bij Q*</a:t>
-            </a:r>
-            <a:endParaRPr lang="en-US" sz="1500" dirty="0"/>
-          </a:p>
-        </p:txBody>
-      </p:sp>
-      <p:sp>
-        <p:nvSpPr>
-          <p:cNvPr id="18" name="Text 16"/>
-          <p:cNvSpPr/>
-          <p:nvPr/>
-        </p:nvSpPr>
-        <p:spPr>
-          <a:xfrm>
-            <a:off x="1371600" y="3557016"/>
-            <a:ext cx="6400800" cy="164592"/>
-          </a:xfrm>
-          <a:prstGeom prst="rect">
-            <a:avLst/>
-          </a:prstGeom>
-          <a:noFill/>
-          <a:ln/>
-        </p:spPr>
-        <p:txBody>
-          <a:bodyPr wrap="square" rtlCol="0" anchor="ctr"/>
-          <a:lstStyle/>
-          <a:p>
-            <a:pPr algn="ctr" indent="0" marL="0">
-              <a:buNone/>
-            </a:pPr>
-            <a:r>
-              <a:rPr lang="en-US" sz="1600" b="1" dirty="0">
-                <a:solidFill>
-                  <a:srgbClr val="1A5276"/>
-                </a:solidFill>
-                <a:latin typeface="Arial" pitchFamily="34" charset="0"/>
-                <a:ea typeface="Arial" pitchFamily="34" charset="-122"/>
-                <a:cs typeface="Arial" pitchFamily="34" charset="-120"/>
-              </a:rPr>
-              <a:t>↓</a:t>
-            </a:r>
-            <a:endParaRPr lang="en-US" sz="1600" dirty="0"/>
-          </a:p>
-        </p:txBody>
-      </p:sp>
-      <p:sp>
-        <p:nvSpPr>
-          <p:cNvPr id="19" name="Shape 17"/>
-          <p:cNvSpPr/>
-          <p:nvPr/>
-        </p:nvSpPr>
-        <p:spPr>
-          <a:xfrm>
-            <a:off x="1371600" y="3721608"/>
-            <a:ext cx="6400800" cy="502920"/>
-          </a:xfrm>
-          <a:prstGeom prst="rect">
-            <a:avLst>
-              <a:gd name="adj" fmla="val 9091"/>
-            </a:avLst>
-          </a:prstGeom>
-          <a:solidFill>
-            <a:srgbClr val="1A5276"/>
-          </a:solidFill>
-          <a:ln w="12700">
-            <a:solidFill>
-              <a:srgbClr val="1A5276"/>
-            </a:solidFill>
-            <a:prstDash val="solid"/>
-          </a:ln>
-          <a:effectLst>
-            <a:outerShdw sx="100000" sy="100000" kx="0" ky="0" algn="bl" rotWithShape="0" blurRad="76200" dist="25400" dir="8100000">
-              <a:srgbClr val="000000">
-                <a:alpha val="10000"/>
-              </a:srgbClr>
-            </a:outerShdw>
-          </a:effectLst>
-        </p:spPr>
-        <p:txBody>
-          <a:bodyPr/>
-          <a:p/>
-        </p:txBody>
-      </p:sp>
-      <p:sp>
-        <p:nvSpPr>
-          <p:cNvPr id="20" name="Text 18"/>
-          <p:cNvSpPr/>
-          <p:nvPr/>
-        </p:nvSpPr>
-        <p:spPr>
-          <a:xfrm>
-            <a:off x="1508760" y="3721608"/>
-            <a:ext cx="365760" cy="502920"/>
-          </a:xfrm>
-          <a:prstGeom prst="rect">
-            <a:avLst/>
-          </a:prstGeom>
-          <a:noFill/>
-          <a:ln/>
-        </p:spPr>
-        <p:txBody>
-          <a:bodyPr wrap="square" rtlCol="0" anchor="ctr"/>
-          <a:lstStyle/>
-          <a:p>
-            <a:pPr indent="0" marL="0">
-              <a:buNone/>
-            </a:pPr>
-            <a:r>
-              <a:rPr lang="en-US" sz="1600" b="1" dirty="0">
-                <a:solidFill>
-                  <a:srgbClr val="FFFFFF"/>
-                </a:solidFill>
-                <a:latin typeface="Arial" pitchFamily="34" charset="0"/>
-                <a:ea typeface="Arial" pitchFamily="34" charset="-122"/>
-                <a:cs typeface="Arial" pitchFamily="34" charset="-120"/>
-              </a:rPr>
-              <a:t>5</a:t>
-            </a:r>
-            <a:endParaRPr lang="en-US" sz="1600" dirty="0"/>
-          </a:p>
-        </p:txBody>
-      </p:sp>
-      <p:sp>
-        <p:nvSpPr>
-          <p:cNvPr id="21" name="Text 19"/>
-          <p:cNvSpPr/>
-          <p:nvPr/>
-        </p:nvSpPr>
-        <p:spPr>
-          <a:xfrm>
-            <a:off x="1874520" y="3721608"/>
-            <a:ext cx="5760720" cy="502920"/>
-          </a:xfrm>
-          <a:prstGeom prst="rect">
-            <a:avLst/>
-          </a:prstGeom>
-          <a:noFill/>
-          <a:ln/>
-        </p:spPr>
-        <p:txBody>
-          <a:bodyPr wrap="square" rtlCol="0" anchor="ctr"/>
-          <a:lstStyle/>
-          <a:p>
-            <a:pPr indent="0" marL="0">
-              <a:buNone/>
-            </a:pPr>
-            <a:r>
-              <a:rPr lang="en-US" sz="1500" b="1" dirty="0">
-                <a:solidFill>
-                  <a:srgbClr val="FFFFFF"/>
-                </a:solidFill>
-                <a:latin typeface="Arial" pitchFamily="34" charset="0"/>
-                <a:ea typeface="Arial" pitchFamily="34" charset="-122"/>
-                <a:cs typeface="Arial" pitchFamily="34" charset="-120"/>
-              </a:rPr>
-              <a:t>Winst = (p* − GTK) × Q*</a:t>
-            </a:r>
-            <a:endParaRPr lang="en-US" sz="1500" dirty="0"/>
-          </a:p>
-        </p:txBody>
-      </p:sp>
+      <p:pic>
+        <p:nvPicPr>
+          <p:cNvPr id="3" name="Image 0" descr="preencoded.png">    </p:cNvPr>
+          <p:cNvPicPr>
+            <a:picLocks noChangeAspect="1"/>
+          </p:cNvPicPr>
+          <p:nvPr/>
+        </p:nvPicPr>
+        <p:blipFill>
+          <a:blip r:embed="rId1"/>
+          <a:stretch>
+            <a:fillRect/>
+          </a:stretch>
+        </p:blipFill>
+        <p:spPr>
+          <a:xfrm>
+            <a:off x="685800" y="822960"/>
+            <a:ext cx="7772400" cy="3886200"/>
+          </a:xfrm>
+          <a:prstGeom prst="rect">
+            <a:avLst/>
+          </a:prstGeom>
+        </p:spPr>
+      </p:pic>
     </p:spTree>
   </p:cSld>
   <p:clrMapOvr>
@@ -5693,7 +5723,7 @@
           <a:ln/>
         </p:spPr>
         <p:txBody>
-          <a:bodyPr wrap="square" rtlCol="0" anchor="ctr"/>
+          <a:bodyPr wrap="square" lIns="0" tIns="0" rIns="0" bIns="0" rtlCol="0" anchor="ctr"/>
           <a:lstStyle/>
           <a:p>
             <a:pPr indent="0" marL="0">
@@ -5708,7 +5738,7 @@
                 <a:ea typeface="Arial" pitchFamily="34" charset="-122"/>
                 <a:cs typeface="Arial" pitchFamily="34" charset="-120"/>
               </a:rPr>
-              <a:t>Lange termijn: winst verdwijnt</a:t>
+              <a:t>Winstbepaling: stap voor stap</a:t>
             </a:r>
             <a:endParaRPr lang="en-US" sz="2400" dirty="0"/>
           </a:p>
@@ -5722,23 +5752,16 @@
         </p:nvSpPr>
         <p:spPr>
           <a:xfrm>
-            <a:off x="1828800" y="1051560"/>
-            <a:ext cx="5486400" cy="548640"/>
-          </a:xfrm>
-          <a:prstGeom prst="rect">
-            <a:avLst>
-              <a:gd name="adj" fmla="val 8333"/>
-            </a:avLst>
+            <a:off x="1371600" y="1097280"/>
+            <a:ext cx="6400800" cy="566928"/>
+          </a:xfrm>
+          <a:prstGeom prst="rect">
+            <a:avLst/>
           </a:prstGeom>
           <a:solidFill>
             <a:srgbClr val="F9F6F1"/>
           </a:solidFill>
-          <a:ln w="12700">
-            <a:solidFill>
-              <a:srgbClr val="1A5276"/>
-            </a:solidFill>
-            <a:prstDash val="solid"/>
-          </a:ln>
+          <a:ln/>
           <a:effectLst>
             <a:outerShdw sx="100000" sy="100000" kx="0" ky="0" algn="bl" rotWithShape="0" blurRad="76200" dist="25400" dir="8100000">
               <a:srgbClr val="000000">
@@ -5747,10 +5770,6 @@
             </a:outerShdw>
           </a:effectLst>
         </p:spPr>
-        <p:txBody>
-          <a:bodyPr/>
-          <a:p/>
-        </p:txBody>
       </p:sp>
       <p:sp>
         <p:nvSpPr>
@@ -5760,8 +5779,8 @@
         </p:nvSpPr>
         <p:spPr>
           <a:xfrm>
-            <a:off x="2057400" y="1051560"/>
-            <a:ext cx="5029200" cy="548640"/>
+            <a:off x="1554480" y="1097280"/>
+            <a:ext cx="6035040" cy="566928"/>
           </a:xfrm>
           <a:prstGeom prst="rect">
             <a:avLst/>
@@ -5770,10 +5789,10 @@
           <a:ln/>
         </p:spPr>
         <p:txBody>
-          <a:bodyPr wrap="square" rtlCol="0" anchor="ctr"/>
-          <a:lstStyle/>
-          <a:p>
-            <a:pPr algn="ctr" indent="0" marL="0">
+          <a:bodyPr wrap="square" lIns="0" tIns="0" rIns="0" bIns="0" rtlCol="0" anchor="ctr"/>
+          <a:lstStyle/>
+          <a:p>
+            <a:pPr indent="0" marL="0">
               <a:buNone/>
             </a:pPr>
             <a:r>
@@ -5785,7 +5804,7 @@
                 <a:ea typeface="Arial" pitchFamily="34" charset="-122"/>
                 <a:cs typeface="Arial" pitchFamily="34" charset="-120"/>
               </a:rPr>
-              <a:t>Winst op korte termijn</a:t>
+              <a:t>Stel MO = MK op</a:t>
             </a:r>
             <a:endParaRPr lang="en-US" sz="1600" dirty="0"/>
           </a:p>
@@ -5793,68 +5812,22 @@
       </p:sp>
       <p:sp>
         <p:nvSpPr>
-          <p:cNvPr id="5" name="Text 3"/>
-          <p:cNvSpPr/>
-          <p:nvPr/>
-        </p:nvSpPr>
-        <p:spPr>
-          <a:xfrm>
-            <a:off x="1828800" y="1600200"/>
-            <a:ext cx="5486400" cy="182880"/>
-          </a:xfrm>
-          <a:prstGeom prst="rect">
-            <a:avLst/>
-          </a:prstGeom>
-          <a:noFill/>
-          <a:ln/>
-        </p:spPr>
-        <p:txBody>
-          <a:bodyPr wrap="square" rtlCol="0" anchor="ctr"/>
-          <a:lstStyle/>
-          <a:p>
-            <a:pPr algn="ctr" indent="0" marL="0">
-              <a:buNone/>
-            </a:pPr>
-            <a:r>
-              <a:rPr lang="en-US" sz="1800" b="1" dirty="0">
-                <a:solidFill>
-                  <a:srgbClr val="1A5276"/>
-                </a:solidFill>
-                <a:latin typeface="Arial" pitchFamily="34" charset="0"/>
-                <a:ea typeface="Arial" pitchFamily="34" charset="-122"/>
-                <a:cs typeface="Arial" pitchFamily="34" charset="-120"/>
-              </a:rPr>
-              <a:t>↓</a:t>
-            </a:r>
-            <a:endParaRPr lang="en-US" sz="1800" dirty="0"/>
-          </a:p>
-        </p:txBody>
-      </p:sp>
-      <p:sp>
-        <p:nvSpPr>
-          <p:cNvPr id="6" name="Shape 4"/>
-          <p:cNvSpPr/>
-          <p:nvPr/>
-        </p:nvSpPr>
-        <p:spPr>
-          <a:xfrm>
-            <a:off x="1828800" y="1783080"/>
-            <a:ext cx="5486400" cy="548640"/>
-          </a:xfrm>
-          <a:prstGeom prst="rect">
-            <a:avLst>
-              <a:gd name="adj" fmla="val 8333"/>
-            </a:avLst>
+          <p:cNvPr id="5" name="Shape 3"/>
+          <p:cNvSpPr/>
+          <p:nvPr/>
+        </p:nvSpPr>
+        <p:spPr>
+          <a:xfrm>
+            <a:off x="1371600" y="1773936"/>
+            <a:ext cx="6400800" cy="566928"/>
+          </a:xfrm>
+          <a:prstGeom prst="rect">
+            <a:avLst/>
           </a:prstGeom>
           <a:solidFill>
             <a:srgbClr val="F9F6F1"/>
           </a:solidFill>
-          <a:ln w="12700">
-            <a:solidFill>
-              <a:srgbClr val="1A5276"/>
-            </a:solidFill>
-            <a:prstDash val="solid"/>
-          </a:ln>
+          <a:ln/>
           <a:effectLst>
             <a:outerShdw sx="100000" sy="100000" kx="0" ky="0" algn="bl" rotWithShape="0" blurRad="76200" dist="25400" dir="8100000">
               <a:srgbClr val="000000">
@@ -5863,21 +5836,17 @@
             </a:outerShdw>
           </a:effectLst>
         </p:spPr>
-        <p:txBody>
-          <a:bodyPr/>
-          <a:p/>
-        </p:txBody>
-      </p:sp>
-      <p:sp>
-        <p:nvSpPr>
-          <p:cNvPr id="7" name="Text 5"/>
-          <p:cNvSpPr/>
-          <p:nvPr/>
-        </p:nvSpPr>
-        <p:spPr>
-          <a:xfrm>
-            <a:off x="2057400" y="1783080"/>
-            <a:ext cx="5029200" cy="548640"/>
+      </p:sp>
+      <p:sp>
+        <p:nvSpPr>
+          <p:cNvPr id="6" name="Text 4"/>
+          <p:cNvSpPr/>
+          <p:nvPr/>
+        </p:nvSpPr>
+        <p:spPr>
+          <a:xfrm>
+            <a:off x="1554480" y="1773936"/>
+            <a:ext cx="6035040" cy="566928"/>
           </a:xfrm>
           <a:prstGeom prst="rect">
             <a:avLst/>
@@ -5886,10 +5855,10 @@
           <a:ln/>
         </p:spPr>
         <p:txBody>
-          <a:bodyPr wrap="square" rtlCol="0" anchor="ctr"/>
-          <a:lstStyle/>
-          <a:p>
-            <a:pPr algn="ctr" indent="0" marL="0">
+          <a:bodyPr wrap="square" lIns="0" tIns="0" rIns="0" bIns="0" rtlCol="0" anchor="ctr"/>
+          <a:lstStyle/>
+          <a:p>
+            <a:pPr indent="0" marL="0">
               <a:buNone/>
             </a:pPr>
             <a:r>
@@ -5901,7 +5870,7 @@
                 <a:ea typeface="Arial" pitchFamily="34" charset="-122"/>
                 <a:cs typeface="Arial" pitchFamily="34" charset="-120"/>
               </a:rPr>
-              <a:t>Toetreding nieuwe aanbieders</a:t>
+              <a:t>↓  Los Q* op</a:t>
             </a:r>
             <a:endParaRPr lang="en-US" sz="1600" dirty="0"/>
           </a:p>
@@ -5909,68 +5878,22 @@
       </p:sp>
       <p:sp>
         <p:nvSpPr>
-          <p:cNvPr id="8" name="Text 6"/>
-          <p:cNvSpPr/>
-          <p:nvPr/>
-        </p:nvSpPr>
-        <p:spPr>
-          <a:xfrm>
-            <a:off x="1828800" y="2331720"/>
-            <a:ext cx="5486400" cy="182880"/>
-          </a:xfrm>
-          <a:prstGeom prst="rect">
-            <a:avLst/>
-          </a:prstGeom>
-          <a:noFill/>
-          <a:ln/>
-        </p:spPr>
-        <p:txBody>
-          <a:bodyPr wrap="square" rtlCol="0" anchor="ctr"/>
-          <a:lstStyle/>
-          <a:p>
-            <a:pPr algn="ctr" indent="0" marL="0">
-              <a:buNone/>
-            </a:pPr>
-            <a:r>
-              <a:rPr lang="en-US" sz="1800" b="1" dirty="0">
-                <a:solidFill>
-                  <a:srgbClr val="1A5276"/>
-                </a:solidFill>
-                <a:latin typeface="Arial" pitchFamily="34" charset="0"/>
-                <a:ea typeface="Arial" pitchFamily="34" charset="-122"/>
-                <a:cs typeface="Arial" pitchFamily="34" charset="-120"/>
-              </a:rPr>
-              <a:t>↓</a:t>
-            </a:r>
-            <a:endParaRPr lang="en-US" sz="1800" dirty="0"/>
-          </a:p>
-        </p:txBody>
-      </p:sp>
-      <p:sp>
-        <p:nvSpPr>
-          <p:cNvPr id="9" name="Shape 7"/>
-          <p:cNvSpPr/>
-          <p:nvPr/>
-        </p:nvSpPr>
-        <p:spPr>
-          <a:xfrm>
-            <a:off x="1828800" y="2514600"/>
-            <a:ext cx="5486400" cy="548640"/>
-          </a:xfrm>
-          <a:prstGeom prst="rect">
-            <a:avLst>
-              <a:gd name="adj" fmla="val 8333"/>
-            </a:avLst>
+          <p:cNvPr id="7" name="Shape 5"/>
+          <p:cNvSpPr/>
+          <p:nvPr/>
+        </p:nvSpPr>
+        <p:spPr>
+          <a:xfrm>
+            <a:off x="1371600" y="2450592"/>
+            <a:ext cx="6400800" cy="566928"/>
+          </a:xfrm>
+          <a:prstGeom prst="rect">
+            <a:avLst/>
           </a:prstGeom>
           <a:solidFill>
             <a:srgbClr val="F9F6F1"/>
           </a:solidFill>
-          <a:ln w="12700">
-            <a:solidFill>
-              <a:srgbClr val="1A5276"/>
-            </a:solidFill>
-            <a:prstDash val="solid"/>
-          </a:ln>
+          <a:ln/>
           <a:effectLst>
             <a:outerShdw sx="100000" sy="100000" kx="0" ky="0" algn="bl" rotWithShape="0" blurRad="76200" dist="25400" dir="8100000">
               <a:srgbClr val="000000">
@@ -5979,21 +5902,17 @@
             </a:outerShdw>
           </a:effectLst>
         </p:spPr>
-        <p:txBody>
-          <a:bodyPr/>
-          <a:p/>
-        </p:txBody>
-      </p:sp>
-      <p:sp>
-        <p:nvSpPr>
-          <p:cNvPr id="10" name="Text 8"/>
-          <p:cNvSpPr/>
-          <p:nvPr/>
-        </p:nvSpPr>
-        <p:spPr>
-          <a:xfrm>
-            <a:off x="2057400" y="2514600"/>
-            <a:ext cx="5029200" cy="548640"/>
+      </p:sp>
+      <p:sp>
+        <p:nvSpPr>
+          <p:cNvPr id="8" name="Text 6"/>
+          <p:cNvSpPr/>
+          <p:nvPr/>
+        </p:nvSpPr>
+        <p:spPr>
+          <a:xfrm>
+            <a:off x="1554480" y="2450592"/>
+            <a:ext cx="6035040" cy="566928"/>
           </a:xfrm>
           <a:prstGeom prst="rect">
             <a:avLst/>
@@ -6002,10 +5921,10 @@
           <a:ln/>
         </p:spPr>
         <p:txBody>
-          <a:bodyPr wrap="square" rtlCol="0" anchor="ctr"/>
-          <a:lstStyle/>
-          <a:p>
-            <a:pPr algn="ctr" indent="0" marL="0">
+          <a:bodyPr wrap="square" lIns="0" tIns="0" rIns="0" bIns="0" rtlCol="0" anchor="ctr"/>
+          <a:lstStyle/>
+          <a:p>
+            <a:pPr indent="0" marL="0">
               <a:buNone/>
             </a:pPr>
             <a:r>
@@ -6017,7 +5936,7 @@
                 <a:ea typeface="Arial" pitchFamily="34" charset="-122"/>
                 <a:cs typeface="Arial" pitchFamily="34" charset="-120"/>
               </a:rPr>
-              <a:t>Vraaglijn schuift naar links</a:t>
+              <a:t>↓  Lees p* af op de vraaglijn (V) bij Q*</a:t>
             </a:r>
             <a:endParaRPr lang="en-US" sz="1600" dirty="0"/>
           </a:p>
@@ -6025,68 +5944,22 @@
       </p:sp>
       <p:sp>
         <p:nvSpPr>
-          <p:cNvPr id="11" name="Text 9"/>
-          <p:cNvSpPr/>
-          <p:nvPr/>
-        </p:nvSpPr>
-        <p:spPr>
-          <a:xfrm>
-            <a:off x="1828800" y="3063240"/>
-            <a:ext cx="5486400" cy="182880"/>
-          </a:xfrm>
-          <a:prstGeom prst="rect">
-            <a:avLst/>
-          </a:prstGeom>
-          <a:noFill/>
-          <a:ln/>
-        </p:spPr>
-        <p:txBody>
-          <a:bodyPr wrap="square" rtlCol="0" anchor="ctr"/>
-          <a:lstStyle/>
-          <a:p>
-            <a:pPr algn="ctr" indent="0" marL="0">
-              <a:buNone/>
-            </a:pPr>
-            <a:r>
-              <a:rPr lang="en-US" sz="1800" b="1" dirty="0">
-                <a:solidFill>
-                  <a:srgbClr val="1A5276"/>
-                </a:solidFill>
-                <a:latin typeface="Arial" pitchFamily="34" charset="0"/>
-                <a:ea typeface="Arial" pitchFamily="34" charset="-122"/>
-                <a:cs typeface="Arial" pitchFamily="34" charset="-120"/>
-              </a:rPr>
-              <a:t>↓</a:t>
-            </a:r>
-            <a:endParaRPr lang="en-US" sz="1800" dirty="0"/>
-          </a:p>
-        </p:txBody>
-      </p:sp>
-      <p:sp>
-        <p:nvSpPr>
-          <p:cNvPr id="12" name="Shape 10"/>
-          <p:cNvSpPr/>
-          <p:nvPr/>
-        </p:nvSpPr>
-        <p:spPr>
-          <a:xfrm>
-            <a:off x="1828800" y="3246120"/>
-            <a:ext cx="5486400" cy="548640"/>
-          </a:xfrm>
-          <a:prstGeom prst="rect">
-            <a:avLst>
-              <a:gd name="adj" fmla="val 8333"/>
-            </a:avLst>
-          </a:prstGeom>
-          <a:solidFill>
-            <a:srgbClr val="1A5276"/>
-          </a:solidFill>
-          <a:ln w="12700">
-            <a:solidFill>
-              <a:srgbClr val="1A5276"/>
-            </a:solidFill>
-            <a:prstDash val="solid"/>
-          </a:ln>
+          <p:cNvPr id="9" name="Shape 7"/>
+          <p:cNvSpPr/>
+          <p:nvPr/>
+        </p:nvSpPr>
+        <p:spPr>
+          <a:xfrm>
+            <a:off x="1371600" y="3127248"/>
+            <a:ext cx="6400800" cy="566928"/>
+          </a:xfrm>
+          <a:prstGeom prst="rect">
+            <a:avLst/>
+          </a:prstGeom>
+          <a:solidFill>
+            <a:srgbClr val="F9F6F1"/>
+          </a:solidFill>
+          <a:ln/>
           <a:effectLst>
             <a:outerShdw sx="100000" sy="100000" kx="0" ky="0" algn="bl" rotWithShape="0" blurRad="76200" dist="25400" dir="8100000">
               <a:srgbClr val="000000">
@@ -6095,21 +5968,17 @@
             </a:outerShdw>
           </a:effectLst>
         </p:spPr>
-        <p:txBody>
-          <a:bodyPr/>
-          <a:p/>
-        </p:txBody>
-      </p:sp>
-      <p:sp>
-        <p:nvSpPr>
-          <p:cNvPr id="13" name="Text 11"/>
-          <p:cNvSpPr/>
-          <p:nvPr/>
-        </p:nvSpPr>
-        <p:spPr>
-          <a:xfrm>
-            <a:off x="2057400" y="3246120"/>
-            <a:ext cx="5029200" cy="548640"/>
+      </p:sp>
+      <p:sp>
+        <p:nvSpPr>
+          <p:cNvPr id="10" name="Text 8"/>
+          <p:cNvSpPr/>
+          <p:nvPr/>
+        </p:nvSpPr>
+        <p:spPr>
+          <a:xfrm>
+            <a:off x="1554480" y="3127248"/>
+            <a:ext cx="6035040" cy="566928"/>
           </a:xfrm>
           <a:prstGeom prst="rect">
             <a:avLst/>
@@ -6118,10 +5987,76 @@
           <a:ln/>
         </p:spPr>
         <p:txBody>
-          <a:bodyPr wrap="square" rtlCol="0" anchor="ctr"/>
-          <a:lstStyle/>
-          <a:p>
-            <a:pPr algn="ctr" indent="0" marL="0">
+          <a:bodyPr wrap="square" lIns="0" tIns="0" rIns="0" bIns="0" rtlCol="0" anchor="ctr"/>
+          <a:lstStyle/>
+          <a:p>
+            <a:pPr indent="0" marL="0">
+              <a:buNone/>
+            </a:pPr>
+            <a:r>
+              <a:rPr lang="en-US" sz="1600" dirty="0">
+                <a:solidFill>
+                  <a:srgbClr val="2D3748"/>
+                </a:solidFill>
+                <a:latin typeface="Arial" pitchFamily="34" charset="0"/>
+                <a:ea typeface="Arial" pitchFamily="34" charset="-122"/>
+                <a:cs typeface="Arial" pitchFamily="34" charset="-120"/>
+              </a:rPr>
+              <a:t>↓  Lees GTK af bij Q*</a:t>
+            </a:r>
+            <a:endParaRPr lang="en-US" sz="1600" dirty="0"/>
+          </a:p>
+        </p:txBody>
+      </p:sp>
+      <p:sp>
+        <p:nvSpPr>
+          <p:cNvPr id="11" name="Shape 9"/>
+          <p:cNvSpPr/>
+          <p:nvPr/>
+        </p:nvSpPr>
+        <p:spPr>
+          <a:xfrm>
+            <a:off x="1371600" y="3803904"/>
+            <a:ext cx="6400800" cy="566928"/>
+          </a:xfrm>
+          <a:prstGeom prst="rect">
+            <a:avLst/>
+          </a:prstGeom>
+          <a:solidFill>
+            <a:srgbClr val="1A5276"/>
+          </a:solidFill>
+          <a:ln/>
+          <a:effectLst>
+            <a:outerShdw sx="100000" sy="100000" kx="0" ky="0" algn="bl" rotWithShape="0" blurRad="76200" dist="25400" dir="8100000">
+              <a:srgbClr val="000000">
+                <a:alpha val="10000"/>
+              </a:srgbClr>
+            </a:outerShdw>
+          </a:effectLst>
+        </p:spPr>
+      </p:sp>
+      <p:sp>
+        <p:nvSpPr>
+          <p:cNvPr id="12" name="Text 10"/>
+          <p:cNvSpPr/>
+          <p:nvPr/>
+        </p:nvSpPr>
+        <p:spPr>
+          <a:xfrm>
+            <a:off x="1554480" y="3803904"/>
+            <a:ext cx="6035040" cy="566928"/>
+          </a:xfrm>
+          <a:prstGeom prst="rect">
+            <a:avLst/>
+          </a:prstGeom>
+          <a:noFill/>
+          <a:ln/>
+        </p:spPr>
+        <p:txBody>
+          <a:bodyPr wrap="square" lIns="0" tIns="0" rIns="0" bIns="0" rtlCol="0" anchor="ctr"/>
+          <a:lstStyle/>
+          <a:p>
+            <a:pPr indent="0" marL="0">
               <a:buNone/>
             </a:pPr>
             <a:r>
@@ -6133,48 +6068,9 @@
                 <a:ea typeface="Arial" pitchFamily="34" charset="-122"/>
                 <a:cs typeface="Arial" pitchFamily="34" charset="-120"/>
               </a:rPr>
-              <a:t>Winst = 0 (V raakt GTK)</a:t>
+              <a:t>↓  Winst = (p* − GTK) × Q*</a:t>
             </a:r>
             <a:endParaRPr lang="en-US" sz="1600" dirty="0"/>
-          </a:p>
-        </p:txBody>
-      </p:sp>
-      <p:sp>
-        <p:nvSpPr>
-          <p:cNvPr id="14" name="Text 12"/>
-          <p:cNvSpPr/>
-          <p:nvPr/>
-        </p:nvSpPr>
-        <p:spPr>
-          <a:xfrm>
-            <a:off x="457200" y="4251960"/>
-            <a:ext cx="8229600" cy="411480"/>
-          </a:xfrm>
-          <a:prstGeom prst="rect">
-            <a:avLst/>
-          </a:prstGeom>
-          <a:noFill/>
-          <a:ln/>
-        </p:spPr>
-        <p:txBody>
-          <a:bodyPr wrap="square" rtlCol="0" anchor="ctr"/>
-          <a:lstStyle/>
-          <a:p>
-            <a:pPr algn="l" indent="0" marL="0">
-              <a:buNone/>
-            </a:pPr>
-            <a:r>
-              <a:rPr lang="en-US" sz="1200" i="1" dirty="0">
-                <a:solidFill>
-                  <a:srgbClr val="718096"/>
-                </a:solidFill>
-                <a:latin typeface="Arial" pitchFamily="34" charset="0"/>
-                <a:ea typeface="Arial" pitchFamily="34" charset="-122"/>
-                <a:cs typeface="Arial" pitchFamily="34" charset="-120"/>
-              </a:rPr>
-              <a:t>Omgekeerd: bij verlies treden aanbieders uit → vraaglijn schuift rechts → verlies verdwijnt</a:t>
-            </a:r>
-            <a:endParaRPr lang="en-US" sz="1200" dirty="0"/>
           </a:p>
         </p:txBody>
       </p:sp>
@@ -6221,7 +6117,7 @@
           <a:ln/>
         </p:spPr>
         <p:txBody>
-          <a:bodyPr wrap="square" rtlCol="0" anchor="ctr"/>
+          <a:bodyPr wrap="square" lIns="0" tIns="0" rIns="0" bIns="0" rtlCol="0" anchor="ctr"/>
           <a:lstStyle/>
           <a:p>
             <a:pPr indent="0" marL="0">
@@ -6236,7 +6132,7 @@
                 <a:ea typeface="Arial" pitchFamily="34" charset="-122"/>
                 <a:cs typeface="Arial" pitchFamily="34" charset="-120"/>
               </a:rPr>
-              <a:t>Lange termijn: break-even</a:t>
+              <a:t>Lange termijn: winst verdwijnt</a:t>
             </a:r>
             <a:endParaRPr lang="en-US" sz="2400" dirty="0"/>
           </a:p>
@@ -6250,100 +6146,11 @@
         </p:nvSpPr>
         <p:spPr>
           <a:xfrm>
-            <a:off x="457200" y="1005840"/>
-            <a:ext cx="5029200" cy="3657600"/>
-          </a:xfrm>
-          <a:prstGeom prst="rect">
-            <a:avLst>
-              <a:gd name="adj" fmla="val 1250"/>
-            </a:avLst>
-          </a:prstGeom>
-          <a:solidFill>
-            <a:srgbClr val="F7F8FA"/>
-          </a:solidFill>
-          <a:ln w="6350">
-            <a:solidFill>
-              <a:srgbClr val="CBD5E0"/>
-            </a:solidFill>
-            <a:prstDash val="solid"/>
-          </a:ln>
-        </p:spPr>
-        <p:txBody>
-          <a:bodyPr/>
-          <a:p/>
-        </p:txBody>
-      </p:sp>
-      <p:sp>
-        <p:nvSpPr>
-          <p:cNvPr id="4" name="Text 2"/>
-          <p:cNvSpPr/>
-          <p:nvPr/>
-        </p:nvSpPr>
-        <p:spPr>
-          <a:xfrm>
-            <a:off x="457200" y="2286000"/>
-            <a:ext cx="5029200" cy="1097280"/>
-          </a:xfrm>
-          <a:prstGeom prst="rect">
-            <a:avLst/>
-          </a:prstGeom>
-          <a:noFill/>
-          <a:ln/>
-        </p:spPr>
-        <p:txBody>
-          <a:bodyPr wrap="square" rtlCol="0" anchor="ctr"/>
-          <a:lstStyle/>
-          <a:p>
-            <a:pPr algn="ctr" indent="0" marL="0">
-              <a:buNone/>
-            </a:pPr>
-            <a:r>
-              <a:rPr lang="en-US" sz="1400" i="1" dirty="0">
-                <a:solidFill>
-                  <a:srgbClr val="718096"/>
-                </a:solidFill>
-                <a:latin typeface="Arial" pitchFamily="34" charset="0"/>
-                <a:ea typeface="Arial" pitchFamily="34" charset="-122"/>
-                <a:cs typeface="Arial" pitchFamily="34" charset="-120"/>
-              </a:rPr>
-              <a:t>Grafiek: V raakt GTK</a:t>
-            </a:r>
-            <a:endParaRPr lang="en-US" sz="1400" dirty="0"/>
-          </a:p>
-          <a:p>
-            <a:pPr algn="ctr" indent="0" marL="0">
-              <a:buNone/>
-            </a:pPr>
-            <a:r>
-              <a:rPr lang="en-US" sz="1400" i="1" dirty="0">
-                <a:solidFill>
-                  <a:srgbClr val="718096"/>
-                </a:solidFill>
-                <a:latin typeface="Arial" pitchFamily="34" charset="0"/>
-                <a:ea typeface="Arial" pitchFamily="34" charset="-122"/>
-                <a:cs typeface="Arial" pitchFamily="34" charset="-120"/>
-              </a:rPr>
-              <a:t>p = GTK, winst = 0</a:t>
-            </a:r>
-            <a:endParaRPr lang="en-US" sz="1400" dirty="0"/>
-          </a:p>
-        </p:txBody>
-      </p:sp>
-      <p:sp>
-        <p:nvSpPr>
-          <p:cNvPr id="5" name="Shape 3"/>
-          <p:cNvSpPr/>
-          <p:nvPr/>
-        </p:nvSpPr>
-        <p:spPr>
-          <a:xfrm>
-            <a:off x="5760720" y="1005840"/>
-            <a:ext cx="2926080" cy="3657600"/>
-          </a:xfrm>
-          <a:prstGeom prst="rect">
-            <a:avLst>
-              <a:gd name="adj" fmla="val 1563"/>
-            </a:avLst>
+            <a:off x="1371600" y="1097280"/>
+            <a:ext cx="6400800" cy="566928"/>
+          </a:xfrm>
+          <a:prstGeom prst="rect">
+            <a:avLst/>
           </a:prstGeom>
           <a:solidFill>
             <a:srgbClr val="F9F6F1"/>
@@ -6357,21 +6164,188 @@
             </a:outerShdw>
           </a:effectLst>
         </p:spPr>
-        <p:txBody>
-          <a:bodyPr/>
-          <a:p/>
-        </p:txBody>
-      </p:sp>
-      <p:sp>
-        <p:nvSpPr>
-          <p:cNvPr id="6" name="Shape 4"/>
-          <p:cNvSpPr/>
-          <p:nvPr/>
-        </p:nvSpPr>
-        <p:spPr>
-          <a:xfrm>
-            <a:off x="5760720" y="1005840"/>
-            <a:ext cx="54864" cy="3657600"/>
+      </p:sp>
+      <p:sp>
+        <p:nvSpPr>
+          <p:cNvPr id="4" name="Text 2"/>
+          <p:cNvSpPr/>
+          <p:nvPr/>
+        </p:nvSpPr>
+        <p:spPr>
+          <a:xfrm>
+            <a:off x="1554480" y="1097280"/>
+            <a:ext cx="6035040" cy="566928"/>
+          </a:xfrm>
+          <a:prstGeom prst="rect">
+            <a:avLst/>
+          </a:prstGeom>
+          <a:noFill/>
+          <a:ln/>
+        </p:spPr>
+        <p:txBody>
+          <a:bodyPr wrap="square" lIns="0" tIns="0" rIns="0" bIns="0" rtlCol="0" anchor="ctr"/>
+          <a:lstStyle/>
+          <a:p>
+            <a:pPr indent="0" marL="0">
+              <a:buNone/>
+            </a:pPr>
+            <a:r>
+              <a:rPr lang="en-US" sz="1600" dirty="0">
+                <a:solidFill>
+                  <a:srgbClr val="2D3748"/>
+                </a:solidFill>
+                <a:latin typeface="Arial" pitchFamily="34" charset="0"/>
+                <a:ea typeface="Arial" pitchFamily="34" charset="-122"/>
+                <a:cs typeface="Arial" pitchFamily="34" charset="-120"/>
+              </a:rPr>
+              <a:t>Winst op korte termijn</a:t>
+            </a:r>
+            <a:endParaRPr lang="en-US" sz="1600" dirty="0"/>
+          </a:p>
+        </p:txBody>
+      </p:sp>
+      <p:sp>
+        <p:nvSpPr>
+          <p:cNvPr id="5" name="Shape 3"/>
+          <p:cNvSpPr/>
+          <p:nvPr/>
+        </p:nvSpPr>
+        <p:spPr>
+          <a:xfrm>
+            <a:off x="1371600" y="1773936"/>
+            <a:ext cx="6400800" cy="566928"/>
+          </a:xfrm>
+          <a:prstGeom prst="rect">
+            <a:avLst/>
+          </a:prstGeom>
+          <a:solidFill>
+            <a:srgbClr val="F9F6F1"/>
+          </a:solidFill>
+          <a:ln/>
+          <a:effectLst>
+            <a:outerShdw sx="100000" sy="100000" kx="0" ky="0" algn="bl" rotWithShape="0" blurRad="76200" dist="25400" dir="8100000">
+              <a:srgbClr val="000000">
+                <a:alpha val="10000"/>
+              </a:srgbClr>
+            </a:outerShdw>
+          </a:effectLst>
+        </p:spPr>
+      </p:sp>
+      <p:sp>
+        <p:nvSpPr>
+          <p:cNvPr id="6" name="Text 4"/>
+          <p:cNvSpPr/>
+          <p:nvPr/>
+        </p:nvSpPr>
+        <p:spPr>
+          <a:xfrm>
+            <a:off x="1554480" y="1773936"/>
+            <a:ext cx="6035040" cy="566928"/>
+          </a:xfrm>
+          <a:prstGeom prst="rect">
+            <a:avLst/>
+          </a:prstGeom>
+          <a:noFill/>
+          <a:ln/>
+        </p:spPr>
+        <p:txBody>
+          <a:bodyPr wrap="square" lIns="0" tIns="0" rIns="0" bIns="0" rtlCol="0" anchor="ctr"/>
+          <a:lstStyle/>
+          <a:p>
+            <a:pPr indent="0" marL="0">
+              <a:buNone/>
+            </a:pPr>
+            <a:r>
+              <a:rPr lang="en-US" sz="1600" dirty="0">
+                <a:solidFill>
+                  <a:srgbClr val="2D3748"/>
+                </a:solidFill>
+                <a:latin typeface="Arial" pitchFamily="34" charset="0"/>
+                <a:ea typeface="Arial" pitchFamily="34" charset="-122"/>
+                <a:cs typeface="Arial" pitchFamily="34" charset="-120"/>
+              </a:rPr>
+              <a:t>↓  Toetreding nieuwe aanbieders</a:t>
+            </a:r>
+            <a:endParaRPr lang="en-US" sz="1600" dirty="0"/>
+          </a:p>
+        </p:txBody>
+      </p:sp>
+      <p:sp>
+        <p:nvSpPr>
+          <p:cNvPr id="7" name="Shape 5"/>
+          <p:cNvSpPr/>
+          <p:nvPr/>
+        </p:nvSpPr>
+        <p:spPr>
+          <a:xfrm>
+            <a:off x="1371600" y="2450592"/>
+            <a:ext cx="6400800" cy="566928"/>
+          </a:xfrm>
+          <a:prstGeom prst="rect">
+            <a:avLst/>
+          </a:prstGeom>
+          <a:solidFill>
+            <a:srgbClr val="F9F6F1"/>
+          </a:solidFill>
+          <a:ln/>
+          <a:effectLst>
+            <a:outerShdw sx="100000" sy="100000" kx="0" ky="0" algn="bl" rotWithShape="0" blurRad="76200" dist="25400" dir="8100000">
+              <a:srgbClr val="000000">
+                <a:alpha val="10000"/>
+              </a:srgbClr>
+            </a:outerShdw>
+          </a:effectLst>
+        </p:spPr>
+      </p:sp>
+      <p:sp>
+        <p:nvSpPr>
+          <p:cNvPr id="8" name="Text 6"/>
+          <p:cNvSpPr/>
+          <p:nvPr/>
+        </p:nvSpPr>
+        <p:spPr>
+          <a:xfrm>
+            <a:off x="1554480" y="2450592"/>
+            <a:ext cx="6035040" cy="566928"/>
+          </a:xfrm>
+          <a:prstGeom prst="rect">
+            <a:avLst/>
+          </a:prstGeom>
+          <a:noFill/>
+          <a:ln/>
+        </p:spPr>
+        <p:txBody>
+          <a:bodyPr wrap="square" lIns="0" tIns="0" rIns="0" bIns="0" rtlCol="0" anchor="ctr"/>
+          <a:lstStyle/>
+          <a:p>
+            <a:pPr indent="0" marL="0">
+              <a:buNone/>
+            </a:pPr>
+            <a:r>
+              <a:rPr lang="en-US" sz="1600" dirty="0">
+                <a:solidFill>
+                  <a:srgbClr val="2D3748"/>
+                </a:solidFill>
+                <a:latin typeface="Arial" pitchFamily="34" charset="0"/>
+                <a:ea typeface="Arial" pitchFamily="34" charset="-122"/>
+                <a:cs typeface="Arial" pitchFamily="34" charset="-120"/>
+              </a:rPr>
+              <a:t>↓  Vraaglijn schuift naar links</a:t>
+            </a:r>
+            <a:endParaRPr lang="en-US" sz="1600" dirty="0"/>
+          </a:p>
+        </p:txBody>
+      </p:sp>
+      <p:sp>
+        <p:nvSpPr>
+          <p:cNvPr id="9" name="Shape 7"/>
+          <p:cNvSpPr/>
+          <p:nvPr/>
+        </p:nvSpPr>
+        <p:spPr>
+          <a:xfrm>
+            <a:off x="1371600" y="3127248"/>
+            <a:ext cx="6400800" cy="566928"/>
           </a:xfrm>
           <a:prstGeom prst="rect">
             <a:avLst/>
@@ -6380,22 +6354,25 @@
             <a:srgbClr val="1A5276"/>
           </a:solidFill>
           <a:ln/>
-        </p:spPr>
-        <p:txBody>
-          <a:bodyPr/>
-          <a:p/>
-        </p:txBody>
-      </p:sp>
-      <p:sp>
-        <p:nvSpPr>
-          <p:cNvPr id="7" name="Text 5"/>
-          <p:cNvSpPr/>
-          <p:nvPr/>
-        </p:nvSpPr>
-        <p:spPr>
-          <a:xfrm>
-            <a:off x="5943600" y="1143000"/>
-            <a:ext cx="2606040" cy="365760"/>
+          <a:effectLst>
+            <a:outerShdw sx="100000" sy="100000" kx="0" ky="0" algn="bl" rotWithShape="0" blurRad="76200" dist="25400" dir="8100000">
+              <a:srgbClr val="000000">
+                <a:alpha val="10000"/>
+              </a:srgbClr>
+            </a:outerShdw>
+          </a:effectLst>
+        </p:spPr>
+      </p:sp>
+      <p:sp>
+        <p:nvSpPr>
+          <p:cNvPr id="10" name="Text 8"/>
+          <p:cNvSpPr/>
+          <p:nvPr/>
+        </p:nvSpPr>
+        <p:spPr>
+          <a:xfrm>
+            <a:off x="1554480" y="3127248"/>
+            <a:ext cx="6035040" cy="566928"/>
           </a:xfrm>
           <a:prstGeom prst="rect">
             <a:avLst/>
@@ -6404,37 +6381,77 @@
           <a:ln/>
         </p:spPr>
         <p:txBody>
-          <a:bodyPr wrap="square" rtlCol="0" anchor="t"/>
+          <a:bodyPr wrap="square" lIns="0" tIns="0" rIns="0" bIns="0" rtlCol="0" anchor="ctr"/>
           <a:lstStyle/>
           <a:p>
             <a:pPr indent="0" marL="0">
               <a:buNone/>
             </a:pPr>
             <a:r>
-              <a:rPr lang="en-US" sz="2000" b="1" dirty="0">
-                <a:solidFill>
-                  <a:srgbClr val="1A5276"/>
-                </a:solidFill>
-                <a:latin typeface="Arial" pitchFamily="34" charset="0"/>
-                <a:ea typeface="Arial" pitchFamily="34" charset="-122"/>
-                <a:cs typeface="Arial" pitchFamily="34" charset="-120"/>
-              </a:rPr>
-              <a:t>Break-even</a:t>
-            </a:r>
-            <a:endParaRPr lang="en-US" sz="2000" dirty="0"/>
-          </a:p>
-        </p:txBody>
-      </p:sp>
-      <p:sp>
-        <p:nvSpPr>
-          <p:cNvPr id="8" name="Text 6"/>
-          <p:cNvSpPr/>
-          <p:nvPr/>
-        </p:nvSpPr>
-        <p:spPr>
-          <a:xfrm>
-            <a:off x="5943600" y="1554480"/>
-            <a:ext cx="2606040" cy="2971800"/>
+              <a:rPr lang="en-US" sz="1600" b="1" dirty="0">
+                <a:solidFill>
+                  <a:srgbClr val="FFFFFF"/>
+                </a:solidFill>
+                <a:latin typeface="Arial" pitchFamily="34" charset="0"/>
+                <a:ea typeface="Arial" pitchFamily="34" charset="-122"/>
+                <a:cs typeface="Arial" pitchFamily="34" charset="-120"/>
+              </a:rPr>
+              <a:t>↓  Winst = 0 (vraaglijn raakt GTK)</a:t>
+            </a:r>
+            <a:endParaRPr lang="en-US" sz="1600" dirty="0"/>
+          </a:p>
+        </p:txBody>
+      </p:sp>
+      <p:sp>
+        <p:nvSpPr>
+          <p:cNvPr id="11" name="Shape 9"/>
+          <p:cNvSpPr/>
+          <p:nvPr/>
+        </p:nvSpPr>
+        <p:spPr>
+          <a:xfrm>
+            <a:off x="457200" y="3931920"/>
+            <a:ext cx="8229600" cy="548640"/>
+          </a:xfrm>
+          <a:prstGeom prst="rect">
+            <a:avLst/>
+          </a:prstGeom>
+          <a:solidFill>
+            <a:srgbClr val="F7F8FA"/>
+          </a:solidFill>
+          <a:ln/>
+        </p:spPr>
+      </p:sp>
+      <p:sp>
+        <p:nvSpPr>
+          <p:cNvPr id="12" name="Shape 10"/>
+          <p:cNvSpPr/>
+          <p:nvPr/>
+        </p:nvSpPr>
+        <p:spPr>
+          <a:xfrm>
+            <a:off x="457200" y="3931920"/>
+            <a:ext cx="54864" cy="548640"/>
+          </a:xfrm>
+          <a:prstGeom prst="rect">
+            <a:avLst/>
+          </a:prstGeom>
+          <a:solidFill>
+            <a:srgbClr val="E67E22"/>
+          </a:solidFill>
+          <a:ln/>
+        </p:spPr>
+      </p:sp>
+      <p:sp>
+        <p:nvSpPr>
+          <p:cNvPr id="13" name="Text 11"/>
+          <p:cNvSpPr/>
+          <p:nvPr/>
+        </p:nvSpPr>
+        <p:spPr>
+          <a:xfrm>
+            <a:off x="731520" y="3931920"/>
+            <a:ext cx="7772400" cy="548640"/>
           </a:xfrm>
           <a:prstGeom prst="rect">
             <a:avLst/>
@@ -6443,13 +6460,10 @@
           <a:ln/>
         </p:spPr>
         <p:txBody>
-          <a:bodyPr wrap="square" rtlCol="0" anchor="t"/>
-          <a:lstStyle/>
-          <a:p>
-            <a:pPr algn="l" indent="0" marL="0">
-              <a:lnSpc>
-                <a:spcPct val="115000"/>
-              </a:lnSpc>
+          <a:bodyPr wrap="square" lIns="0" tIns="0" rIns="0" bIns="0" rtlCol="0" anchor="ctr"/>
+          <a:lstStyle/>
+          <a:p>
+            <a:pPr indent="0" marL="0">
               <a:buNone/>
             </a:pPr>
             <a:r>
@@ -6461,61 +6475,7 @@
                 <a:ea typeface="Arial" pitchFamily="34" charset="-122"/>
                 <a:cs typeface="Arial" pitchFamily="34" charset="-120"/>
               </a:rPr>
-              <a:t>De vraaglijn raakt de GTK-curve
-</a:t>
-            </a:r>
-            <a:pPr algn="l" indent="0" marL="0">
-              <a:lnSpc>
-                <a:spcPct val="115000"/>
-              </a:lnSpc>
-              <a:buNone/>
-            </a:pPr>
-            <a:r>
-              <a:rPr lang="en-US" sz="1600" b="1" dirty="0">
-                <a:solidFill>
-                  <a:srgbClr val="1A5276"/>
-                </a:solidFill>
-                <a:latin typeface="Arial" pitchFamily="34" charset="0"/>
-                <a:ea typeface="Arial" pitchFamily="34" charset="-122"/>
-                <a:cs typeface="Arial" pitchFamily="34" charset="-120"/>
-              </a:rPr>
-              <a:t>p = GTK
-</a:t>
-            </a:r>
-            <a:pPr algn="l" indent="0" marL="0">
-              <a:lnSpc>
-                <a:spcPct val="115000"/>
-              </a:lnSpc>
-              <a:buNone/>
-            </a:pPr>
-            <a:r>
-              <a:rPr lang="en-US" sz="1600" b="1" dirty="0">
-                <a:solidFill>
-                  <a:srgbClr val="1A5276"/>
-                </a:solidFill>
-                <a:latin typeface="Arial" pitchFamily="34" charset="0"/>
-                <a:ea typeface="Arial" pitchFamily="34" charset="-122"/>
-                <a:cs typeface="Arial" pitchFamily="34" charset="-120"/>
-              </a:rPr>
-              <a:t>Winst = 0
-</a:t>
-            </a:r>
-            <a:pPr algn="l" indent="0" marL="0">
-              <a:lnSpc>
-                <a:spcPct val="115000"/>
-              </a:lnSpc>
-              <a:buNone/>
-            </a:pPr>
-            <a:r>
-              <a:rPr lang="en-US" sz="1300" b="1" dirty="0">
-                <a:solidFill>
-                  <a:srgbClr val="D9534F"/>
-                </a:solidFill>
-                <a:latin typeface="Arial" pitchFamily="34" charset="0"/>
-                <a:ea typeface="Arial" pitchFamily="34" charset="-122"/>
-                <a:cs typeface="Arial" pitchFamily="34" charset="-120"/>
-              </a:rPr>
-              <a:t>Maar: prijs is HOGER dan bij volkomen concurrentie</a:t>
+              <a:t>Omgekeerd: bij verlies treden aanbieders uit → vraaglijn schuift rechts → verlies verdwijnt</a:t>
             </a:r>
             <a:endParaRPr lang="en-US" sz="1400" dirty="0"/>
           </a:p>
@@ -6564,7 +6524,7 @@
           <a:ln/>
         </p:spPr>
         <p:txBody>
-          <a:bodyPr wrap="square" rtlCol="0" anchor="ctr"/>
+          <a:bodyPr wrap="square" lIns="0" tIns="0" rIns="0" bIns="0" rtlCol="0" anchor="ctr"/>
           <a:lstStyle/>
           <a:p>
             <a:pPr indent="0" marL="0">
@@ -6579,443 +6539,36 @@
                 <a:ea typeface="Arial" pitchFamily="34" charset="-122"/>
                 <a:cs typeface="Arial" pitchFamily="34" charset="-120"/>
               </a:rPr>
-              <a:t>MC vs. volkomen concurrentie</a:t>
+              <a:t>Lange termijn: break-even grafiek</a:t>
             </a:r>
             <a:endParaRPr lang="en-US" sz="2400" dirty="0"/>
           </a:p>
         </p:txBody>
       </p:sp>
-      <p:sp>
-        <p:nvSpPr>
-          <p:cNvPr id="3" name="Shape 1"/>
-          <p:cNvSpPr/>
-          <p:nvPr/>
-        </p:nvSpPr>
-        <p:spPr>
-          <a:xfrm>
-            <a:off x="457200" y="1005840"/>
-            <a:ext cx="3931920" cy="3291840"/>
-          </a:xfrm>
-          <a:prstGeom prst="rect">
-            <a:avLst>
-              <a:gd name="adj" fmla="val 1389"/>
-            </a:avLst>
-          </a:prstGeom>
-          <a:solidFill>
-            <a:srgbClr val="E8F8F0"/>
-          </a:solidFill>
-          <a:ln/>
-          <a:effectLst>
-            <a:outerShdw sx="100000" sy="100000" kx="0" ky="0" algn="bl" rotWithShape="0" blurRad="76200" dist="25400" dir="8100000">
-              <a:srgbClr val="000000">
-                <a:alpha val="10000"/>
-              </a:srgbClr>
-            </a:outerShdw>
-          </a:effectLst>
-        </p:spPr>
-        <p:txBody>
-          <a:bodyPr/>
-          <a:p/>
-        </p:txBody>
-      </p:sp>
-      <p:sp>
-        <p:nvSpPr>
-          <p:cNvPr id="4" name="Shape 2"/>
-          <p:cNvSpPr/>
-          <p:nvPr/>
-        </p:nvSpPr>
-        <p:spPr>
-          <a:xfrm>
-            <a:off x="457200" y="1005840"/>
-            <a:ext cx="54864" cy="3291840"/>
-          </a:xfrm>
-          <a:prstGeom prst="rect">
-            <a:avLst/>
-          </a:prstGeom>
-          <a:solidFill>
-            <a:srgbClr val="1E8449"/>
-          </a:solidFill>
-          <a:ln/>
-        </p:spPr>
-        <p:txBody>
-          <a:bodyPr/>
-          <a:p/>
-        </p:txBody>
-      </p:sp>
-      <p:sp>
-        <p:nvSpPr>
-          <p:cNvPr id="5" name="Text 3"/>
-          <p:cNvSpPr/>
-          <p:nvPr/>
-        </p:nvSpPr>
-        <p:spPr>
-          <a:xfrm>
-            <a:off x="640080" y="1143000"/>
-            <a:ext cx="3611880" cy="365760"/>
-          </a:xfrm>
-          <a:prstGeom prst="rect">
-            <a:avLst/>
-          </a:prstGeom>
-          <a:noFill/>
-          <a:ln/>
-        </p:spPr>
-        <p:txBody>
-          <a:bodyPr wrap="square" rtlCol="0" anchor="t"/>
-          <a:lstStyle/>
-          <a:p>
-            <a:pPr indent="0" marL="0">
-              <a:buNone/>
-            </a:pPr>
-            <a:r>
-              <a:rPr lang="en-US" sz="2000" b="1" dirty="0">
-                <a:solidFill>
-                  <a:srgbClr val="1E8449"/>
-                </a:solidFill>
-                <a:latin typeface="Arial" pitchFamily="34" charset="0"/>
-                <a:ea typeface="Arial" pitchFamily="34" charset="-122"/>
-                <a:cs typeface="Arial" pitchFamily="34" charset="-120"/>
-              </a:rPr>
-              <a:t>Volkomen concurrentie</a:t>
-            </a:r>
-            <a:endParaRPr lang="en-US" sz="2000" dirty="0"/>
-          </a:p>
-        </p:txBody>
-      </p:sp>
-      <p:sp>
-        <p:nvSpPr>
-          <p:cNvPr id="6" name="Text 4"/>
-          <p:cNvSpPr/>
-          <p:nvPr/>
-        </p:nvSpPr>
-        <p:spPr>
-          <a:xfrm>
-            <a:off x="640080" y="1554480"/>
-            <a:ext cx="3611880" cy="2606040"/>
-          </a:xfrm>
-          <a:prstGeom prst="rect">
-            <a:avLst/>
-          </a:prstGeom>
-          <a:noFill/>
-          <a:ln/>
-        </p:spPr>
-        <p:txBody>
-          <a:bodyPr wrap="square" rtlCol="0" anchor="t"/>
-          <a:lstStyle/>
-          <a:p>
-            <a:pPr algn="l" marL="342900" indent="-342900">
-              <a:lnSpc>
-                <a:spcPct val="115000"/>
-              </a:lnSpc>
-              <a:buSzPct val="100000"/>
-              <a:buChar char="•"/>
-            </a:pPr>
-            <a:r>
-              <a:rPr lang="en-US" sz="1400" dirty="0">
-                <a:solidFill>
-                  <a:srgbClr val="2D3748"/>
-                </a:solidFill>
-                <a:latin typeface="Arial" pitchFamily="34" charset="0"/>
-                <a:ea typeface="Arial" pitchFamily="34" charset="-122"/>
-                <a:cs typeface="Arial" pitchFamily="34" charset="-120"/>
-              </a:rPr>
-              <a:t>Horizontale vraaglijn
-</a:t>
-            </a:r>
-            <a:pPr algn="l" marL="342900" indent="-342900">
-              <a:lnSpc>
-                <a:spcPct val="115000"/>
-              </a:lnSpc>
-              <a:buSzPct val="100000"/>
-              <a:buChar char="•"/>
-            </a:pPr>
-            <a:r>
-              <a:rPr lang="en-US" sz="1400" dirty="0">
-                <a:solidFill>
-                  <a:srgbClr val="2D3748"/>
-                </a:solidFill>
-                <a:latin typeface="Arial" pitchFamily="34" charset="0"/>
-                <a:ea typeface="Arial" pitchFamily="34" charset="-122"/>
-                <a:cs typeface="Arial" pitchFamily="34" charset="-120"/>
-              </a:rPr>
-              <a:t>Productie bij GTK-minimum
-</a:t>
-            </a:r>
-            <a:pPr algn="l" marL="342900" indent="-342900">
-              <a:lnSpc>
-                <a:spcPct val="115000"/>
-              </a:lnSpc>
-              <a:buSzPct val="100000"/>
-              <a:buChar char="•"/>
-            </a:pPr>
-            <a:r>
-              <a:rPr lang="en-US" sz="1400" dirty="0">
-                <a:solidFill>
-                  <a:srgbClr val="2D3748"/>
-                </a:solidFill>
-                <a:latin typeface="Arial" pitchFamily="34" charset="0"/>
-                <a:ea typeface="Arial" pitchFamily="34" charset="-122"/>
-                <a:cs typeface="Arial" pitchFamily="34" charset="-120"/>
-              </a:rPr>
-              <a:t>Laagste prijs voor consument
-</a:t>
-            </a:r>
-            <a:pPr algn="l" marL="342900" indent="-342900">
-              <a:lnSpc>
-                <a:spcPct val="115000"/>
-              </a:lnSpc>
-              <a:buSzPct val="100000"/>
-              <a:buChar char="•"/>
-            </a:pPr>
-            <a:r>
-              <a:rPr lang="en-US" sz="1400" dirty="0">
-                <a:solidFill>
-                  <a:srgbClr val="2D3748"/>
-                </a:solidFill>
-                <a:latin typeface="Arial" pitchFamily="34" charset="0"/>
-                <a:ea typeface="Arial" pitchFamily="34" charset="-122"/>
-                <a:cs typeface="Arial" pitchFamily="34" charset="-120"/>
-              </a:rPr>
-              <a:t>Geen overcapaciteit</a:t>
-            </a:r>
-            <a:endParaRPr lang="en-US" sz="1400" dirty="0"/>
-          </a:p>
-        </p:txBody>
-      </p:sp>
-      <p:sp>
-        <p:nvSpPr>
-          <p:cNvPr id="7" name="Shape 5"/>
-          <p:cNvSpPr/>
-          <p:nvPr/>
-        </p:nvSpPr>
-        <p:spPr>
-          <a:xfrm>
-            <a:off x="4754880" y="1005840"/>
-            <a:ext cx="3931920" cy="3291840"/>
-          </a:xfrm>
-          <a:prstGeom prst="rect">
-            <a:avLst>
-              <a:gd name="adj" fmla="val 1389"/>
-            </a:avLst>
-          </a:prstGeom>
-          <a:solidFill>
-            <a:srgbClr val="EBF5FB"/>
-          </a:solidFill>
-          <a:ln/>
-          <a:effectLst>
-            <a:outerShdw sx="100000" sy="100000" kx="0" ky="0" algn="bl" rotWithShape="0" blurRad="76200" dist="25400" dir="8100000">
-              <a:srgbClr val="000000">
-                <a:alpha val="10000"/>
-              </a:srgbClr>
-            </a:outerShdw>
-          </a:effectLst>
-        </p:spPr>
-        <p:txBody>
-          <a:bodyPr/>
-          <a:p/>
-        </p:txBody>
-      </p:sp>
-      <p:sp>
-        <p:nvSpPr>
-          <p:cNvPr id="8" name="Shape 6"/>
-          <p:cNvSpPr/>
-          <p:nvPr/>
-        </p:nvSpPr>
-        <p:spPr>
-          <a:xfrm>
-            <a:off x="4754880" y="1005840"/>
-            <a:ext cx="54864" cy="3291840"/>
-          </a:xfrm>
-          <a:prstGeom prst="rect">
-            <a:avLst/>
-          </a:prstGeom>
-          <a:solidFill>
-            <a:srgbClr val="1A5276"/>
-          </a:solidFill>
-          <a:ln/>
-        </p:spPr>
-        <p:txBody>
-          <a:bodyPr/>
-          <a:p/>
-        </p:txBody>
-      </p:sp>
-      <p:sp>
-        <p:nvSpPr>
-          <p:cNvPr id="9" name="Text 7"/>
-          <p:cNvSpPr/>
-          <p:nvPr/>
-        </p:nvSpPr>
-        <p:spPr>
-          <a:xfrm>
-            <a:off x="4937760" y="1143000"/>
-            <a:ext cx="3611880" cy="365760"/>
-          </a:xfrm>
-          <a:prstGeom prst="rect">
-            <a:avLst/>
-          </a:prstGeom>
-          <a:noFill/>
-          <a:ln/>
-        </p:spPr>
-        <p:txBody>
-          <a:bodyPr wrap="square" rtlCol="0" anchor="t"/>
-          <a:lstStyle/>
-          <a:p>
-            <a:pPr indent="0" marL="0">
-              <a:buNone/>
-            </a:pPr>
-            <a:r>
-              <a:rPr lang="en-US" sz="2000" b="1" dirty="0">
-                <a:solidFill>
-                  <a:srgbClr val="1A5276"/>
-                </a:solidFill>
-                <a:latin typeface="Arial" pitchFamily="34" charset="0"/>
-                <a:ea typeface="Arial" pitchFamily="34" charset="-122"/>
-                <a:cs typeface="Arial" pitchFamily="34" charset="-120"/>
-              </a:rPr>
-              <a:t>Monopolistische concurrentie</a:t>
-            </a:r>
-            <a:endParaRPr lang="en-US" sz="2000" dirty="0"/>
-          </a:p>
-        </p:txBody>
-      </p:sp>
-      <p:sp>
-        <p:nvSpPr>
-          <p:cNvPr id="10" name="Text 8"/>
-          <p:cNvSpPr/>
-          <p:nvPr/>
-        </p:nvSpPr>
-        <p:spPr>
-          <a:xfrm>
-            <a:off x="4937760" y="1554480"/>
-            <a:ext cx="3611880" cy="2606040"/>
-          </a:xfrm>
-          <a:prstGeom prst="rect">
-            <a:avLst/>
-          </a:prstGeom>
-          <a:noFill/>
-          <a:ln/>
-        </p:spPr>
-        <p:txBody>
-          <a:bodyPr wrap="square" rtlCol="0" anchor="t"/>
-          <a:lstStyle/>
-          <a:p>
-            <a:pPr algn="l" marL="342900" indent="-342900">
-              <a:lnSpc>
-                <a:spcPct val="115000"/>
-              </a:lnSpc>
-              <a:buSzPct val="100000"/>
-              <a:buChar char="•"/>
-            </a:pPr>
-            <a:r>
-              <a:rPr lang="en-US" sz="1400" dirty="0">
-                <a:solidFill>
-                  <a:srgbClr val="2D3748"/>
-                </a:solidFill>
-                <a:latin typeface="Arial" pitchFamily="34" charset="0"/>
-                <a:ea typeface="Arial" pitchFamily="34" charset="-122"/>
-                <a:cs typeface="Arial" pitchFamily="34" charset="-120"/>
-              </a:rPr>
-              <a:t>Dalende vraaglijn
-</a:t>
-            </a:r>
-            <a:pPr algn="l" marL="342900" indent="-342900">
-              <a:lnSpc>
-                <a:spcPct val="115000"/>
-              </a:lnSpc>
-              <a:buSzPct val="100000"/>
-              <a:buChar char="•"/>
-            </a:pPr>
-            <a:r>
-              <a:rPr lang="en-US" sz="1400" dirty="0">
-                <a:solidFill>
-                  <a:srgbClr val="2D3748"/>
-                </a:solidFill>
-                <a:latin typeface="Arial" pitchFamily="34" charset="0"/>
-                <a:ea typeface="Arial" pitchFamily="34" charset="-122"/>
-                <a:cs typeface="Arial" pitchFamily="34" charset="-120"/>
-              </a:rPr>
-              <a:t>Productie links van GTK-min.
-</a:t>
-            </a:r>
-            <a:pPr algn="l" marL="342900" indent="-342900">
-              <a:lnSpc>
-                <a:spcPct val="115000"/>
-              </a:lnSpc>
-              <a:buSzPct val="100000"/>
-              <a:buChar char="•"/>
-            </a:pPr>
-            <a:r>
-              <a:rPr lang="en-US" sz="1400" dirty="0">
-                <a:solidFill>
-                  <a:srgbClr val="2D3748"/>
-                </a:solidFill>
-                <a:latin typeface="Arial" pitchFamily="34" charset="0"/>
-                <a:ea typeface="Arial" pitchFamily="34" charset="-122"/>
-                <a:cs typeface="Arial" pitchFamily="34" charset="-120"/>
-              </a:rPr>
-              <a:t>Hogere prijs
-</a:t>
-            </a:r>
-            <a:pPr algn="l" marL="342900" indent="-342900">
-              <a:lnSpc>
-                <a:spcPct val="115000"/>
-              </a:lnSpc>
-              <a:buSzPct val="100000"/>
-              <a:buChar char="•"/>
-            </a:pPr>
-            <a:r>
-              <a:rPr lang="en-US" sz="1400" b="1" dirty="0">
-                <a:solidFill>
-                  <a:srgbClr val="D9534F"/>
-                </a:solidFill>
-                <a:latin typeface="Arial" pitchFamily="34" charset="0"/>
-                <a:ea typeface="Arial" pitchFamily="34" charset="-122"/>
-                <a:cs typeface="Arial" pitchFamily="34" charset="-120"/>
-              </a:rPr>
-              <a:t>Overcapaciteit (= inefficiëntie)</a:t>
-            </a:r>
-            <a:endParaRPr lang="en-US" sz="1400" dirty="0"/>
-          </a:p>
-        </p:txBody>
-      </p:sp>
-      <p:sp>
-        <p:nvSpPr>
-          <p:cNvPr id="11" name="Text 9"/>
-          <p:cNvSpPr/>
-          <p:nvPr/>
-        </p:nvSpPr>
-        <p:spPr>
-          <a:xfrm>
-            <a:off x="457200" y="4434840"/>
-            <a:ext cx="8229600" cy="365760"/>
-          </a:xfrm>
-          <a:prstGeom prst="rect">
-            <a:avLst/>
-          </a:prstGeom>
-          <a:noFill/>
-          <a:ln/>
-        </p:spPr>
-        <p:txBody>
-          <a:bodyPr wrap="square" rtlCol="0" anchor="ctr"/>
-          <a:lstStyle/>
-          <a:p>
-            <a:pPr algn="ctr" indent="0" marL="0">
-              <a:buNone/>
-            </a:pPr>
-            <a:r>
-              <a:rPr lang="en-US" sz="1300" i="1" dirty="0">
-                <a:solidFill>
-                  <a:srgbClr val="718096"/>
-                </a:solidFill>
-                <a:latin typeface="Arial" pitchFamily="34" charset="0"/>
-                <a:ea typeface="Arial" pitchFamily="34" charset="-122"/>
-                <a:cs typeface="Arial" pitchFamily="34" charset="-120"/>
-              </a:rPr>
-              <a:t>Beide: op lange termijn geen winst</a:t>
-            </a:r>
-            <a:endParaRPr lang="en-US" sz="1300" dirty="0"/>
-          </a:p>
-        </p:txBody>
-      </p:sp>
+      <p:pic>
+        <p:nvPicPr>
+          <p:cNvPr id="3" name="Image 0" descr="preencoded.png">    </p:cNvPr>
+          <p:cNvPicPr>
+            <a:picLocks noChangeAspect="1"/>
+          </p:cNvPicPr>
+          <p:nvPr/>
+        </p:nvPicPr>
+        <p:blipFill>
+          <a:blip r:embed="rId1"/>
+          <a:stretch>
+            <a:fillRect/>
+          </a:stretch>
+        </p:blipFill>
+        <p:spPr>
+          <a:xfrm>
+            <a:off x="685800" y="822960"/>
+            <a:ext cx="7772400" cy="3886200"/>
+          </a:xfrm>
+          <a:prstGeom prst="rect">
+            <a:avLst/>
+          </a:prstGeom>
+        </p:spPr>
+      </p:pic>
     </p:spTree>
   </p:cSld>
   <p:clrMapOvr>
